--- a/presentation/LLMOps-Framework-Technical.pptx
+++ b/presentation/LLMOps-Framework-Technical.pptx
@@ -4,25 +4,28 @@
   <p:sldMasterIdLst>
     <p:sldMasterId id="2147483648" r:id="rId1"/>
   </p:sldMasterIdLst>
+  <p:notesMasterIdLst>
+    <p:notesMasterId r:id="rId18"/>
+  </p:notesMasterIdLst>
   <p:sldIdLst>
-    <p:sldId id="256" r:id="rId7"/>
-    <p:sldId id="257" r:id="rId9"/>
-    <p:sldId id="258" r:id="rId10"/>
-    <p:sldId id="259" r:id="rId11"/>
-    <p:sldId id="260" r:id="rId12"/>
-    <p:sldId id="261" r:id="rId13"/>
-    <p:sldId id="262" r:id="rId14"/>
-    <p:sldId id="263" r:id="rId15"/>
-    <p:sldId id="264" r:id="rId16"/>
-    <p:sldId id="265" r:id="rId17"/>
-    <p:sldId id="266" r:id="rId18"/>
-    <p:sldId id="267" r:id="rId19"/>
-    <p:sldId id="268" r:id="rId20"/>
-    <p:sldId id="269" r:id="rId21"/>
-    <p:sldId id="270" r:id="rId22"/>
-    <p:sldId id="271" r:id="rId23"/>
+    <p:sldId id="256" r:id="rId2"/>
+    <p:sldId id="257" r:id="rId3"/>
+    <p:sldId id="258" r:id="rId4"/>
+    <p:sldId id="259" r:id="rId5"/>
+    <p:sldId id="260" r:id="rId6"/>
+    <p:sldId id="261" r:id="rId7"/>
+    <p:sldId id="262" r:id="rId8"/>
+    <p:sldId id="263" r:id="rId9"/>
+    <p:sldId id="264" r:id="rId10"/>
+    <p:sldId id="265" r:id="rId11"/>
+    <p:sldId id="266" r:id="rId12"/>
+    <p:sldId id="267" r:id="rId13"/>
+    <p:sldId id="268" r:id="rId14"/>
+    <p:sldId id="269" r:id="rId15"/>
+    <p:sldId id="270" r:id="rId16"/>
+    <p:sldId id="271" r:id="rId17"/>
   </p:sldIdLst>
-  <p:sldSz cx="12191695" cy="6858000" type="screen4x3"/>
+  <p:sldSz cx="12192000" cy="6858000"/>
   <p:notesSz cx="6858000" cy="9144000"/>
   <p:defaultTextStyle>
     <a:defPPr>
@@ -119,11 +122,27 @@
       </a:defRPr>
     </a:lvl9pPr>
   </p:defaultTextStyle>
+  <p:extLst>
+    <p:ext uri="{EFAFB233-063F-42B5-8137-9DF3F51BA10A}">
+      <p15:sldGuideLst xmlns:p15="http://schemas.microsoft.com/office/powerpoint/2012/main">
+        <p15:guide id="1" orient="horz" pos="2160">
+          <p15:clr>
+            <a:srgbClr val="A4A3A4"/>
+          </p15:clr>
+        </p15:guide>
+        <p15:guide id="2" pos="2880">
+          <p15:clr>
+            <a:srgbClr val="A4A3A4"/>
+          </p15:clr>
+        </p15:guide>
+      </p15:sldGuideLst>
+    </p:ext>
+  </p:extLst>
 </p:presentation>
 </file>
 
 <file path=ppt/notesMasters/notesMaster1.xml><?xml version="1.0" encoding="utf-8"?>
-<p:notesMaster xmlns:a="http://schemas.openxmlformats.org/drawingml/2006/main" xmlns:p="http://schemas.openxmlformats.org/presentationml/2006/main" xmlns:r="http://schemas.openxmlformats.org/officeDocument/2006/relationships">
+<p:notesMaster xmlns:a="http://schemas.openxmlformats.org/drawingml/2006/main" xmlns:r="http://schemas.openxmlformats.org/officeDocument/2006/relationships" xmlns:p="http://schemas.openxmlformats.org/presentationml/2006/main">
   <p:cSld>
     <p:bg>
       <p:bgRef idx="1001">
@@ -144,241 +163,16 @@
           <a:chExt cx="0" cy="0"/>
         </a:xfrm>
       </p:grpSpPr>
-      <p:sp>
-        <p:nvSpPr>
-          <p:cNvPr id="2" name="Header Placeholder 1"/>
-          <p:cNvSpPr>
-            <a:spLocks noGrp="1"/>
-          </p:cNvSpPr>
-          <p:nvPr>
-            <p:ph type="hdr" sz="quarter"/>
-          </p:nvPr>
-        </p:nvSpPr>
-        <p:spPr>
-          <a:xfrm>
-            <a:off x="0" y="0"/>
-            <a:ext cx="2971800" cy="457200"/>
-          </a:xfrm>
-          <a:prstGeom prst="rect">
-            <a:avLst/>
-          </a:prstGeom>
-        </p:spPr>
-        <p:txBody>
-          <a:bodyPr vert="horz" lIns="91440" tIns="45720" rIns="91440" bIns="45720" rtlCol="0"/>
-          <a:lstStyle>
-            <a:lvl1pPr algn="l">
-              <a:defRPr sz="1200"/>
-            </a:lvl1pPr>
-          </a:lstStyle>
-          <a:p>
-            <a:endParaRPr lang="en-US"/>
-          </a:p>
-        </p:txBody>
-      </p:sp>
-      <p:sp>
-        <p:nvSpPr>
-          <p:cNvPr id="3" name="Date Placeholder 2"/>
-          <p:cNvSpPr>
-            <a:spLocks noGrp="1"/>
-          </p:cNvSpPr>
-          <p:nvPr>
-            <p:ph type="dt" idx="1"/>
-          </p:nvPr>
-        </p:nvSpPr>
-        <p:spPr>
-          <a:xfrm>
-            <a:off x="3884613" y="0"/>
-            <a:ext cx="2971800" cy="457200"/>
-          </a:xfrm>
-          <a:prstGeom prst="rect">
-            <a:avLst/>
-          </a:prstGeom>
-        </p:spPr>
-        <p:txBody>
-          <a:bodyPr vert="horz" lIns="91440" tIns="45720" rIns="91440" bIns="45720" rtlCol="0"/>
-          <a:lstStyle>
-            <a:lvl1pPr algn="r">
-              <a:defRPr sz="1200"/>
-            </a:lvl1pPr>
-          </a:lstStyle>
-          <a:p>
-            <a:fld id="{0F89C1C7-3DCD-1040-A9CF-14679D8B5DDD}" type="datetimeFigureOut">
-              <a:rPr lang="en-US" smtClean="0"/>
-              <a:t>10/17/16</a:t>
-            </a:fld>
-            <a:endParaRPr lang="en-US"/>
-          </a:p>
-        </p:txBody>
-      </p:sp>
-      <p:sp>
-        <p:nvSpPr>
-          <p:cNvPr id="4" name="Slide Image Placeholder 3"/>
-          <p:cNvSpPr>
-            <a:spLocks noGrp="1" noRot="1" noChangeAspect="1"/>
-          </p:cNvSpPr>
-          <p:nvPr>
-            <p:ph type="sldImg" idx="2"/>
-          </p:nvPr>
-        </p:nvSpPr>
-        <p:spPr>
-          <a:xfrm>
-            <a:off x="1143000" y="685800"/>
-            <a:ext cx="4572000" cy="3429000"/>
-          </a:xfrm>
-          <a:prstGeom prst="rect">
-            <a:avLst/>
-          </a:prstGeom>
-          <a:noFill/>
-          <a:ln w="12700">
-            <a:solidFill>
-              <a:prstClr val="black"/>
-            </a:solidFill>
-          </a:ln>
-        </p:spPr>
-        <p:txBody>
-          <a:bodyPr vert="horz" lIns="91440" tIns="45720" rIns="91440" bIns="45720" rtlCol="0" anchor="ctr"/>
-          <a:lstStyle/>
-          <a:p>
-            <a:endParaRPr lang="en-US"/>
-          </a:p>
-        </p:txBody>
-      </p:sp>
-      <p:sp>
-        <p:nvSpPr>
-          <p:cNvPr id="5" name="Notes Placeholder 4"/>
-          <p:cNvSpPr>
-            <a:spLocks noGrp="1"/>
-          </p:cNvSpPr>
-          <p:nvPr>
-            <p:ph type="body" sz="quarter" idx="3"/>
-          </p:nvPr>
-        </p:nvSpPr>
-        <p:spPr>
-          <a:xfrm>
-            <a:off x="685800" y="4343400"/>
-            <a:ext cx="5486400" cy="4114800"/>
-          </a:xfrm>
-          <a:prstGeom prst="rect">
-            <a:avLst/>
-          </a:prstGeom>
-        </p:spPr>
-        <p:txBody>
-          <a:bodyPr vert="horz" lIns="91440" tIns="45720" rIns="91440" bIns="45720" rtlCol="0"/>
-          <a:lstStyle/>
-          <a:p>
-            <a:pPr lvl="0"/>
-            <a:r>
-              <a:rPr lang="en-US" smtClean="0"/>
-              <a:t>Click to edit Master text styles</a:t>
-            </a:r>
-          </a:p>
-          <a:p>
-            <a:pPr lvl="1"/>
-            <a:r>
-              <a:rPr lang="en-US" smtClean="0"/>
-              <a:t>Second level</a:t>
-            </a:r>
-          </a:p>
-          <a:p>
-            <a:pPr lvl="2"/>
-            <a:r>
-              <a:rPr lang="en-US" smtClean="0"/>
-              <a:t>Third level</a:t>
-            </a:r>
-          </a:p>
-          <a:p>
-            <a:pPr lvl="3"/>
-            <a:r>
-              <a:rPr lang="en-US" smtClean="0"/>
-              <a:t>Fourth level</a:t>
-            </a:r>
-          </a:p>
-          <a:p>
-            <a:pPr lvl="4"/>
-            <a:r>
-              <a:rPr lang="en-US" smtClean="0"/>
-              <a:t>Fifth level</a:t>
-            </a:r>
-            <a:endParaRPr lang="en-US"/>
-          </a:p>
-        </p:txBody>
-      </p:sp>
-      <p:sp>
-        <p:nvSpPr>
-          <p:cNvPr id="6" name="Footer Placeholder 5"/>
-          <p:cNvSpPr>
-            <a:spLocks noGrp="1"/>
-          </p:cNvSpPr>
-          <p:nvPr>
-            <p:ph type="ftr" sz="quarter" idx="4"/>
-          </p:nvPr>
-        </p:nvSpPr>
-        <p:spPr>
-          <a:xfrm>
-            <a:off x="0" y="8685213"/>
-            <a:ext cx="2971800" cy="457200"/>
-          </a:xfrm>
-          <a:prstGeom prst="rect">
-            <a:avLst/>
-          </a:prstGeom>
-        </p:spPr>
-        <p:txBody>
-          <a:bodyPr vert="horz" lIns="91440" tIns="45720" rIns="91440" bIns="45720" rtlCol="0" anchor="b"/>
-          <a:lstStyle>
-            <a:lvl1pPr algn="l">
-              <a:defRPr sz="1200"/>
-            </a:lvl1pPr>
-          </a:lstStyle>
-          <a:p>
-            <a:endParaRPr lang="en-US"/>
-          </a:p>
-        </p:txBody>
-      </p:sp>
-      <p:sp>
-        <p:nvSpPr>
-          <p:cNvPr id="7" name="Slide Number Placeholder 6"/>
-          <p:cNvSpPr>
-            <a:spLocks noGrp="1"/>
-          </p:cNvSpPr>
-          <p:nvPr>
-            <p:ph type="sldNum" sz="quarter" idx="5"/>
-          </p:nvPr>
-        </p:nvSpPr>
-        <p:spPr>
-          <a:xfrm>
-            <a:off x="3884613" y="8685213"/>
-            <a:ext cx="2971800" cy="457200"/>
-          </a:xfrm>
-          <a:prstGeom prst="rect">
-            <a:avLst/>
-          </a:prstGeom>
-        </p:spPr>
-        <p:txBody>
-          <a:bodyPr vert="horz" lIns="91440" tIns="45720" rIns="91440" bIns="45720" rtlCol="0" anchor="b"/>
-          <a:lstStyle>
-            <a:lvl1pPr algn="r">
-              <a:defRPr sz="1200"/>
-            </a:lvl1pPr>
-          </a:lstStyle>
-          <a:p>
-            <a:fld id="{BB5E49A5-4136-284D-997B-48E1D791AD67}" type="slidenum">
-              <a:rPr lang="en-US" smtClean="0"/>
-              <a:t>‹#›</a:t>
-            </a:fld>
-            <a:endParaRPr lang="en-US"/>
-          </a:p>
-        </p:txBody>
-      </p:sp>
     </p:spTree>
     <p:extLst>
       <p:ext uri="{BB962C8B-B14F-4D97-AF65-F5344CB8AC3E}">
-        <p14:creationId xmlns:p14="http://schemas.microsoft.com/office/powerpoint/2010/main" val="2623252185"/>
+        <p14:creationId xmlns:p14="http://schemas.microsoft.com/office/powerpoint/2010/main" val="1616116753"/>
       </p:ext>
     </p:extLst>
   </p:cSld>
   <p:clrMap bg1="lt1" tx1="dk1" bg2="lt2" tx2="dk2" accent1="accent1" accent2="accent2" accent3="accent3" accent4="accent4" accent5="accent5" accent6="accent6" hlink="hlink" folHlink="folHlink"/>
   <p:notesStyle>
-    <a:lvl1pPr marL="0" algn="l" defTabSz="457200" rtl="0" eaLnBrk="1" latinLnBrk="0" hangingPunct="1">
+    <a:lvl1pPr marL="0" algn="l" defTabSz="914400" rtl="0" eaLnBrk="1" latinLnBrk="0" hangingPunct="1">
       <a:defRPr sz="1200" kern="1200">
         <a:solidFill>
           <a:schemeClr val="tx1"/>
@@ -388,7 +182,7 @@
         <a:cs typeface="+mn-cs"/>
       </a:defRPr>
     </a:lvl1pPr>
-    <a:lvl2pPr marL="457200" algn="l" defTabSz="457200" rtl="0" eaLnBrk="1" latinLnBrk="0" hangingPunct="1">
+    <a:lvl2pPr marL="457200" algn="l" defTabSz="914400" rtl="0" eaLnBrk="1" latinLnBrk="0" hangingPunct="1">
       <a:defRPr sz="1200" kern="1200">
         <a:solidFill>
           <a:schemeClr val="tx1"/>
@@ -398,7 +192,7 @@
         <a:cs typeface="+mn-cs"/>
       </a:defRPr>
     </a:lvl2pPr>
-    <a:lvl3pPr marL="914400" algn="l" defTabSz="457200" rtl="0" eaLnBrk="1" latinLnBrk="0" hangingPunct="1">
+    <a:lvl3pPr marL="914400" algn="l" defTabSz="914400" rtl="0" eaLnBrk="1" latinLnBrk="0" hangingPunct="1">
       <a:defRPr sz="1200" kern="1200">
         <a:solidFill>
           <a:schemeClr val="tx1"/>
@@ -408,7 +202,7 @@
         <a:cs typeface="+mn-cs"/>
       </a:defRPr>
     </a:lvl3pPr>
-    <a:lvl4pPr marL="1371600" algn="l" defTabSz="457200" rtl="0" eaLnBrk="1" latinLnBrk="0" hangingPunct="1">
+    <a:lvl4pPr marL="1371600" algn="l" defTabSz="914400" rtl="0" eaLnBrk="1" latinLnBrk="0" hangingPunct="1">
       <a:defRPr sz="1200" kern="1200">
         <a:solidFill>
           <a:schemeClr val="tx1"/>
@@ -418,7 +212,7 @@
         <a:cs typeface="+mn-cs"/>
       </a:defRPr>
     </a:lvl4pPr>
-    <a:lvl5pPr marL="1828800" algn="l" defTabSz="457200" rtl="0" eaLnBrk="1" latinLnBrk="0" hangingPunct="1">
+    <a:lvl5pPr marL="1828800" algn="l" defTabSz="914400" rtl="0" eaLnBrk="1" latinLnBrk="0" hangingPunct="1">
       <a:defRPr sz="1200" kern="1200">
         <a:solidFill>
           <a:schemeClr val="tx1"/>
@@ -428,7 +222,7 @@
         <a:cs typeface="+mn-cs"/>
       </a:defRPr>
     </a:lvl5pPr>
-    <a:lvl6pPr marL="2286000" algn="l" defTabSz="457200" rtl="0" eaLnBrk="1" latinLnBrk="0" hangingPunct="1">
+    <a:lvl6pPr marL="2286000" algn="l" defTabSz="914400" rtl="0" eaLnBrk="1" latinLnBrk="0" hangingPunct="1">
       <a:defRPr sz="1200" kern="1200">
         <a:solidFill>
           <a:schemeClr val="tx1"/>
@@ -438,7 +232,7 @@
         <a:cs typeface="+mn-cs"/>
       </a:defRPr>
     </a:lvl6pPr>
-    <a:lvl7pPr marL="2743200" algn="l" defTabSz="457200" rtl="0" eaLnBrk="1" latinLnBrk="0" hangingPunct="1">
+    <a:lvl7pPr marL="2743200" algn="l" defTabSz="914400" rtl="0" eaLnBrk="1" latinLnBrk="0" hangingPunct="1">
       <a:defRPr sz="1200" kern="1200">
         <a:solidFill>
           <a:schemeClr val="tx1"/>
@@ -448,7 +242,7 @@
         <a:cs typeface="+mn-cs"/>
       </a:defRPr>
     </a:lvl7pPr>
-    <a:lvl8pPr marL="3200400" algn="l" defTabSz="457200" rtl="0" eaLnBrk="1" latinLnBrk="0" hangingPunct="1">
+    <a:lvl8pPr marL="3200400" algn="l" defTabSz="914400" rtl="0" eaLnBrk="1" latinLnBrk="0" hangingPunct="1">
       <a:defRPr sz="1200" kern="1200">
         <a:solidFill>
           <a:schemeClr val="tx1"/>
@@ -458,7 +252,7 @@
         <a:cs typeface="+mn-cs"/>
       </a:defRPr>
     </a:lvl8pPr>
-    <a:lvl9pPr marL="3657600" algn="l" defTabSz="457200" rtl="0" eaLnBrk="1" latinLnBrk="0" hangingPunct="1">
+    <a:lvl9pPr marL="3657600" algn="l" defTabSz="914400" rtl="0" eaLnBrk="1" latinLnBrk="0" hangingPunct="1">
       <a:defRPr sz="1200" kern="1200">
         <a:solidFill>
           <a:schemeClr val="tx1"/>
@@ -473,7 +267,7 @@
 </file>
 
 <file path=ppt/notesSlides/notesSlide1.xml><?xml version="1.0" encoding="utf-8"?>
-<p:notes xmlns:a="http://schemas.openxmlformats.org/drawingml/2006/main" xmlns:p="http://schemas.openxmlformats.org/presentationml/2006/main" xmlns:r="http://schemas.openxmlformats.org/officeDocument/2006/relationships">
+<p:notes xmlns:a="http://schemas.openxmlformats.org/drawingml/2006/main" xmlns:r="http://schemas.openxmlformats.org/officeDocument/2006/relationships" xmlns:p="http://schemas.openxmlformats.org/presentationml/2006/main">
   <p:cSld>
     <p:spTree>
       <p:nvGrpSpPr>
@@ -493,7 +287,7 @@
         <p:nvSpPr>
           <p:cNvPr id="2" name="Slide Image Placeholder 1"/>
           <p:cNvSpPr>
-            <a:spLocks noGrp="1"/>
+            <a:spLocks noGrp="1" noRot="1" noChangeAspect="1"/>
           </p:cNvSpPr>
           <p:nvPr>
             <p:ph type="sldImg" idx="2"/>
@@ -508,7 +302,7 @@
             <a:spLocks noGrp="1"/>
           </p:cNvSpPr>
           <p:nvPr>
-            <p:ph type="body" idx="3" sz="quarter"/>
+            <p:ph type="body" sz="quarter" idx="3"/>
           </p:nvPr>
         </p:nvSpPr>
         <p:spPr/>
@@ -529,7 +323,7 @@
             <a:spLocks noGrp="1"/>
           </p:cNvSpPr>
           <p:nvPr>
-            <p:ph type="sldNum" idx="5" sz="quarter"/>
+            <p:ph type="sldNum" sz="quarter" idx="5"/>
           </p:nvPr>
         </p:nvSpPr>
         <p:spPr/>
@@ -543,7 +337,7 @@
 </file>
 
 <file path=ppt/notesSlides/notesSlide10.xml><?xml version="1.0" encoding="utf-8"?>
-<p:notes xmlns:a="http://schemas.openxmlformats.org/drawingml/2006/main" xmlns:p="http://schemas.openxmlformats.org/presentationml/2006/main" xmlns:r="http://schemas.openxmlformats.org/officeDocument/2006/relationships">
+<p:notes xmlns:a="http://schemas.openxmlformats.org/drawingml/2006/main" xmlns:r="http://schemas.openxmlformats.org/officeDocument/2006/relationships" xmlns:p="http://schemas.openxmlformats.org/presentationml/2006/main">
   <p:cSld>
     <p:spTree>
       <p:nvGrpSpPr>
@@ -563,7 +357,7 @@
         <p:nvSpPr>
           <p:cNvPr id="2" name="Slide Image Placeholder 1"/>
           <p:cNvSpPr>
-            <a:spLocks noGrp="1"/>
+            <a:spLocks noGrp="1" noRot="1" noChangeAspect="1"/>
           </p:cNvSpPr>
           <p:nvPr>
             <p:ph type="sldImg" idx="2"/>
@@ -578,7 +372,7 @@
             <a:spLocks noGrp="1"/>
           </p:cNvSpPr>
           <p:nvPr>
-            <p:ph type="body" idx="3" sz="quarter"/>
+            <p:ph type="body" sz="quarter" idx="3"/>
           </p:nvPr>
         </p:nvSpPr>
         <p:spPr/>
@@ -599,7 +393,7 @@
             <a:spLocks noGrp="1"/>
           </p:cNvSpPr>
           <p:nvPr>
-            <p:ph type="sldNum" idx="5" sz="quarter"/>
+            <p:ph type="sldNum" sz="quarter" idx="5"/>
           </p:nvPr>
         </p:nvSpPr>
         <p:spPr/>
@@ -613,7 +407,7 @@
 </file>
 
 <file path=ppt/notesSlides/notesSlide11.xml><?xml version="1.0" encoding="utf-8"?>
-<p:notes xmlns:a="http://schemas.openxmlformats.org/drawingml/2006/main" xmlns:p="http://schemas.openxmlformats.org/presentationml/2006/main" xmlns:r="http://schemas.openxmlformats.org/officeDocument/2006/relationships">
+<p:notes xmlns:a="http://schemas.openxmlformats.org/drawingml/2006/main" xmlns:r="http://schemas.openxmlformats.org/officeDocument/2006/relationships" xmlns:p="http://schemas.openxmlformats.org/presentationml/2006/main">
   <p:cSld>
     <p:spTree>
       <p:nvGrpSpPr>
@@ -633,7 +427,7 @@
         <p:nvSpPr>
           <p:cNvPr id="2" name="Slide Image Placeholder 1"/>
           <p:cNvSpPr>
-            <a:spLocks noGrp="1"/>
+            <a:spLocks noGrp="1" noRot="1" noChangeAspect="1"/>
           </p:cNvSpPr>
           <p:nvPr>
             <p:ph type="sldImg" idx="2"/>
@@ -648,7 +442,7 @@
             <a:spLocks noGrp="1"/>
           </p:cNvSpPr>
           <p:nvPr>
-            <p:ph type="body" idx="3" sz="quarter"/>
+            <p:ph type="body" sz="quarter" idx="3"/>
           </p:nvPr>
         </p:nvSpPr>
         <p:spPr/>
@@ -669,7 +463,7 @@
             <a:spLocks noGrp="1"/>
           </p:cNvSpPr>
           <p:nvPr>
-            <p:ph type="sldNum" idx="5" sz="quarter"/>
+            <p:ph type="sldNum" sz="quarter" idx="5"/>
           </p:nvPr>
         </p:nvSpPr>
         <p:spPr/>
@@ -683,7 +477,7 @@
 </file>
 
 <file path=ppt/notesSlides/notesSlide12.xml><?xml version="1.0" encoding="utf-8"?>
-<p:notes xmlns:a="http://schemas.openxmlformats.org/drawingml/2006/main" xmlns:p="http://schemas.openxmlformats.org/presentationml/2006/main" xmlns:r="http://schemas.openxmlformats.org/officeDocument/2006/relationships">
+<p:notes xmlns:a="http://schemas.openxmlformats.org/drawingml/2006/main" xmlns:r="http://schemas.openxmlformats.org/officeDocument/2006/relationships" xmlns:p="http://schemas.openxmlformats.org/presentationml/2006/main">
   <p:cSld>
     <p:spTree>
       <p:nvGrpSpPr>
@@ -703,7 +497,7 @@
         <p:nvSpPr>
           <p:cNvPr id="2" name="Slide Image Placeholder 1"/>
           <p:cNvSpPr>
-            <a:spLocks noGrp="1"/>
+            <a:spLocks noGrp="1" noRot="1" noChangeAspect="1"/>
           </p:cNvSpPr>
           <p:nvPr>
             <p:ph type="sldImg" idx="2"/>
@@ -718,7 +512,7 @@
             <a:spLocks noGrp="1"/>
           </p:cNvSpPr>
           <p:nvPr>
-            <p:ph type="body" idx="3" sz="quarter"/>
+            <p:ph type="body" sz="quarter" idx="3"/>
           </p:nvPr>
         </p:nvSpPr>
         <p:spPr/>
@@ -739,7 +533,7 @@
             <a:spLocks noGrp="1"/>
           </p:cNvSpPr>
           <p:nvPr>
-            <p:ph type="sldNum" idx="5" sz="quarter"/>
+            <p:ph type="sldNum" sz="quarter" idx="5"/>
           </p:nvPr>
         </p:nvSpPr>
         <p:spPr/>
@@ -753,7 +547,7 @@
 </file>
 
 <file path=ppt/notesSlides/notesSlide13.xml><?xml version="1.0" encoding="utf-8"?>
-<p:notes xmlns:a="http://schemas.openxmlformats.org/drawingml/2006/main" xmlns:p="http://schemas.openxmlformats.org/presentationml/2006/main" xmlns:r="http://schemas.openxmlformats.org/officeDocument/2006/relationships">
+<p:notes xmlns:a="http://schemas.openxmlformats.org/drawingml/2006/main" xmlns:r="http://schemas.openxmlformats.org/officeDocument/2006/relationships" xmlns:p="http://schemas.openxmlformats.org/presentationml/2006/main">
   <p:cSld>
     <p:spTree>
       <p:nvGrpSpPr>
@@ -773,7 +567,7 @@
         <p:nvSpPr>
           <p:cNvPr id="2" name="Slide Image Placeholder 1"/>
           <p:cNvSpPr>
-            <a:spLocks noGrp="1"/>
+            <a:spLocks noGrp="1" noRot="1" noChangeAspect="1"/>
           </p:cNvSpPr>
           <p:nvPr>
             <p:ph type="sldImg" idx="2"/>
@@ -788,7 +582,7 @@
             <a:spLocks noGrp="1"/>
           </p:cNvSpPr>
           <p:nvPr>
-            <p:ph type="body" idx="3" sz="quarter"/>
+            <p:ph type="body" sz="quarter" idx="3"/>
           </p:nvPr>
         </p:nvSpPr>
         <p:spPr/>
@@ -809,7 +603,7 @@
             <a:spLocks noGrp="1"/>
           </p:cNvSpPr>
           <p:nvPr>
-            <p:ph type="sldNum" idx="5" sz="quarter"/>
+            <p:ph type="sldNum" sz="quarter" idx="5"/>
           </p:nvPr>
         </p:nvSpPr>
         <p:spPr/>
@@ -823,7 +617,7 @@
 </file>
 
 <file path=ppt/notesSlides/notesSlide14.xml><?xml version="1.0" encoding="utf-8"?>
-<p:notes xmlns:a="http://schemas.openxmlformats.org/drawingml/2006/main" xmlns:p="http://schemas.openxmlformats.org/presentationml/2006/main" xmlns:r="http://schemas.openxmlformats.org/officeDocument/2006/relationships">
+<p:notes xmlns:a="http://schemas.openxmlformats.org/drawingml/2006/main" xmlns:r="http://schemas.openxmlformats.org/officeDocument/2006/relationships" xmlns:p="http://schemas.openxmlformats.org/presentationml/2006/main">
   <p:cSld>
     <p:spTree>
       <p:nvGrpSpPr>
@@ -843,7 +637,7 @@
         <p:nvSpPr>
           <p:cNvPr id="2" name="Slide Image Placeholder 1"/>
           <p:cNvSpPr>
-            <a:spLocks noGrp="1"/>
+            <a:spLocks noGrp="1" noRot="1" noChangeAspect="1"/>
           </p:cNvSpPr>
           <p:nvPr>
             <p:ph type="sldImg" idx="2"/>
@@ -858,7 +652,7 @@
             <a:spLocks noGrp="1"/>
           </p:cNvSpPr>
           <p:nvPr>
-            <p:ph type="body" idx="3" sz="quarter"/>
+            <p:ph type="body" sz="quarter" idx="3"/>
           </p:nvPr>
         </p:nvSpPr>
         <p:spPr/>
@@ -879,7 +673,7 @@
             <a:spLocks noGrp="1"/>
           </p:cNvSpPr>
           <p:nvPr>
-            <p:ph type="sldNum" idx="5" sz="quarter"/>
+            <p:ph type="sldNum" sz="quarter" idx="5"/>
           </p:nvPr>
         </p:nvSpPr>
         <p:spPr/>
@@ -893,7 +687,7 @@
 </file>
 
 <file path=ppt/notesSlides/notesSlide15.xml><?xml version="1.0" encoding="utf-8"?>
-<p:notes xmlns:a="http://schemas.openxmlformats.org/drawingml/2006/main" xmlns:p="http://schemas.openxmlformats.org/presentationml/2006/main" xmlns:r="http://schemas.openxmlformats.org/officeDocument/2006/relationships">
+<p:notes xmlns:a="http://schemas.openxmlformats.org/drawingml/2006/main" xmlns:r="http://schemas.openxmlformats.org/officeDocument/2006/relationships" xmlns:p="http://schemas.openxmlformats.org/presentationml/2006/main">
   <p:cSld>
     <p:spTree>
       <p:nvGrpSpPr>
@@ -913,7 +707,7 @@
         <p:nvSpPr>
           <p:cNvPr id="2" name="Slide Image Placeholder 1"/>
           <p:cNvSpPr>
-            <a:spLocks noGrp="1"/>
+            <a:spLocks noGrp="1" noRot="1" noChangeAspect="1"/>
           </p:cNvSpPr>
           <p:nvPr>
             <p:ph type="sldImg" idx="2"/>
@@ -928,7 +722,7 @@
             <a:spLocks noGrp="1"/>
           </p:cNvSpPr>
           <p:nvPr>
-            <p:ph type="body" idx="3" sz="quarter"/>
+            <p:ph type="body" sz="quarter" idx="3"/>
           </p:nvPr>
         </p:nvSpPr>
         <p:spPr/>
@@ -949,7 +743,7 @@
             <a:spLocks noGrp="1"/>
           </p:cNvSpPr>
           <p:nvPr>
-            <p:ph type="sldNum" idx="5" sz="quarter"/>
+            <p:ph type="sldNum" sz="quarter" idx="5"/>
           </p:nvPr>
         </p:nvSpPr>
         <p:spPr/>
@@ -963,7 +757,7 @@
 </file>
 
 <file path=ppt/notesSlides/notesSlide16.xml><?xml version="1.0" encoding="utf-8"?>
-<p:notes xmlns:a="http://schemas.openxmlformats.org/drawingml/2006/main" xmlns:p="http://schemas.openxmlformats.org/presentationml/2006/main" xmlns:r="http://schemas.openxmlformats.org/officeDocument/2006/relationships">
+<p:notes xmlns:a="http://schemas.openxmlformats.org/drawingml/2006/main" xmlns:r="http://schemas.openxmlformats.org/officeDocument/2006/relationships" xmlns:p="http://schemas.openxmlformats.org/presentationml/2006/main">
   <p:cSld>
     <p:spTree>
       <p:nvGrpSpPr>
@@ -983,7 +777,7 @@
         <p:nvSpPr>
           <p:cNvPr id="2" name="Slide Image Placeholder 1"/>
           <p:cNvSpPr>
-            <a:spLocks noGrp="1"/>
+            <a:spLocks noGrp="1" noRot="1" noChangeAspect="1"/>
           </p:cNvSpPr>
           <p:nvPr>
             <p:ph type="sldImg" idx="2"/>
@@ -998,7 +792,7 @@
             <a:spLocks noGrp="1"/>
           </p:cNvSpPr>
           <p:nvPr>
-            <p:ph type="body" idx="3" sz="quarter"/>
+            <p:ph type="body" sz="quarter" idx="3"/>
           </p:nvPr>
         </p:nvSpPr>
         <p:spPr/>
@@ -1019,7 +813,7 @@
             <a:spLocks noGrp="1"/>
           </p:cNvSpPr>
           <p:nvPr>
-            <p:ph type="sldNum" idx="5" sz="quarter"/>
+            <p:ph type="sldNum" sz="quarter" idx="5"/>
           </p:nvPr>
         </p:nvSpPr>
         <p:spPr/>
@@ -1033,7 +827,7 @@
 </file>
 
 <file path=ppt/notesSlides/notesSlide2.xml><?xml version="1.0" encoding="utf-8"?>
-<p:notes xmlns:a="http://schemas.openxmlformats.org/drawingml/2006/main" xmlns:p="http://schemas.openxmlformats.org/presentationml/2006/main" xmlns:r="http://schemas.openxmlformats.org/officeDocument/2006/relationships">
+<p:notes xmlns:a="http://schemas.openxmlformats.org/drawingml/2006/main" xmlns:r="http://schemas.openxmlformats.org/officeDocument/2006/relationships" xmlns:p="http://schemas.openxmlformats.org/presentationml/2006/main">
   <p:cSld>
     <p:spTree>
       <p:nvGrpSpPr>
@@ -1053,7 +847,7 @@
         <p:nvSpPr>
           <p:cNvPr id="2" name="Slide Image Placeholder 1"/>
           <p:cNvSpPr>
-            <a:spLocks noGrp="1"/>
+            <a:spLocks noGrp="1" noRot="1" noChangeAspect="1"/>
           </p:cNvSpPr>
           <p:nvPr>
             <p:ph type="sldImg" idx="2"/>
@@ -1068,7 +862,7 @@
             <a:spLocks noGrp="1"/>
           </p:cNvSpPr>
           <p:nvPr>
-            <p:ph type="body" idx="3" sz="quarter"/>
+            <p:ph type="body" sz="quarter" idx="3"/>
           </p:nvPr>
         </p:nvSpPr>
         <p:spPr/>
@@ -1089,7 +883,7 @@
             <a:spLocks noGrp="1"/>
           </p:cNvSpPr>
           <p:nvPr>
-            <p:ph type="sldNum" idx="5" sz="quarter"/>
+            <p:ph type="sldNum" sz="quarter" idx="5"/>
           </p:nvPr>
         </p:nvSpPr>
         <p:spPr/>
@@ -1103,7 +897,7 @@
 </file>
 
 <file path=ppt/notesSlides/notesSlide3.xml><?xml version="1.0" encoding="utf-8"?>
-<p:notes xmlns:a="http://schemas.openxmlformats.org/drawingml/2006/main" xmlns:p="http://schemas.openxmlformats.org/presentationml/2006/main" xmlns:r="http://schemas.openxmlformats.org/officeDocument/2006/relationships">
+<p:notes xmlns:a="http://schemas.openxmlformats.org/drawingml/2006/main" xmlns:r="http://schemas.openxmlformats.org/officeDocument/2006/relationships" xmlns:p="http://schemas.openxmlformats.org/presentationml/2006/main">
   <p:cSld>
     <p:spTree>
       <p:nvGrpSpPr>
@@ -1123,7 +917,7 @@
         <p:nvSpPr>
           <p:cNvPr id="2" name="Slide Image Placeholder 1"/>
           <p:cNvSpPr>
-            <a:spLocks noGrp="1"/>
+            <a:spLocks noGrp="1" noRot="1" noChangeAspect="1"/>
           </p:cNvSpPr>
           <p:nvPr>
             <p:ph type="sldImg" idx="2"/>
@@ -1138,7 +932,7 @@
             <a:spLocks noGrp="1"/>
           </p:cNvSpPr>
           <p:nvPr>
-            <p:ph type="body" idx="3" sz="quarter"/>
+            <p:ph type="body" sz="quarter" idx="3"/>
           </p:nvPr>
         </p:nvSpPr>
         <p:spPr/>
@@ -1159,7 +953,7 @@
             <a:spLocks noGrp="1"/>
           </p:cNvSpPr>
           <p:nvPr>
-            <p:ph type="sldNum" idx="5" sz="quarter"/>
+            <p:ph type="sldNum" sz="quarter" idx="5"/>
           </p:nvPr>
         </p:nvSpPr>
         <p:spPr/>
@@ -1173,7 +967,7 @@
 </file>
 
 <file path=ppt/notesSlides/notesSlide4.xml><?xml version="1.0" encoding="utf-8"?>
-<p:notes xmlns:a="http://schemas.openxmlformats.org/drawingml/2006/main" xmlns:p="http://schemas.openxmlformats.org/presentationml/2006/main" xmlns:r="http://schemas.openxmlformats.org/officeDocument/2006/relationships">
+<p:notes xmlns:a="http://schemas.openxmlformats.org/drawingml/2006/main" xmlns:r="http://schemas.openxmlformats.org/officeDocument/2006/relationships" xmlns:p="http://schemas.openxmlformats.org/presentationml/2006/main">
   <p:cSld>
     <p:spTree>
       <p:nvGrpSpPr>
@@ -1193,7 +987,7 @@
         <p:nvSpPr>
           <p:cNvPr id="2" name="Slide Image Placeholder 1"/>
           <p:cNvSpPr>
-            <a:spLocks noGrp="1"/>
+            <a:spLocks noGrp="1" noRot="1" noChangeAspect="1"/>
           </p:cNvSpPr>
           <p:nvPr>
             <p:ph type="sldImg" idx="2"/>
@@ -1208,7 +1002,7 @@
             <a:spLocks noGrp="1"/>
           </p:cNvSpPr>
           <p:nvPr>
-            <p:ph type="body" idx="3" sz="quarter"/>
+            <p:ph type="body" sz="quarter" idx="3"/>
           </p:nvPr>
         </p:nvSpPr>
         <p:spPr/>
@@ -1229,7 +1023,7 @@
             <a:spLocks noGrp="1"/>
           </p:cNvSpPr>
           <p:nvPr>
-            <p:ph type="sldNum" idx="5" sz="quarter"/>
+            <p:ph type="sldNum" sz="quarter" idx="5"/>
           </p:nvPr>
         </p:nvSpPr>
         <p:spPr/>
@@ -1243,7 +1037,7 @@
 </file>
 
 <file path=ppt/notesSlides/notesSlide5.xml><?xml version="1.0" encoding="utf-8"?>
-<p:notes xmlns:a="http://schemas.openxmlformats.org/drawingml/2006/main" xmlns:p="http://schemas.openxmlformats.org/presentationml/2006/main" xmlns:r="http://schemas.openxmlformats.org/officeDocument/2006/relationships">
+<p:notes xmlns:a="http://schemas.openxmlformats.org/drawingml/2006/main" xmlns:r="http://schemas.openxmlformats.org/officeDocument/2006/relationships" xmlns:p="http://schemas.openxmlformats.org/presentationml/2006/main">
   <p:cSld>
     <p:spTree>
       <p:nvGrpSpPr>
@@ -1263,7 +1057,7 @@
         <p:nvSpPr>
           <p:cNvPr id="2" name="Slide Image Placeholder 1"/>
           <p:cNvSpPr>
-            <a:spLocks noGrp="1"/>
+            <a:spLocks noGrp="1" noRot="1" noChangeAspect="1"/>
           </p:cNvSpPr>
           <p:nvPr>
             <p:ph type="sldImg" idx="2"/>
@@ -1278,7 +1072,7 @@
             <a:spLocks noGrp="1"/>
           </p:cNvSpPr>
           <p:nvPr>
-            <p:ph type="body" idx="3" sz="quarter"/>
+            <p:ph type="body" sz="quarter" idx="3"/>
           </p:nvPr>
         </p:nvSpPr>
         <p:spPr/>
@@ -1299,7 +1093,7 @@
             <a:spLocks noGrp="1"/>
           </p:cNvSpPr>
           <p:nvPr>
-            <p:ph type="sldNum" idx="5" sz="quarter"/>
+            <p:ph type="sldNum" sz="quarter" idx="5"/>
           </p:nvPr>
         </p:nvSpPr>
         <p:spPr/>
@@ -1313,7 +1107,7 @@
 </file>
 
 <file path=ppt/notesSlides/notesSlide6.xml><?xml version="1.0" encoding="utf-8"?>
-<p:notes xmlns:a="http://schemas.openxmlformats.org/drawingml/2006/main" xmlns:p="http://schemas.openxmlformats.org/presentationml/2006/main" xmlns:r="http://schemas.openxmlformats.org/officeDocument/2006/relationships">
+<p:notes xmlns:a="http://schemas.openxmlformats.org/drawingml/2006/main" xmlns:r="http://schemas.openxmlformats.org/officeDocument/2006/relationships" xmlns:p="http://schemas.openxmlformats.org/presentationml/2006/main">
   <p:cSld>
     <p:spTree>
       <p:nvGrpSpPr>
@@ -1333,7 +1127,7 @@
         <p:nvSpPr>
           <p:cNvPr id="2" name="Slide Image Placeholder 1"/>
           <p:cNvSpPr>
-            <a:spLocks noGrp="1"/>
+            <a:spLocks noGrp="1" noRot="1" noChangeAspect="1"/>
           </p:cNvSpPr>
           <p:nvPr>
             <p:ph type="sldImg" idx="2"/>
@@ -1348,7 +1142,7 @@
             <a:spLocks noGrp="1"/>
           </p:cNvSpPr>
           <p:nvPr>
-            <p:ph type="body" idx="3" sz="quarter"/>
+            <p:ph type="body" sz="quarter" idx="3"/>
           </p:nvPr>
         </p:nvSpPr>
         <p:spPr/>
@@ -1369,7 +1163,7 @@
             <a:spLocks noGrp="1"/>
           </p:cNvSpPr>
           <p:nvPr>
-            <p:ph type="sldNum" idx="5" sz="quarter"/>
+            <p:ph type="sldNum" sz="quarter" idx="5"/>
           </p:nvPr>
         </p:nvSpPr>
         <p:spPr/>
@@ -1383,7 +1177,7 @@
 </file>
 
 <file path=ppt/notesSlides/notesSlide7.xml><?xml version="1.0" encoding="utf-8"?>
-<p:notes xmlns:a="http://schemas.openxmlformats.org/drawingml/2006/main" xmlns:p="http://schemas.openxmlformats.org/presentationml/2006/main" xmlns:r="http://schemas.openxmlformats.org/officeDocument/2006/relationships">
+<p:notes xmlns:a="http://schemas.openxmlformats.org/drawingml/2006/main" xmlns:r="http://schemas.openxmlformats.org/officeDocument/2006/relationships" xmlns:p="http://schemas.openxmlformats.org/presentationml/2006/main">
   <p:cSld>
     <p:spTree>
       <p:nvGrpSpPr>
@@ -1403,7 +1197,7 @@
         <p:nvSpPr>
           <p:cNvPr id="2" name="Slide Image Placeholder 1"/>
           <p:cNvSpPr>
-            <a:spLocks noGrp="1"/>
+            <a:spLocks noGrp="1" noRot="1" noChangeAspect="1"/>
           </p:cNvSpPr>
           <p:nvPr>
             <p:ph type="sldImg" idx="2"/>
@@ -1418,7 +1212,7 @@
             <a:spLocks noGrp="1"/>
           </p:cNvSpPr>
           <p:nvPr>
-            <p:ph type="body" idx="3" sz="quarter"/>
+            <p:ph type="body" sz="quarter" idx="3"/>
           </p:nvPr>
         </p:nvSpPr>
         <p:spPr/>
@@ -1439,7 +1233,7 @@
             <a:spLocks noGrp="1"/>
           </p:cNvSpPr>
           <p:nvPr>
-            <p:ph type="sldNum" idx="5" sz="quarter"/>
+            <p:ph type="sldNum" sz="quarter" idx="5"/>
           </p:nvPr>
         </p:nvSpPr>
         <p:spPr/>
@@ -1453,7 +1247,7 @@
 </file>
 
 <file path=ppt/notesSlides/notesSlide8.xml><?xml version="1.0" encoding="utf-8"?>
-<p:notes xmlns:a="http://schemas.openxmlformats.org/drawingml/2006/main" xmlns:p="http://schemas.openxmlformats.org/presentationml/2006/main" xmlns:r="http://schemas.openxmlformats.org/officeDocument/2006/relationships">
+<p:notes xmlns:a="http://schemas.openxmlformats.org/drawingml/2006/main" xmlns:r="http://schemas.openxmlformats.org/officeDocument/2006/relationships" xmlns:p="http://schemas.openxmlformats.org/presentationml/2006/main">
   <p:cSld>
     <p:spTree>
       <p:nvGrpSpPr>
@@ -1473,7 +1267,7 @@
         <p:nvSpPr>
           <p:cNvPr id="2" name="Slide Image Placeholder 1"/>
           <p:cNvSpPr>
-            <a:spLocks noGrp="1"/>
+            <a:spLocks noGrp="1" noRot="1" noChangeAspect="1"/>
           </p:cNvSpPr>
           <p:nvPr>
             <p:ph type="sldImg" idx="2"/>
@@ -1488,7 +1282,7 @@
             <a:spLocks noGrp="1"/>
           </p:cNvSpPr>
           <p:nvPr>
-            <p:ph type="body" idx="3" sz="quarter"/>
+            <p:ph type="body" sz="quarter" idx="3"/>
           </p:nvPr>
         </p:nvSpPr>
         <p:spPr/>
@@ -1509,7 +1303,7 @@
             <a:spLocks noGrp="1"/>
           </p:cNvSpPr>
           <p:nvPr>
-            <p:ph type="sldNum" idx="5" sz="quarter"/>
+            <p:ph type="sldNum" sz="quarter" idx="5"/>
           </p:nvPr>
         </p:nvSpPr>
         <p:spPr/>
@@ -1523,7 +1317,7 @@
 </file>
 
 <file path=ppt/notesSlides/notesSlide9.xml><?xml version="1.0" encoding="utf-8"?>
-<p:notes xmlns:a="http://schemas.openxmlformats.org/drawingml/2006/main" xmlns:p="http://schemas.openxmlformats.org/presentationml/2006/main" xmlns:r="http://schemas.openxmlformats.org/officeDocument/2006/relationships">
+<p:notes xmlns:a="http://schemas.openxmlformats.org/drawingml/2006/main" xmlns:r="http://schemas.openxmlformats.org/officeDocument/2006/relationships" xmlns:p="http://schemas.openxmlformats.org/presentationml/2006/main">
   <p:cSld>
     <p:spTree>
       <p:nvGrpSpPr>
@@ -1543,7 +1337,7 @@
         <p:nvSpPr>
           <p:cNvPr id="2" name="Slide Image Placeholder 1"/>
           <p:cNvSpPr>
-            <a:spLocks noGrp="1"/>
+            <a:spLocks noGrp="1" noRot="1" noChangeAspect="1"/>
           </p:cNvSpPr>
           <p:nvPr>
             <p:ph type="sldImg" idx="2"/>
@@ -1558,7 +1352,7 @@
             <a:spLocks noGrp="1"/>
           </p:cNvSpPr>
           <p:nvPr>
-            <p:ph type="body" idx="3" sz="quarter"/>
+            <p:ph type="body" sz="quarter" idx="3"/>
           </p:nvPr>
         </p:nvSpPr>
         <p:spPr/>
@@ -1579,7 +1373,7 @@
             <a:spLocks noGrp="1"/>
           </p:cNvSpPr>
           <p:nvPr>
-            <p:ph type="sldNum" idx="5" sz="quarter"/>
+            <p:ph type="sldNum" sz="quarter" idx="5"/>
           </p:nvPr>
         </p:nvSpPr>
         <p:spPr/>
@@ -1630,10 +1424,9 @@
           <a:lstStyle/>
           <a:p>
             <a:r>
-              <a:rPr lang="en-US" smtClean="0"/>
+              <a:rPr lang="en-US"/>
               <a:t>Click to edit Master title style</a:t>
             </a:r>
-            <a:endParaRPr lang="en-US"/>
           </a:p>
         </p:txBody>
       </p:sp>
@@ -1749,10 +1542,9 @@
           </a:lstStyle>
           <a:p>
             <a:r>
-              <a:rPr lang="en-US" smtClean="0"/>
+              <a:rPr lang="en-US"/>
               <a:t>Click to edit Master subtitle style</a:t>
             </a:r>
-            <a:endParaRPr lang="en-US"/>
           </a:p>
         </p:txBody>
       </p:sp>
@@ -1773,7 +1565,7 @@
           <a:p>
             <a:fld id="{5BCAD085-E8A6-8845-BD4E-CB4CCA059FC4}" type="datetimeFigureOut">
               <a:rPr lang="en-US" smtClean="0"/>
-              <a:t>1/27/13</a:t>
+              <a:t>7/24/2026</a:t>
             </a:fld>
             <a:endParaRPr lang="en-US"/>
           </a:p>
@@ -1867,10 +1659,9 @@
           <a:lstStyle/>
           <a:p>
             <a:r>
-              <a:rPr lang="en-US" smtClean="0"/>
+              <a:rPr lang="en-US"/>
               <a:t>Click to edit Master title style</a:t>
             </a:r>
-            <a:endParaRPr lang="en-US"/>
           </a:p>
         </p:txBody>
       </p:sp>
@@ -1891,38 +1682,37 @@
           <a:p>
             <a:pPr lvl="0"/>
             <a:r>
-              <a:rPr lang="en-US" smtClean="0"/>
+              <a:rPr lang="en-US"/>
               <a:t>Click to edit Master text styles</a:t>
             </a:r>
           </a:p>
           <a:p>
             <a:pPr lvl="1"/>
             <a:r>
-              <a:rPr lang="en-US" smtClean="0"/>
+              <a:rPr lang="en-US"/>
               <a:t>Second level</a:t>
             </a:r>
           </a:p>
           <a:p>
             <a:pPr lvl="2"/>
             <a:r>
-              <a:rPr lang="en-US" smtClean="0"/>
+              <a:rPr lang="en-US"/>
               <a:t>Third level</a:t>
             </a:r>
           </a:p>
           <a:p>
             <a:pPr lvl="3"/>
             <a:r>
-              <a:rPr lang="en-US" smtClean="0"/>
+              <a:rPr lang="en-US"/>
               <a:t>Fourth level</a:t>
             </a:r>
           </a:p>
           <a:p>
             <a:pPr lvl="4"/>
             <a:r>
-              <a:rPr lang="en-US" smtClean="0"/>
+              <a:rPr lang="en-US"/>
               <a:t>Fifth level</a:t>
             </a:r>
-            <a:endParaRPr lang="en-US"/>
           </a:p>
         </p:txBody>
       </p:sp>
@@ -1943,7 +1733,7 @@
           <a:p>
             <a:fld id="{5BCAD085-E8A6-8845-BD4E-CB4CCA059FC4}" type="datetimeFigureOut">
               <a:rPr lang="en-US" smtClean="0"/>
-              <a:t>1/27/13</a:t>
+              <a:t>7/24/2026</a:t>
             </a:fld>
             <a:endParaRPr lang="en-US"/>
           </a:p>
@@ -2042,10 +1832,9 @@
           <a:lstStyle/>
           <a:p>
             <a:r>
-              <a:rPr lang="en-US" smtClean="0"/>
+              <a:rPr lang="en-US"/>
               <a:t>Click to edit Master title style</a:t>
             </a:r>
-            <a:endParaRPr lang="en-US"/>
           </a:p>
         </p:txBody>
       </p:sp>
@@ -2071,38 +1860,37 @@
           <a:p>
             <a:pPr lvl="0"/>
             <a:r>
-              <a:rPr lang="en-US" smtClean="0"/>
+              <a:rPr lang="en-US"/>
               <a:t>Click to edit Master text styles</a:t>
             </a:r>
           </a:p>
           <a:p>
             <a:pPr lvl="1"/>
             <a:r>
-              <a:rPr lang="en-US" smtClean="0"/>
+              <a:rPr lang="en-US"/>
               <a:t>Second level</a:t>
             </a:r>
           </a:p>
           <a:p>
             <a:pPr lvl="2"/>
             <a:r>
-              <a:rPr lang="en-US" smtClean="0"/>
+              <a:rPr lang="en-US"/>
               <a:t>Third level</a:t>
             </a:r>
           </a:p>
           <a:p>
             <a:pPr lvl="3"/>
             <a:r>
-              <a:rPr lang="en-US" smtClean="0"/>
+              <a:rPr lang="en-US"/>
               <a:t>Fourth level</a:t>
             </a:r>
           </a:p>
           <a:p>
             <a:pPr lvl="4"/>
             <a:r>
-              <a:rPr lang="en-US" smtClean="0"/>
+              <a:rPr lang="en-US"/>
               <a:t>Fifth level</a:t>
             </a:r>
-            <a:endParaRPr lang="en-US"/>
           </a:p>
         </p:txBody>
       </p:sp>
@@ -2123,7 +1911,7 @@
           <a:p>
             <a:fld id="{5BCAD085-E8A6-8845-BD4E-CB4CCA059FC4}" type="datetimeFigureOut">
               <a:rPr lang="en-US" smtClean="0"/>
-              <a:t>1/27/13</a:t>
+              <a:t>7/24/2026</a:t>
             </a:fld>
             <a:endParaRPr lang="en-US"/>
           </a:p>
@@ -2217,10 +2005,9 @@
           <a:lstStyle/>
           <a:p>
             <a:r>
-              <a:rPr lang="en-US" smtClean="0"/>
+              <a:rPr lang="en-US"/>
               <a:t>Click to edit Master title style</a:t>
             </a:r>
-            <a:endParaRPr lang="en-US"/>
           </a:p>
         </p:txBody>
       </p:sp>
@@ -2241,38 +2028,37 @@
           <a:p>
             <a:pPr lvl="0"/>
             <a:r>
-              <a:rPr lang="en-US" smtClean="0"/>
+              <a:rPr lang="en-US"/>
               <a:t>Click to edit Master text styles</a:t>
             </a:r>
           </a:p>
           <a:p>
             <a:pPr lvl="1"/>
             <a:r>
-              <a:rPr lang="en-US" smtClean="0"/>
+              <a:rPr lang="en-US"/>
               <a:t>Second level</a:t>
             </a:r>
           </a:p>
           <a:p>
             <a:pPr lvl="2"/>
             <a:r>
-              <a:rPr lang="en-US" smtClean="0"/>
+              <a:rPr lang="en-US"/>
               <a:t>Third level</a:t>
             </a:r>
           </a:p>
           <a:p>
             <a:pPr lvl="3"/>
             <a:r>
-              <a:rPr lang="en-US" smtClean="0"/>
+              <a:rPr lang="en-US"/>
               <a:t>Fourth level</a:t>
             </a:r>
           </a:p>
           <a:p>
             <a:pPr lvl="4"/>
             <a:r>
-              <a:rPr lang="en-US" smtClean="0"/>
+              <a:rPr lang="en-US"/>
               <a:t>Fifth level</a:t>
             </a:r>
-            <a:endParaRPr lang="en-US"/>
           </a:p>
         </p:txBody>
       </p:sp>
@@ -2293,7 +2079,7 @@
           <a:p>
             <a:fld id="{5BCAD085-E8A6-8845-BD4E-CB4CCA059FC4}" type="datetimeFigureOut">
               <a:rPr lang="en-US" smtClean="0"/>
-              <a:t>1/27/13</a:t>
+              <a:t>7/24/2026</a:t>
             </a:fld>
             <a:endParaRPr lang="en-US"/>
           </a:p>
@@ -2396,10 +2182,9 @@
           </a:lstStyle>
           <a:p>
             <a:r>
-              <a:rPr lang="en-US" smtClean="0"/>
+              <a:rPr lang="en-US"/>
               <a:t>Click to edit Master title style</a:t>
             </a:r>
-            <a:endParaRPr lang="en-US"/>
           </a:p>
         </p:txBody>
       </p:sp>
@@ -2516,7 +2301,7 @@
           <a:p>
             <a:pPr lvl="0"/>
             <a:r>
-              <a:rPr lang="en-US" smtClean="0"/>
+              <a:rPr lang="en-US"/>
               <a:t>Click to edit Master text styles</a:t>
             </a:r>
           </a:p>
@@ -2539,7 +2324,7 @@
           <a:p>
             <a:fld id="{5BCAD085-E8A6-8845-BD4E-CB4CCA059FC4}" type="datetimeFigureOut">
               <a:rPr lang="en-US" smtClean="0"/>
-              <a:t>1/27/13</a:t>
+              <a:t>7/24/2026</a:t>
             </a:fld>
             <a:endParaRPr lang="en-US"/>
           </a:p>
@@ -2633,10 +2418,9 @@
           <a:lstStyle/>
           <a:p>
             <a:r>
-              <a:rPr lang="en-US" smtClean="0"/>
+              <a:rPr lang="en-US"/>
               <a:t>Click to edit Master title style</a:t>
             </a:r>
-            <a:endParaRPr lang="en-US"/>
           </a:p>
         </p:txBody>
       </p:sp>
@@ -2690,38 +2474,37 @@
           <a:p>
             <a:pPr lvl="0"/>
             <a:r>
-              <a:rPr lang="en-US" smtClean="0"/>
+              <a:rPr lang="en-US"/>
               <a:t>Click to edit Master text styles</a:t>
             </a:r>
           </a:p>
           <a:p>
             <a:pPr lvl="1"/>
             <a:r>
-              <a:rPr lang="en-US" smtClean="0"/>
+              <a:rPr lang="en-US"/>
               <a:t>Second level</a:t>
             </a:r>
           </a:p>
           <a:p>
             <a:pPr lvl="2"/>
             <a:r>
-              <a:rPr lang="en-US" smtClean="0"/>
+              <a:rPr lang="en-US"/>
               <a:t>Third level</a:t>
             </a:r>
           </a:p>
           <a:p>
             <a:pPr lvl="3"/>
             <a:r>
-              <a:rPr lang="en-US" smtClean="0"/>
+              <a:rPr lang="en-US"/>
               <a:t>Fourth level</a:t>
             </a:r>
           </a:p>
           <a:p>
             <a:pPr lvl="4"/>
             <a:r>
-              <a:rPr lang="en-US" smtClean="0"/>
+              <a:rPr lang="en-US"/>
               <a:t>Fifth level</a:t>
             </a:r>
-            <a:endParaRPr lang="en-US"/>
           </a:p>
         </p:txBody>
       </p:sp>
@@ -2775,38 +2558,37 @@
           <a:p>
             <a:pPr lvl="0"/>
             <a:r>
-              <a:rPr lang="en-US" smtClean="0"/>
+              <a:rPr lang="en-US"/>
               <a:t>Click to edit Master text styles</a:t>
             </a:r>
           </a:p>
           <a:p>
             <a:pPr lvl="1"/>
             <a:r>
-              <a:rPr lang="en-US" smtClean="0"/>
+              <a:rPr lang="en-US"/>
               <a:t>Second level</a:t>
             </a:r>
           </a:p>
           <a:p>
             <a:pPr lvl="2"/>
             <a:r>
-              <a:rPr lang="en-US" smtClean="0"/>
+              <a:rPr lang="en-US"/>
               <a:t>Third level</a:t>
             </a:r>
           </a:p>
           <a:p>
             <a:pPr lvl="3"/>
             <a:r>
-              <a:rPr lang="en-US" smtClean="0"/>
+              <a:rPr lang="en-US"/>
               <a:t>Fourth level</a:t>
             </a:r>
           </a:p>
           <a:p>
             <a:pPr lvl="4"/>
             <a:r>
-              <a:rPr lang="en-US" smtClean="0"/>
+              <a:rPr lang="en-US"/>
               <a:t>Fifth level</a:t>
             </a:r>
-            <a:endParaRPr lang="en-US"/>
           </a:p>
         </p:txBody>
       </p:sp>
@@ -2827,7 +2609,7 @@
           <a:p>
             <a:fld id="{5BCAD085-E8A6-8845-BD4E-CB4CCA059FC4}" type="datetimeFigureOut">
               <a:rPr lang="en-US" smtClean="0"/>
-              <a:t>1/27/13</a:t>
+              <a:t>7/24/2026</a:t>
             </a:fld>
             <a:endParaRPr lang="en-US"/>
           </a:p>
@@ -2925,10 +2707,9 @@
           </a:lstStyle>
           <a:p>
             <a:r>
-              <a:rPr lang="en-US" smtClean="0"/>
+              <a:rPr lang="en-US"/>
               <a:t>Click to edit Master title style</a:t>
             </a:r>
-            <a:endParaRPr lang="en-US"/>
           </a:p>
         </p:txBody>
       </p:sp>
@@ -2991,7 +2772,7 @@
           <a:p>
             <a:pPr lvl="0"/>
             <a:r>
-              <a:rPr lang="en-US" smtClean="0"/>
+              <a:rPr lang="en-US"/>
               <a:t>Click to edit Master text styles</a:t>
             </a:r>
           </a:p>
@@ -3047,38 +2828,37 @@
           <a:p>
             <a:pPr lvl="0"/>
             <a:r>
-              <a:rPr lang="en-US" smtClean="0"/>
+              <a:rPr lang="en-US"/>
               <a:t>Click to edit Master text styles</a:t>
             </a:r>
           </a:p>
           <a:p>
             <a:pPr lvl="1"/>
             <a:r>
-              <a:rPr lang="en-US" smtClean="0"/>
+              <a:rPr lang="en-US"/>
               <a:t>Second level</a:t>
             </a:r>
           </a:p>
           <a:p>
             <a:pPr lvl="2"/>
             <a:r>
-              <a:rPr lang="en-US" smtClean="0"/>
+              <a:rPr lang="en-US"/>
               <a:t>Third level</a:t>
             </a:r>
           </a:p>
           <a:p>
             <a:pPr lvl="3"/>
             <a:r>
-              <a:rPr lang="en-US" smtClean="0"/>
+              <a:rPr lang="en-US"/>
               <a:t>Fourth level</a:t>
             </a:r>
           </a:p>
           <a:p>
             <a:pPr lvl="4"/>
             <a:r>
-              <a:rPr lang="en-US" smtClean="0"/>
+              <a:rPr lang="en-US"/>
               <a:t>Fifth level</a:t>
             </a:r>
-            <a:endParaRPr lang="en-US"/>
           </a:p>
         </p:txBody>
       </p:sp>
@@ -3141,7 +2921,7 @@
           <a:p>
             <a:pPr lvl="0"/>
             <a:r>
-              <a:rPr lang="en-US" smtClean="0"/>
+              <a:rPr lang="en-US"/>
               <a:t>Click to edit Master text styles</a:t>
             </a:r>
           </a:p>
@@ -3197,38 +2977,37 @@
           <a:p>
             <a:pPr lvl="0"/>
             <a:r>
-              <a:rPr lang="en-US" smtClean="0"/>
+              <a:rPr lang="en-US"/>
               <a:t>Click to edit Master text styles</a:t>
             </a:r>
           </a:p>
           <a:p>
             <a:pPr lvl="1"/>
             <a:r>
-              <a:rPr lang="en-US" smtClean="0"/>
+              <a:rPr lang="en-US"/>
               <a:t>Second level</a:t>
             </a:r>
           </a:p>
           <a:p>
             <a:pPr lvl="2"/>
             <a:r>
-              <a:rPr lang="en-US" smtClean="0"/>
+              <a:rPr lang="en-US"/>
               <a:t>Third level</a:t>
             </a:r>
           </a:p>
           <a:p>
             <a:pPr lvl="3"/>
             <a:r>
-              <a:rPr lang="en-US" smtClean="0"/>
+              <a:rPr lang="en-US"/>
               <a:t>Fourth level</a:t>
             </a:r>
           </a:p>
           <a:p>
             <a:pPr lvl="4"/>
             <a:r>
-              <a:rPr lang="en-US" smtClean="0"/>
+              <a:rPr lang="en-US"/>
               <a:t>Fifth level</a:t>
             </a:r>
-            <a:endParaRPr lang="en-US"/>
           </a:p>
         </p:txBody>
       </p:sp>
@@ -3249,7 +3028,7 @@
           <a:p>
             <a:fld id="{5BCAD085-E8A6-8845-BD4E-CB4CCA059FC4}" type="datetimeFigureOut">
               <a:rPr lang="en-US" smtClean="0"/>
-              <a:t>1/27/13</a:t>
+              <a:t>7/24/2026</a:t>
             </a:fld>
             <a:endParaRPr lang="en-US"/>
           </a:p>
@@ -3343,10 +3122,9 @@
           <a:lstStyle/>
           <a:p>
             <a:r>
-              <a:rPr lang="en-US" smtClean="0"/>
+              <a:rPr lang="en-US"/>
               <a:t>Click to edit Master title style</a:t>
             </a:r>
-            <a:endParaRPr lang="en-US"/>
           </a:p>
         </p:txBody>
       </p:sp>
@@ -3367,7 +3145,7 @@
           <a:p>
             <a:fld id="{5BCAD085-E8A6-8845-BD4E-CB4CCA059FC4}" type="datetimeFigureOut">
               <a:rPr lang="en-US" smtClean="0"/>
-              <a:t>1/27/13</a:t>
+              <a:t>7/24/2026</a:t>
             </a:fld>
             <a:endParaRPr lang="en-US"/>
           </a:p>
@@ -3462,7 +3240,7 @@
           <a:p>
             <a:fld id="{5BCAD085-E8A6-8845-BD4E-CB4CCA059FC4}" type="datetimeFigureOut">
               <a:rPr lang="en-US" smtClean="0"/>
-              <a:t>1/27/13</a:t>
+              <a:t>7/24/2026</a:t>
             </a:fld>
             <a:endParaRPr lang="en-US"/>
           </a:p>
@@ -3565,10 +3343,9 @@
           </a:lstStyle>
           <a:p>
             <a:r>
-              <a:rPr lang="en-US" smtClean="0"/>
+              <a:rPr lang="en-US"/>
               <a:t>Click to edit Master title style</a:t>
             </a:r>
-            <a:endParaRPr lang="en-US"/>
           </a:p>
         </p:txBody>
       </p:sp>
@@ -3622,38 +3399,37 @@
           <a:p>
             <a:pPr lvl="0"/>
             <a:r>
-              <a:rPr lang="en-US" smtClean="0"/>
+              <a:rPr lang="en-US"/>
               <a:t>Click to edit Master text styles</a:t>
             </a:r>
           </a:p>
           <a:p>
             <a:pPr lvl="1"/>
             <a:r>
-              <a:rPr lang="en-US" smtClean="0"/>
+              <a:rPr lang="en-US"/>
               <a:t>Second level</a:t>
             </a:r>
           </a:p>
           <a:p>
             <a:pPr lvl="2"/>
             <a:r>
-              <a:rPr lang="en-US" smtClean="0"/>
+              <a:rPr lang="en-US"/>
               <a:t>Third level</a:t>
             </a:r>
           </a:p>
           <a:p>
             <a:pPr lvl="3"/>
             <a:r>
-              <a:rPr lang="en-US" smtClean="0"/>
+              <a:rPr lang="en-US"/>
               <a:t>Fourth level</a:t>
             </a:r>
           </a:p>
           <a:p>
             <a:pPr lvl="4"/>
             <a:r>
-              <a:rPr lang="en-US" smtClean="0"/>
+              <a:rPr lang="en-US"/>
               <a:t>Fifth level</a:t>
             </a:r>
-            <a:endParaRPr lang="en-US"/>
           </a:p>
         </p:txBody>
       </p:sp>
@@ -3716,7 +3492,7 @@
           <a:p>
             <a:pPr lvl="0"/>
             <a:r>
-              <a:rPr lang="en-US" smtClean="0"/>
+              <a:rPr lang="en-US"/>
               <a:t>Click to edit Master text styles</a:t>
             </a:r>
           </a:p>
@@ -3739,7 +3515,7 @@
           <a:p>
             <a:fld id="{5BCAD085-E8A6-8845-BD4E-CB4CCA059FC4}" type="datetimeFigureOut">
               <a:rPr lang="en-US" smtClean="0"/>
-              <a:t>1/27/13</a:t>
+              <a:t>7/24/2026</a:t>
             </a:fld>
             <a:endParaRPr lang="en-US"/>
           </a:p>
@@ -3842,10 +3618,9 @@
           </a:lstStyle>
           <a:p>
             <a:r>
-              <a:rPr lang="en-US" smtClean="0"/>
+              <a:rPr lang="en-US"/>
               <a:t>Click to edit Master title style</a:t>
             </a:r>
-            <a:endParaRPr lang="en-US"/>
           </a:p>
         </p:txBody>
       </p:sp>
@@ -3969,7 +3744,7 @@
           <a:p>
             <a:pPr lvl="0"/>
             <a:r>
-              <a:rPr lang="en-US" smtClean="0"/>
+              <a:rPr lang="en-US"/>
               <a:t>Click to edit Master text styles</a:t>
             </a:r>
           </a:p>
@@ -3992,7 +3767,7 @@
           <a:p>
             <a:fld id="{5BCAD085-E8A6-8845-BD4E-CB4CCA059FC4}" type="datetimeFigureOut">
               <a:rPr lang="en-US" smtClean="0"/>
-              <a:t>1/27/13</a:t>
+              <a:t>7/24/2026</a:t>
             </a:fld>
             <a:endParaRPr lang="en-US"/>
           </a:p>
@@ -4101,10 +3876,9 @@
           <a:lstStyle/>
           <a:p>
             <a:r>
-              <a:rPr lang="en-US" smtClean="0"/>
+              <a:rPr lang="en-US"/>
               <a:t>Click to edit Master title style</a:t>
             </a:r>
-            <a:endParaRPr lang="en-US"/>
           </a:p>
         </p:txBody>
       </p:sp>
@@ -4135,38 +3909,37 @@
           <a:p>
             <a:pPr lvl="0"/>
             <a:r>
-              <a:rPr lang="en-US" smtClean="0"/>
+              <a:rPr lang="en-US"/>
               <a:t>Click to edit Master text styles</a:t>
             </a:r>
           </a:p>
           <a:p>
             <a:pPr lvl="1"/>
             <a:r>
-              <a:rPr lang="en-US" smtClean="0"/>
+              <a:rPr lang="en-US"/>
               <a:t>Second level</a:t>
             </a:r>
           </a:p>
           <a:p>
             <a:pPr lvl="2"/>
             <a:r>
-              <a:rPr lang="en-US" smtClean="0"/>
+              <a:rPr lang="en-US"/>
               <a:t>Third level</a:t>
             </a:r>
           </a:p>
           <a:p>
             <a:pPr lvl="3"/>
             <a:r>
-              <a:rPr lang="en-US" smtClean="0"/>
+              <a:rPr lang="en-US"/>
               <a:t>Fourth level</a:t>
             </a:r>
           </a:p>
           <a:p>
             <a:pPr lvl="4"/>
             <a:r>
-              <a:rPr lang="en-US" smtClean="0"/>
+              <a:rPr lang="en-US"/>
               <a:t>Fifth level</a:t>
             </a:r>
-            <a:endParaRPr lang="en-US"/>
           </a:p>
         </p:txBody>
       </p:sp>
@@ -4205,7 +3978,7 @@
           <a:p>
             <a:fld id="{5BCAD085-E8A6-8845-BD4E-CB4CCA059FC4}" type="datetimeFigureOut">
               <a:rPr lang="en-US" smtClean="0"/>
-              <a:t>1/27/13</a:t>
+              <a:t>7/24/2026</a:t>
             </a:fld>
             <a:endParaRPr lang="en-US"/>
           </a:p>
@@ -4564,7 +4337,7 @@
 </file>
 
 <file path=ppt/slides/slide1.xml><?xml version="1.0" encoding="utf-8"?>
-<p:sld xmlns:a="http://schemas.openxmlformats.org/drawingml/2006/main" xmlns:p="http://schemas.openxmlformats.org/presentationml/2006/main" xmlns:r="http://schemas.openxmlformats.org/officeDocument/2006/relationships">
+<p:sld xmlns:a="http://schemas.openxmlformats.org/drawingml/2006/main" xmlns:r="http://schemas.openxmlformats.org/officeDocument/2006/relationships" xmlns:p="http://schemas.openxmlformats.org/presentationml/2006/main">
   <p:cSld>
     <p:spTree>
       <p:nvGrpSpPr>
@@ -4572,7 +4345,14 @@
         <p:cNvGrpSpPr/>
         <p:nvPr/>
       </p:nvGrpSpPr>
-      <p:grpSpPr/>
+      <p:grpSpPr>
+        <a:xfrm>
+          <a:off x="0" y="0"/>
+          <a:ext cx="0" cy="0"/>
+          <a:chOff x="0" y="0"/>
+          <a:chExt cx="0" cy="0"/>
+        </a:xfrm>
+      </p:grpSpPr>
       <p:sp>
         <p:nvSpPr>
           <p:cNvPr id="2" name="Rectangle 1"/>
@@ -4614,6 +4394,7 @@
           <a:lstStyle/>
           <a:p>
             <a:pPr algn="ctr"/>
+            <a:endParaRPr/>
           </a:p>
         </p:txBody>
       </p:sp>
@@ -4658,6 +4439,7 @@
           <a:lstStyle/>
           <a:p>
             <a:pPr algn="ctr"/>
+            <a:endParaRPr/>
           </a:p>
         </p:txBody>
       </p:sp>
@@ -4678,7 +4460,7 @@
           <a:noFill/>
         </p:spPr>
         <p:txBody>
-          <a:bodyPr wrap="square" anchor="t" lIns="0" rIns="0" tIns="0" bIns="0">
+          <a:bodyPr wrap="square" lIns="0" tIns="0" rIns="0" bIns="0" anchor="t">
             <a:spAutoFit/>
           </a:bodyPr>
           <a:lstStyle/>
@@ -4747,6 +4529,7 @@
           <a:lstStyle/>
           <a:p>
             <a:pPr algn="ctr"/>
+            <a:endParaRPr/>
           </a:p>
         </p:txBody>
       </p:sp>
@@ -4767,7 +4550,7 @@
           <a:noFill/>
         </p:spPr>
         <p:txBody>
-          <a:bodyPr wrap="square" anchor="t" lIns="0" rIns="0" tIns="0" bIns="0">
+          <a:bodyPr wrap="square" lIns="0" tIns="0" rIns="0" bIns="0" anchor="t">
             <a:spAutoFit/>
           </a:bodyPr>
           <a:lstStyle/>
@@ -4834,7 +4617,7 @@
           <a:noFill/>
         </p:spPr>
         <p:txBody>
-          <a:bodyPr wrap="square" anchor="t" lIns="0" rIns="0" tIns="0" bIns="0">
+          <a:bodyPr wrap="square" lIns="0" tIns="0" rIns="0" bIns="0" anchor="t">
             <a:spAutoFit/>
           </a:bodyPr>
           <a:lstStyle/>
@@ -4871,7 +4654,7 @@
 </file>
 
 <file path=ppt/slides/slide10.xml><?xml version="1.0" encoding="utf-8"?>
-<p:sld xmlns:a="http://schemas.openxmlformats.org/drawingml/2006/main" xmlns:p="http://schemas.openxmlformats.org/presentationml/2006/main" xmlns:r="http://schemas.openxmlformats.org/officeDocument/2006/relationships">
+<p:sld xmlns:a="http://schemas.openxmlformats.org/drawingml/2006/main" xmlns:r="http://schemas.openxmlformats.org/officeDocument/2006/relationships" xmlns:p="http://schemas.openxmlformats.org/presentationml/2006/main">
   <p:cSld>
     <p:spTree>
       <p:nvGrpSpPr>
@@ -4879,7 +4662,14 @@
         <p:cNvGrpSpPr/>
         <p:nvPr/>
       </p:nvGrpSpPr>
-      <p:grpSpPr/>
+      <p:grpSpPr>
+        <a:xfrm>
+          <a:off x="0" y="0"/>
+          <a:ext cx="0" cy="0"/>
+          <a:chOff x="0" y="0"/>
+          <a:chExt cx="0" cy="0"/>
+        </a:xfrm>
+      </p:grpSpPr>
       <p:sp>
         <p:nvSpPr>
           <p:cNvPr id="2" name="Rectangle 1"/>
@@ -4921,6 +4711,7 @@
           <a:lstStyle/>
           <a:p>
             <a:pPr algn="ctr"/>
+            <a:endParaRPr/>
           </a:p>
         </p:txBody>
       </p:sp>
@@ -4941,7 +4732,7 @@
           <a:noFill/>
         </p:spPr>
         <p:txBody>
-          <a:bodyPr wrap="square" anchor="t" lIns="0" rIns="0" tIns="0" bIns="0">
+          <a:bodyPr wrap="square" lIns="0" tIns="0" rIns="0" bIns="0" anchor="t">
             <a:spAutoFit/>
           </a:bodyPr>
           <a:lstStyle/>
@@ -4986,7 +4777,7 @@
           <a:noFill/>
         </p:spPr>
         <p:txBody>
-          <a:bodyPr wrap="square" anchor="t" lIns="0" rIns="0" tIns="0" bIns="0">
+          <a:bodyPr wrap="square" lIns="0" tIns="0" rIns="0" bIns="0" anchor="t">
             <a:spAutoFit/>
           </a:bodyPr>
           <a:lstStyle/>
@@ -5055,6 +4846,7 @@
           <a:lstStyle/>
           <a:p>
             <a:pPr algn="ctr"/>
+            <a:endParaRPr/>
           </a:p>
         </p:txBody>
       </p:sp>
@@ -5075,7 +4867,7 @@
           <a:noFill/>
         </p:spPr>
         <p:txBody>
-          <a:bodyPr wrap="square" anchor="t" lIns="0" rIns="0" tIns="0" bIns="0">
+          <a:bodyPr wrap="square" lIns="0" tIns="0" rIns="0" bIns="0" anchor="t">
             <a:spAutoFit/>
           </a:bodyPr>
           <a:lstStyle/>
@@ -5120,7 +4912,7 @@
           <a:noFill/>
         </p:spPr>
         <p:txBody>
-          <a:bodyPr wrap="square" anchor="t" lIns="0" rIns="0" tIns="0" bIns="0">
+          <a:bodyPr wrap="square" lIns="0" tIns="0" rIns="0" bIns="0" anchor="t">
             <a:spAutoFit/>
           </a:bodyPr>
           <a:lstStyle/>
@@ -5189,7 +4981,7 @@
           </a:fontRef>
         </p:style>
         <p:txBody>
-          <a:bodyPr rtlCol="0" anchor="ctr" wrap="square" tIns="36576" bIns="36576"/>
+          <a:bodyPr wrap="square" tIns="36576" bIns="36576" rtlCol="0" anchor="ctr"/>
           <a:lstStyle/>
           <a:p>
             <a:pPr algn="ctr">
@@ -5272,6 +5064,7 @@
           <a:lstStyle/>
           <a:p>
             <a:pPr algn="ctr"/>
+            <a:endParaRPr/>
           </a:p>
         </p:txBody>
       </p:sp>
@@ -5316,7 +5109,7 @@
           </a:fontRef>
         </p:style>
         <p:txBody>
-          <a:bodyPr rtlCol="0" anchor="ctr" wrap="square" tIns="36576" bIns="36576"/>
+          <a:bodyPr wrap="square" tIns="36576" bIns="36576" rtlCol="0" anchor="ctr"/>
           <a:lstStyle/>
           <a:p>
             <a:pPr algn="ctr">
@@ -5380,6 +5173,7 @@
           <a:lstStyle/>
           <a:p>
             <a:pPr algn="ctr"/>
+            <a:endParaRPr/>
           </a:p>
         </p:txBody>
       </p:sp>
@@ -5424,7 +5218,7 @@
           </a:fontRef>
         </p:style>
         <p:txBody>
-          <a:bodyPr rtlCol="0" anchor="ctr" wrap="square" tIns="36576" bIns="36576"/>
+          <a:bodyPr wrap="square" tIns="36576" bIns="36576" rtlCol="0" anchor="ctr"/>
           <a:lstStyle/>
           <a:p>
             <a:pPr algn="ctr">
@@ -5507,6 +5301,7 @@
           <a:lstStyle/>
           <a:p>
             <a:pPr algn="ctr"/>
+            <a:endParaRPr/>
           </a:p>
         </p:txBody>
       </p:sp>
@@ -5551,7 +5346,7 @@
           </a:fontRef>
         </p:style>
         <p:txBody>
-          <a:bodyPr rtlCol="0" anchor="ctr" wrap="square" tIns="36576" bIns="36576"/>
+          <a:bodyPr wrap="square" tIns="36576" bIns="36576" rtlCol="0" anchor="ctr"/>
           <a:lstStyle/>
           <a:p>
             <a:pPr algn="ctr">
@@ -5634,6 +5429,7 @@
           <a:lstStyle/>
           <a:p>
             <a:pPr algn="ctr"/>
+            <a:endParaRPr/>
           </a:p>
         </p:txBody>
       </p:sp>
@@ -5678,7 +5474,7 @@
           </a:fontRef>
         </p:style>
         <p:txBody>
-          <a:bodyPr rtlCol="0" anchor="ctr" wrap="square" tIns="36576" bIns="36576"/>
+          <a:bodyPr wrap="square" tIns="36576" bIns="36576" rtlCol="0" anchor="ctr"/>
           <a:lstStyle/>
           <a:p>
             <a:pPr algn="ctr">
@@ -5742,6 +5538,7 @@
           <a:lstStyle/>
           <a:p>
             <a:pPr algn="ctr"/>
+            <a:endParaRPr/>
           </a:p>
         </p:txBody>
       </p:sp>
@@ -5786,7 +5583,7 @@
           </a:fontRef>
         </p:style>
         <p:txBody>
-          <a:bodyPr rtlCol="0" anchor="ctr" wrap="square" tIns="36576" bIns="36576"/>
+          <a:bodyPr wrap="square" tIns="36576" bIns="36576" rtlCol="0" anchor="ctr"/>
           <a:lstStyle/>
           <a:p>
             <a:pPr algn="ctr">
@@ -5850,6 +5647,7 @@
           <a:lstStyle/>
           <a:p>
             <a:pPr algn="ctr"/>
+            <a:endParaRPr/>
           </a:p>
         </p:txBody>
       </p:sp>
@@ -5870,7 +5668,7 @@
           <a:noFill/>
         </p:spPr>
         <p:txBody>
-          <a:bodyPr wrap="square" anchor="t" lIns="0" rIns="0" tIns="0" bIns="0">
+          <a:bodyPr wrap="square" lIns="0" tIns="0" rIns="0" bIns="0" anchor="t">
             <a:spAutoFit/>
           </a:bodyPr>
           <a:lstStyle/>
@@ -5938,7 +5736,7 @@
 </file>
 
 <file path=ppt/slides/slide11.xml><?xml version="1.0" encoding="utf-8"?>
-<p:sld xmlns:a="http://schemas.openxmlformats.org/drawingml/2006/main" xmlns:p="http://schemas.openxmlformats.org/presentationml/2006/main" xmlns:r="http://schemas.openxmlformats.org/officeDocument/2006/relationships">
+<p:sld xmlns:a="http://schemas.openxmlformats.org/drawingml/2006/main" xmlns:r="http://schemas.openxmlformats.org/officeDocument/2006/relationships" xmlns:p="http://schemas.openxmlformats.org/presentationml/2006/main">
   <p:cSld>
     <p:spTree>
       <p:nvGrpSpPr>
@@ -5946,7 +5744,14 @@
         <p:cNvGrpSpPr/>
         <p:nvPr/>
       </p:nvGrpSpPr>
-      <p:grpSpPr/>
+      <p:grpSpPr>
+        <a:xfrm>
+          <a:off x="0" y="0"/>
+          <a:ext cx="0" cy="0"/>
+          <a:chOff x="0" y="0"/>
+          <a:chExt cx="0" cy="0"/>
+        </a:xfrm>
+      </p:grpSpPr>
       <p:sp>
         <p:nvSpPr>
           <p:cNvPr id="2" name="Rectangle 1"/>
@@ -5988,6 +5793,7 @@
           <a:lstStyle/>
           <a:p>
             <a:pPr algn="ctr"/>
+            <a:endParaRPr/>
           </a:p>
         </p:txBody>
       </p:sp>
@@ -6008,7 +5814,7 @@
           <a:noFill/>
         </p:spPr>
         <p:txBody>
-          <a:bodyPr wrap="square" anchor="t" lIns="0" rIns="0" tIns="0" bIns="0">
+          <a:bodyPr wrap="square" lIns="0" tIns="0" rIns="0" bIns="0" anchor="t">
             <a:spAutoFit/>
           </a:bodyPr>
           <a:lstStyle/>
@@ -6053,7 +5859,7 @@
           <a:noFill/>
         </p:spPr>
         <p:txBody>
-          <a:bodyPr wrap="square" anchor="t" lIns="0" rIns="0" tIns="0" bIns="0">
+          <a:bodyPr wrap="square" lIns="0" tIns="0" rIns="0" bIns="0" anchor="t">
             <a:spAutoFit/>
           </a:bodyPr>
           <a:lstStyle/>
@@ -6122,6 +5928,7 @@
           <a:lstStyle/>
           <a:p>
             <a:pPr algn="ctr"/>
+            <a:endParaRPr/>
           </a:p>
         </p:txBody>
       </p:sp>
@@ -6142,7 +5949,7 @@
           <a:noFill/>
         </p:spPr>
         <p:txBody>
-          <a:bodyPr wrap="square" anchor="t" lIns="0" rIns="0" tIns="0" bIns="0">
+          <a:bodyPr wrap="square" lIns="0" tIns="0" rIns="0" bIns="0" anchor="t">
             <a:spAutoFit/>
           </a:bodyPr>
           <a:lstStyle/>
@@ -6187,7 +5994,7 @@
           <a:noFill/>
         </p:spPr>
         <p:txBody>
-          <a:bodyPr wrap="square" anchor="t" lIns="0" rIns="0" tIns="0" bIns="0">
+          <a:bodyPr wrap="square" lIns="0" tIns="0" rIns="0" bIns="0" anchor="t">
             <a:spAutoFit/>
           </a:bodyPr>
           <a:lstStyle/>
@@ -6234,9 +6041,27 @@
                 <a:tableStyleId>{5C22544A-7EE6-4342-B048-85BDC9FD1C3A}</a:tableStyleId>
               </a:tblPr>
               <a:tblGrid>
-                <a:gridCol w="1097280"/>
-                <a:gridCol w="2286000"/>
-                <a:gridCol w="7708392"/>
+                <a:gridCol w="1097280">
+                  <a:extLst>
+                    <a:ext uri="{9D8B030D-6E8A-4147-A177-3AD203B41FA5}">
+                      <a16:colId xmlns:a16="http://schemas.microsoft.com/office/drawing/2014/main" val="20000"/>
+                    </a:ext>
+                  </a:extLst>
+                </a:gridCol>
+                <a:gridCol w="2286000">
+                  <a:extLst>
+                    <a:ext uri="{9D8B030D-6E8A-4147-A177-3AD203B41FA5}">
+                      <a16:colId xmlns:a16="http://schemas.microsoft.com/office/drawing/2014/main" val="20001"/>
+                    </a:ext>
+                  </a:extLst>
+                </a:gridCol>
+                <a:gridCol w="7708392">
+                  <a:extLst>
+                    <a:ext uri="{9D8B030D-6E8A-4147-A177-3AD203B41FA5}">
+                      <a16:colId xmlns:a16="http://schemas.microsoft.com/office/drawing/2014/main" val="20002"/>
+                    </a:ext>
+                  </a:extLst>
+                </a:gridCol>
               </a:tblGrid>
               <a:tr h="896112">
                 <a:tc>
@@ -6255,7 +6080,7 @@
                       </a:r>
                     </a:p>
                   </a:txBody>
-                  <a:tcPr anchor="ctr" marL="91440" marT="18288" marB="18288">
+                  <a:tcPr marT="18288" marB="18288" anchor="ctr">
                     <a:solidFill>
                       <a:srgbClr val="1F3A5F"/>
                     </a:solidFill>
@@ -6277,7 +6102,7 @@
                       </a:r>
                     </a:p>
                   </a:txBody>
-                  <a:tcPr anchor="ctr" marL="91440" marT="18288" marB="18288">
+                  <a:tcPr marT="18288" marB="18288" anchor="ctr">
                     <a:solidFill>
                       <a:srgbClr val="1F3A5F"/>
                     </a:solidFill>
@@ -6299,12 +6124,17 @@
                       </a:r>
                     </a:p>
                   </a:txBody>
-                  <a:tcPr anchor="ctr" marL="91440" marT="18288" marB="18288">
+                  <a:tcPr marT="18288" marB="18288" anchor="ctr">
                     <a:solidFill>
                       <a:srgbClr val="1F3A5F"/>
                     </a:solidFill>
                   </a:tcPr>
                 </a:tc>
+                <a:extLst>
+                  <a:ext uri="{0D108BD9-81ED-4DB2-BD59-A6C34878D82A}">
+                    <a16:rowId xmlns:a16="http://schemas.microsoft.com/office/drawing/2014/main" val="10000"/>
+                  </a:ext>
+                </a:extLst>
               </a:tr>
               <a:tr h="896112">
                 <a:tc>
@@ -6323,7 +6153,7 @@
                       </a:r>
                     </a:p>
                   </a:txBody>
-                  <a:tcPr anchor="ctr" marL="91440" marT="18288" marB="18288">
+                  <a:tcPr marT="18288" marB="18288" anchor="ctr">
                     <a:solidFill>
                       <a:srgbClr val="FFFFFF"/>
                     </a:solidFill>
@@ -6345,7 +6175,7 @@
                       </a:r>
                     </a:p>
                   </a:txBody>
-                  <a:tcPr anchor="ctr" marL="91440" marT="18288" marB="18288">
+                  <a:tcPr marT="18288" marB="18288" anchor="ctr">
                     <a:solidFill>
                       <a:srgbClr val="FFFFFF"/>
                     </a:solidFill>
@@ -6367,12 +6197,17 @@
                       </a:r>
                     </a:p>
                   </a:txBody>
-                  <a:tcPr anchor="ctr" marL="91440" marT="18288" marB="18288">
+                  <a:tcPr marT="18288" marB="18288" anchor="ctr">
                     <a:solidFill>
                       <a:srgbClr val="FFFFFF"/>
                     </a:solidFill>
                   </a:tcPr>
                 </a:tc>
+                <a:extLst>
+                  <a:ext uri="{0D108BD9-81ED-4DB2-BD59-A6C34878D82A}">
+                    <a16:rowId xmlns:a16="http://schemas.microsoft.com/office/drawing/2014/main" val="10001"/>
+                  </a:ext>
+                </a:extLst>
               </a:tr>
               <a:tr h="896112">
                 <a:tc>
@@ -6391,7 +6226,7 @@
                       </a:r>
                     </a:p>
                   </a:txBody>
-                  <a:tcPr anchor="ctr" marL="91440" marT="18288" marB="18288">
+                  <a:tcPr marT="18288" marB="18288" anchor="ctr">
                     <a:solidFill>
                       <a:srgbClr val="EEF1F5"/>
                     </a:solidFill>
@@ -6413,7 +6248,7 @@
                       </a:r>
                     </a:p>
                   </a:txBody>
-                  <a:tcPr anchor="ctr" marL="91440" marT="18288" marB="18288">
+                  <a:tcPr marT="18288" marB="18288" anchor="ctr">
                     <a:solidFill>
                       <a:srgbClr val="EEF1F5"/>
                     </a:solidFill>
@@ -6435,12 +6270,17 @@
                       </a:r>
                     </a:p>
                   </a:txBody>
-                  <a:tcPr anchor="ctr" marL="91440" marT="18288" marB="18288">
+                  <a:tcPr marT="18288" marB="18288" anchor="ctr">
                     <a:solidFill>
                       <a:srgbClr val="EEF1F5"/>
                     </a:solidFill>
                   </a:tcPr>
                 </a:tc>
+                <a:extLst>
+                  <a:ext uri="{0D108BD9-81ED-4DB2-BD59-A6C34878D82A}">
+                    <a16:rowId xmlns:a16="http://schemas.microsoft.com/office/drawing/2014/main" val="10002"/>
+                  </a:ext>
+                </a:extLst>
               </a:tr>
               <a:tr h="896112">
                 <a:tc>
@@ -6459,7 +6299,7 @@
                       </a:r>
                     </a:p>
                   </a:txBody>
-                  <a:tcPr anchor="ctr" marL="91440" marT="18288" marB="18288">
+                  <a:tcPr marT="18288" marB="18288" anchor="ctr">
                     <a:solidFill>
                       <a:srgbClr val="FFFFFF"/>
                     </a:solidFill>
@@ -6481,7 +6321,7 @@
                       </a:r>
                     </a:p>
                   </a:txBody>
-                  <a:tcPr anchor="ctr" marL="91440" marT="18288" marB="18288">
+                  <a:tcPr marT="18288" marB="18288" anchor="ctr">
                     <a:solidFill>
                       <a:srgbClr val="FFFFFF"/>
                     </a:solidFill>
@@ -6503,12 +6343,17 @@
                       </a:r>
                     </a:p>
                   </a:txBody>
-                  <a:tcPr anchor="ctr" marL="91440" marT="18288" marB="18288">
+                  <a:tcPr marT="18288" marB="18288" anchor="ctr">
                     <a:solidFill>
                       <a:srgbClr val="FFFFFF"/>
                     </a:solidFill>
                   </a:tcPr>
                 </a:tc>
+                <a:extLst>
+                  <a:ext uri="{0D108BD9-81ED-4DB2-BD59-A6C34878D82A}">
+                    <a16:rowId xmlns:a16="http://schemas.microsoft.com/office/drawing/2014/main" val="10003"/>
+                  </a:ext>
+                </a:extLst>
               </a:tr>
               <a:tr h="896112">
                 <a:tc>
@@ -6527,7 +6372,7 @@
                       </a:r>
                     </a:p>
                   </a:txBody>
-                  <a:tcPr anchor="ctr" marL="91440" marT="18288" marB="18288">
+                  <a:tcPr marT="18288" marB="18288" anchor="ctr">
                     <a:solidFill>
                       <a:srgbClr val="EEF1F5"/>
                     </a:solidFill>
@@ -6549,7 +6394,7 @@
                       </a:r>
                     </a:p>
                   </a:txBody>
-                  <a:tcPr anchor="ctr" marL="91440" marT="18288" marB="18288">
+                  <a:tcPr marT="18288" marB="18288" anchor="ctr">
                     <a:solidFill>
                       <a:srgbClr val="EEF1F5"/>
                     </a:solidFill>
@@ -6571,12 +6416,17 @@
                       </a:r>
                     </a:p>
                   </a:txBody>
-                  <a:tcPr anchor="ctr" marL="91440" marT="18288" marB="18288">
+                  <a:tcPr marT="18288" marB="18288" anchor="ctr">
                     <a:solidFill>
                       <a:srgbClr val="EEF1F5"/>
                     </a:solidFill>
                   </a:tcPr>
                 </a:tc>
+                <a:extLst>
+                  <a:ext uri="{0D108BD9-81ED-4DB2-BD59-A6C34878D82A}">
+                    <a16:rowId xmlns:a16="http://schemas.microsoft.com/office/drawing/2014/main" val="10004"/>
+                  </a:ext>
+                </a:extLst>
               </a:tr>
             </a:tbl>
           </a:graphicData>
@@ -6590,7 +6440,7 @@
         </p:nvSpPr>
         <p:spPr>
           <a:xfrm>
-            <a:off x="548640" y="5440680"/>
+            <a:off x="534924" y="5943600"/>
             <a:ext cx="11091672" cy="822960"/>
           </a:xfrm>
           <a:prstGeom prst="rect">
@@ -6599,7 +6449,7 @@
           <a:noFill/>
         </p:spPr>
         <p:txBody>
-          <a:bodyPr wrap="square" anchor="t" lIns="0" rIns="0" tIns="0" bIns="0">
+          <a:bodyPr wrap="square" lIns="0" tIns="0" rIns="0" bIns="0" anchor="t">
             <a:spAutoFit/>
           </a:bodyPr>
           <a:lstStyle/>
@@ -6616,7 +6466,7 @@
               </a:spcAft>
             </a:pPr>
             <a:r>
-              <a:rPr sz="1300" b="1" i="0">
+              <a:rPr sz="1300" b="1" i="0" dirty="0">
                 <a:solidFill>
                   <a:srgbClr val="1F3A5F"/>
                 </a:solidFill>
@@ -6625,7 +6475,7 @@
               <a:t>Honest scope: </a:t>
             </a:r>
             <a:r>
-              <a:rPr sz="1300" b="0" i="0">
+              <a:rPr sz="1300" b="0" i="0" dirty="0">
                 <a:solidFill>
                   <a:srgbClr val="3C4654"/>
                 </a:solidFill>
@@ -6645,7 +6495,7 @@
 </file>
 
 <file path=ppt/slides/slide12.xml><?xml version="1.0" encoding="utf-8"?>
-<p:sld xmlns:a="http://schemas.openxmlformats.org/drawingml/2006/main" xmlns:p="http://schemas.openxmlformats.org/presentationml/2006/main" xmlns:r="http://schemas.openxmlformats.org/officeDocument/2006/relationships">
+<p:sld xmlns:a="http://schemas.openxmlformats.org/drawingml/2006/main" xmlns:r="http://schemas.openxmlformats.org/officeDocument/2006/relationships" xmlns:p="http://schemas.openxmlformats.org/presentationml/2006/main">
   <p:cSld>
     <p:spTree>
       <p:nvGrpSpPr>
@@ -6653,7 +6503,14 @@
         <p:cNvGrpSpPr/>
         <p:nvPr/>
       </p:nvGrpSpPr>
-      <p:grpSpPr/>
+      <p:grpSpPr>
+        <a:xfrm>
+          <a:off x="0" y="0"/>
+          <a:ext cx="0" cy="0"/>
+          <a:chOff x="0" y="0"/>
+          <a:chExt cx="0" cy="0"/>
+        </a:xfrm>
+      </p:grpSpPr>
       <p:sp>
         <p:nvSpPr>
           <p:cNvPr id="2" name="Rectangle 1"/>
@@ -6695,6 +6552,7 @@
           <a:lstStyle/>
           <a:p>
             <a:pPr algn="ctr"/>
+            <a:endParaRPr/>
           </a:p>
         </p:txBody>
       </p:sp>
@@ -6715,7 +6573,7 @@
           <a:noFill/>
         </p:spPr>
         <p:txBody>
-          <a:bodyPr wrap="square" anchor="t" lIns="0" rIns="0" tIns="0" bIns="0">
+          <a:bodyPr wrap="square" lIns="0" tIns="0" rIns="0" bIns="0" anchor="t">
             <a:spAutoFit/>
           </a:bodyPr>
           <a:lstStyle/>
@@ -6760,7 +6618,7 @@
           <a:noFill/>
         </p:spPr>
         <p:txBody>
-          <a:bodyPr wrap="square" anchor="t" lIns="0" rIns="0" tIns="0" bIns="0">
+          <a:bodyPr wrap="square" lIns="0" tIns="0" rIns="0" bIns="0" anchor="t">
             <a:spAutoFit/>
           </a:bodyPr>
           <a:lstStyle/>
@@ -6829,6 +6687,7 @@
           <a:lstStyle/>
           <a:p>
             <a:pPr algn="ctr"/>
+            <a:endParaRPr/>
           </a:p>
         </p:txBody>
       </p:sp>
@@ -6849,7 +6708,7 @@
           <a:noFill/>
         </p:spPr>
         <p:txBody>
-          <a:bodyPr wrap="square" anchor="t" lIns="0" rIns="0" tIns="0" bIns="0">
+          <a:bodyPr wrap="square" lIns="0" tIns="0" rIns="0" bIns="0" anchor="t">
             <a:spAutoFit/>
           </a:bodyPr>
           <a:lstStyle/>
@@ -6894,7 +6753,7 @@
           <a:noFill/>
         </p:spPr>
         <p:txBody>
-          <a:bodyPr wrap="square" anchor="t" lIns="0" rIns="0" tIns="0" bIns="0">
+          <a:bodyPr wrap="square" lIns="0" tIns="0" rIns="0" bIns="0" anchor="t">
             <a:spAutoFit/>
           </a:bodyPr>
           <a:lstStyle/>
@@ -6963,7 +6822,7 @@
           </a:fontRef>
         </p:style>
         <p:txBody>
-          <a:bodyPr rtlCol="0" anchor="ctr" wrap="square" tIns="36576" bIns="36576"/>
+          <a:bodyPr wrap="square" tIns="36576" bIns="36576" rtlCol="0" anchor="ctr"/>
           <a:lstStyle/>
           <a:p>
             <a:pPr algn="ctr">
@@ -7046,6 +6905,7 @@
           <a:lstStyle/>
           <a:p>
             <a:pPr algn="ctr"/>
+            <a:endParaRPr/>
           </a:p>
         </p:txBody>
       </p:sp>
@@ -7090,7 +6950,7 @@
           </a:fontRef>
         </p:style>
         <p:txBody>
-          <a:bodyPr rtlCol="0" anchor="ctr" wrap="square" tIns="36576" bIns="36576"/>
+          <a:bodyPr wrap="square" tIns="36576" bIns="36576" rtlCol="0" anchor="ctr"/>
           <a:lstStyle/>
           <a:p>
             <a:pPr algn="ctr">
@@ -7173,6 +7033,7 @@
           <a:lstStyle/>
           <a:p>
             <a:pPr algn="ctr"/>
+            <a:endParaRPr/>
           </a:p>
         </p:txBody>
       </p:sp>
@@ -7217,7 +7078,7 @@
           </a:fontRef>
         </p:style>
         <p:txBody>
-          <a:bodyPr rtlCol="0" anchor="ctr" wrap="square" tIns="36576" bIns="36576"/>
+          <a:bodyPr wrap="square" tIns="36576" bIns="36576" rtlCol="0" anchor="ctr"/>
           <a:lstStyle/>
           <a:p>
             <a:pPr algn="ctr">
@@ -7300,6 +7161,7 @@
           <a:lstStyle/>
           <a:p>
             <a:pPr algn="ctr"/>
+            <a:endParaRPr/>
           </a:p>
         </p:txBody>
       </p:sp>
@@ -7344,7 +7206,7 @@
           </a:fontRef>
         </p:style>
         <p:txBody>
-          <a:bodyPr rtlCol="0" anchor="ctr" wrap="square" tIns="36576" bIns="36576"/>
+          <a:bodyPr wrap="square" tIns="36576" bIns="36576" rtlCol="0" anchor="ctr"/>
           <a:lstStyle/>
           <a:p>
             <a:pPr algn="ctr">
@@ -7427,6 +7289,7 @@
           <a:lstStyle/>
           <a:p>
             <a:pPr algn="ctr"/>
+            <a:endParaRPr/>
           </a:p>
         </p:txBody>
       </p:sp>
@@ -7471,7 +7334,7 @@
           </a:fontRef>
         </p:style>
         <p:txBody>
-          <a:bodyPr rtlCol="0" anchor="ctr" wrap="square" tIns="36576" bIns="36576"/>
+          <a:bodyPr wrap="square" tIns="36576" bIns="36576" rtlCol="0" anchor="ctr"/>
           <a:lstStyle/>
           <a:p>
             <a:pPr algn="ctr">
@@ -7554,6 +7417,7 @@
           <a:lstStyle/>
           <a:p>
             <a:pPr algn="ctr"/>
+            <a:endParaRPr/>
           </a:p>
         </p:txBody>
       </p:sp>
@@ -7598,7 +7462,7 @@
           </a:fontRef>
         </p:style>
         <p:txBody>
-          <a:bodyPr rtlCol="0" anchor="ctr" wrap="square" tIns="36576" bIns="36576"/>
+          <a:bodyPr wrap="square" tIns="36576" bIns="36576" rtlCol="0" anchor="ctr"/>
           <a:lstStyle/>
           <a:p>
             <a:pPr algn="ctr">
@@ -7657,7 +7521,7 @@
           <a:noFill/>
         </p:spPr>
         <p:txBody>
-          <a:bodyPr wrap="square" anchor="t" lIns="0" rIns="0" tIns="0" bIns="0">
+          <a:bodyPr wrap="square" lIns="0" tIns="0" rIns="0" bIns="0" anchor="t">
             <a:spAutoFit/>
           </a:bodyPr>
           <a:lstStyle/>
@@ -7716,7 +7580,7 @@
 </file>
 
 <file path=ppt/slides/slide13.xml><?xml version="1.0" encoding="utf-8"?>
-<p:sld xmlns:a="http://schemas.openxmlformats.org/drawingml/2006/main" xmlns:p="http://schemas.openxmlformats.org/presentationml/2006/main" xmlns:r="http://schemas.openxmlformats.org/officeDocument/2006/relationships">
+<p:sld xmlns:a="http://schemas.openxmlformats.org/drawingml/2006/main" xmlns:r="http://schemas.openxmlformats.org/officeDocument/2006/relationships" xmlns:p="http://schemas.openxmlformats.org/presentationml/2006/main">
   <p:cSld>
     <p:spTree>
       <p:nvGrpSpPr>
@@ -7724,7 +7588,14 @@
         <p:cNvGrpSpPr/>
         <p:nvPr/>
       </p:nvGrpSpPr>
-      <p:grpSpPr/>
+      <p:grpSpPr>
+        <a:xfrm>
+          <a:off x="0" y="0"/>
+          <a:ext cx="0" cy="0"/>
+          <a:chOff x="0" y="0"/>
+          <a:chExt cx="0" cy="0"/>
+        </a:xfrm>
+      </p:grpSpPr>
       <p:sp>
         <p:nvSpPr>
           <p:cNvPr id="2" name="Rectangle 1"/>
@@ -7766,6 +7637,7 @@
           <a:lstStyle/>
           <a:p>
             <a:pPr algn="ctr"/>
+            <a:endParaRPr/>
           </a:p>
         </p:txBody>
       </p:sp>
@@ -7786,7 +7658,7 @@
           <a:noFill/>
         </p:spPr>
         <p:txBody>
-          <a:bodyPr wrap="square" anchor="t" lIns="0" rIns="0" tIns="0" bIns="0">
+          <a:bodyPr wrap="square" lIns="0" tIns="0" rIns="0" bIns="0" anchor="t">
             <a:spAutoFit/>
           </a:bodyPr>
           <a:lstStyle/>
@@ -7831,7 +7703,7 @@
           <a:noFill/>
         </p:spPr>
         <p:txBody>
-          <a:bodyPr wrap="square" anchor="t" lIns="0" rIns="0" tIns="0" bIns="0">
+          <a:bodyPr wrap="square" lIns="0" tIns="0" rIns="0" bIns="0" anchor="t">
             <a:spAutoFit/>
           </a:bodyPr>
           <a:lstStyle/>
@@ -7900,6 +7772,7 @@
           <a:lstStyle/>
           <a:p>
             <a:pPr algn="ctr"/>
+            <a:endParaRPr/>
           </a:p>
         </p:txBody>
       </p:sp>
@@ -7920,7 +7793,7 @@
           <a:noFill/>
         </p:spPr>
         <p:txBody>
-          <a:bodyPr wrap="square" anchor="t" lIns="0" rIns="0" tIns="0" bIns="0">
+          <a:bodyPr wrap="square" lIns="0" tIns="0" rIns="0" bIns="0" anchor="t">
             <a:spAutoFit/>
           </a:bodyPr>
           <a:lstStyle/>
@@ -7965,7 +7838,7 @@
           <a:noFill/>
         </p:spPr>
         <p:txBody>
-          <a:bodyPr wrap="square" anchor="t" lIns="0" rIns="0" tIns="0" bIns="0">
+          <a:bodyPr wrap="square" lIns="0" tIns="0" rIns="0" bIns="0" anchor="t">
             <a:spAutoFit/>
           </a:bodyPr>
           <a:lstStyle/>
@@ -8010,7 +7883,7 @@
           <a:noFill/>
         </p:spPr>
         <p:txBody>
-          <a:bodyPr wrap="square" anchor="t" lIns="0" rIns="0" tIns="0" bIns="0">
+          <a:bodyPr wrap="square" lIns="0" tIns="0" rIns="0" bIns="0" anchor="t">
             <a:spAutoFit/>
           </a:bodyPr>
           <a:lstStyle/>
@@ -8057,10 +7930,34 @@
                 <a:tableStyleId>{5C22544A-7EE6-4342-B048-85BDC9FD1C3A}</a:tableStyleId>
               </a:tblPr>
               <a:tblGrid>
-                <a:gridCol w="2194560"/>
-                <a:gridCol w="2743200"/>
-                <a:gridCol w="4325112"/>
-                <a:gridCol w="1828800"/>
+                <a:gridCol w="2194560">
+                  <a:extLst>
+                    <a:ext uri="{9D8B030D-6E8A-4147-A177-3AD203B41FA5}">
+                      <a16:colId xmlns:a16="http://schemas.microsoft.com/office/drawing/2014/main" val="20000"/>
+                    </a:ext>
+                  </a:extLst>
+                </a:gridCol>
+                <a:gridCol w="2743200">
+                  <a:extLst>
+                    <a:ext uri="{9D8B030D-6E8A-4147-A177-3AD203B41FA5}">
+                      <a16:colId xmlns:a16="http://schemas.microsoft.com/office/drawing/2014/main" val="20001"/>
+                    </a:ext>
+                  </a:extLst>
+                </a:gridCol>
+                <a:gridCol w="4325112">
+                  <a:extLst>
+                    <a:ext uri="{9D8B030D-6E8A-4147-A177-3AD203B41FA5}">
+                      <a16:colId xmlns:a16="http://schemas.microsoft.com/office/drawing/2014/main" val="20002"/>
+                    </a:ext>
+                  </a:extLst>
+                </a:gridCol>
+                <a:gridCol w="1828800">
+                  <a:extLst>
+                    <a:ext uri="{9D8B030D-6E8A-4147-A177-3AD203B41FA5}">
+                      <a16:colId xmlns:a16="http://schemas.microsoft.com/office/drawing/2014/main" val="20003"/>
+                    </a:ext>
+                  </a:extLst>
+                </a:gridCol>
               </a:tblGrid>
               <a:tr h="512064">
                 <a:tc>
@@ -8079,7 +7976,7 @@
                       </a:r>
                     </a:p>
                   </a:txBody>
-                  <a:tcPr anchor="ctr" marL="91440" marT="18288" marB="18288">
+                  <a:tcPr marT="18288" marB="18288" anchor="ctr">
                     <a:solidFill>
                       <a:srgbClr val="1F3A5F"/>
                     </a:solidFill>
@@ -8101,7 +7998,7 @@
                       </a:r>
                     </a:p>
                   </a:txBody>
-                  <a:tcPr anchor="ctr" marL="91440" marT="18288" marB="18288">
+                  <a:tcPr marT="18288" marB="18288" anchor="ctr">
                     <a:solidFill>
                       <a:srgbClr val="1F3A5F"/>
                     </a:solidFill>
@@ -8123,7 +8020,7 @@
                       </a:r>
                     </a:p>
                   </a:txBody>
-                  <a:tcPr anchor="ctr" marL="91440" marT="18288" marB="18288">
+                  <a:tcPr marT="18288" marB="18288" anchor="ctr">
                     <a:solidFill>
                       <a:srgbClr val="1F3A5F"/>
                     </a:solidFill>
@@ -8145,12 +8042,17 @@
                       </a:r>
                     </a:p>
                   </a:txBody>
-                  <a:tcPr anchor="ctr" marL="91440" marT="18288" marB="18288">
+                  <a:tcPr marT="18288" marB="18288" anchor="ctr">
                     <a:solidFill>
                       <a:srgbClr val="1F3A5F"/>
                     </a:solidFill>
                   </a:tcPr>
                 </a:tc>
+                <a:extLst>
+                  <a:ext uri="{0D108BD9-81ED-4DB2-BD59-A6C34878D82A}">
+                    <a16:rowId xmlns:a16="http://schemas.microsoft.com/office/drawing/2014/main" val="10000"/>
+                  </a:ext>
+                </a:extLst>
               </a:tr>
               <a:tr h="512064">
                 <a:tc>
@@ -8169,7 +8071,7 @@
                       </a:r>
                     </a:p>
                   </a:txBody>
-                  <a:tcPr anchor="ctr" marL="91440" marT="18288" marB="18288">
+                  <a:tcPr marT="18288" marB="18288" anchor="ctr">
                     <a:solidFill>
                       <a:srgbClr val="FFFFFF"/>
                     </a:solidFill>
@@ -8191,7 +8093,7 @@
                       </a:r>
                     </a:p>
                   </a:txBody>
-                  <a:tcPr anchor="ctr" marL="91440" marT="18288" marB="18288">
+                  <a:tcPr marT="18288" marB="18288" anchor="ctr">
                     <a:solidFill>
                       <a:srgbClr val="FFFFFF"/>
                     </a:solidFill>
@@ -8213,7 +8115,7 @@
                       </a:r>
                     </a:p>
                   </a:txBody>
-                  <a:tcPr anchor="ctr" marL="91440" marT="18288" marB="18288">
+                  <a:tcPr marT="18288" marB="18288" anchor="ctr">
                     <a:solidFill>
                       <a:srgbClr val="FFFFFF"/>
                     </a:solidFill>
@@ -8235,12 +8137,17 @@
                       </a:r>
                     </a:p>
                   </a:txBody>
-                  <a:tcPr anchor="ctr" marL="91440" marT="18288" marB="18288">
+                  <a:tcPr marT="18288" marB="18288" anchor="ctr">
                     <a:solidFill>
                       <a:srgbClr val="FFFFFF"/>
                     </a:solidFill>
                   </a:tcPr>
                 </a:tc>
+                <a:extLst>
+                  <a:ext uri="{0D108BD9-81ED-4DB2-BD59-A6C34878D82A}">
+                    <a16:rowId xmlns:a16="http://schemas.microsoft.com/office/drawing/2014/main" val="10001"/>
+                  </a:ext>
+                </a:extLst>
               </a:tr>
               <a:tr h="512064">
                 <a:tc>
@@ -8259,7 +8166,7 @@
                       </a:r>
                     </a:p>
                   </a:txBody>
-                  <a:tcPr anchor="ctr" marL="91440" marT="18288" marB="18288">
+                  <a:tcPr marT="18288" marB="18288" anchor="ctr">
                     <a:solidFill>
                       <a:srgbClr val="EEF1F5"/>
                     </a:solidFill>
@@ -8281,7 +8188,7 @@
                       </a:r>
                     </a:p>
                   </a:txBody>
-                  <a:tcPr anchor="ctr" marL="91440" marT="18288" marB="18288">
+                  <a:tcPr marT="18288" marB="18288" anchor="ctr">
                     <a:solidFill>
                       <a:srgbClr val="EEF1F5"/>
                     </a:solidFill>
@@ -8303,7 +8210,7 @@
                       </a:r>
                     </a:p>
                   </a:txBody>
-                  <a:tcPr anchor="ctr" marL="91440" marT="18288" marB="18288">
+                  <a:tcPr marT="18288" marB="18288" anchor="ctr">
                     <a:solidFill>
                       <a:srgbClr val="EEF1F5"/>
                     </a:solidFill>
@@ -8325,12 +8232,17 @@
                       </a:r>
                     </a:p>
                   </a:txBody>
-                  <a:tcPr anchor="ctr" marL="91440" marT="18288" marB="18288">
+                  <a:tcPr marT="18288" marB="18288" anchor="ctr">
                     <a:solidFill>
                       <a:srgbClr val="EEF1F5"/>
                     </a:solidFill>
                   </a:tcPr>
                 </a:tc>
+                <a:extLst>
+                  <a:ext uri="{0D108BD9-81ED-4DB2-BD59-A6C34878D82A}">
+                    <a16:rowId xmlns:a16="http://schemas.microsoft.com/office/drawing/2014/main" val="10002"/>
+                  </a:ext>
+                </a:extLst>
               </a:tr>
               <a:tr h="512064">
                 <a:tc>
@@ -8349,7 +8261,7 @@
                       </a:r>
                     </a:p>
                   </a:txBody>
-                  <a:tcPr anchor="ctr" marL="91440" marT="18288" marB="18288">
+                  <a:tcPr marT="18288" marB="18288" anchor="ctr">
                     <a:solidFill>
                       <a:srgbClr val="FFFFFF"/>
                     </a:solidFill>
@@ -8371,7 +8283,7 @@
                       </a:r>
                     </a:p>
                   </a:txBody>
-                  <a:tcPr anchor="ctr" marL="91440" marT="18288" marB="18288">
+                  <a:tcPr marT="18288" marB="18288" anchor="ctr">
                     <a:solidFill>
                       <a:srgbClr val="FFFFFF"/>
                     </a:solidFill>
@@ -8393,7 +8305,7 @@
                       </a:r>
                     </a:p>
                   </a:txBody>
-                  <a:tcPr anchor="ctr" marL="91440" marT="18288" marB="18288">
+                  <a:tcPr marT="18288" marB="18288" anchor="ctr">
                     <a:solidFill>
                       <a:srgbClr val="FFFFFF"/>
                     </a:solidFill>
@@ -8415,12 +8327,17 @@
                       </a:r>
                     </a:p>
                   </a:txBody>
-                  <a:tcPr anchor="ctr" marL="91440" marT="18288" marB="18288">
+                  <a:tcPr marT="18288" marB="18288" anchor="ctr">
                     <a:solidFill>
                       <a:srgbClr val="FFFFFF"/>
                     </a:solidFill>
                   </a:tcPr>
                 </a:tc>
+                <a:extLst>
+                  <a:ext uri="{0D108BD9-81ED-4DB2-BD59-A6C34878D82A}">
+                    <a16:rowId xmlns:a16="http://schemas.microsoft.com/office/drawing/2014/main" val="10003"/>
+                  </a:ext>
+                </a:extLst>
               </a:tr>
               <a:tr h="512064">
                 <a:tc>
@@ -8439,7 +8356,7 @@
                       </a:r>
                     </a:p>
                   </a:txBody>
-                  <a:tcPr anchor="ctr" marL="91440" marT="18288" marB="18288">
+                  <a:tcPr marT="18288" marB="18288" anchor="ctr">
                     <a:solidFill>
                       <a:srgbClr val="EEF1F5"/>
                     </a:solidFill>
@@ -8461,7 +8378,7 @@
                       </a:r>
                     </a:p>
                   </a:txBody>
-                  <a:tcPr anchor="ctr" marL="91440" marT="18288" marB="18288">
+                  <a:tcPr marT="18288" marB="18288" anchor="ctr">
                     <a:solidFill>
                       <a:srgbClr val="EEF1F5"/>
                     </a:solidFill>
@@ -8483,7 +8400,7 @@
                       </a:r>
                     </a:p>
                   </a:txBody>
-                  <a:tcPr anchor="ctr" marL="91440" marT="18288" marB="18288">
+                  <a:tcPr marT="18288" marB="18288" anchor="ctr">
                     <a:solidFill>
                       <a:srgbClr val="EEF1F5"/>
                     </a:solidFill>
@@ -8505,12 +8422,17 @@
                       </a:r>
                     </a:p>
                   </a:txBody>
-                  <a:tcPr anchor="ctr" marL="91440" marT="18288" marB="18288">
+                  <a:tcPr marT="18288" marB="18288" anchor="ctr">
                     <a:solidFill>
                       <a:srgbClr val="EEF1F5"/>
                     </a:solidFill>
                   </a:tcPr>
                 </a:tc>
+                <a:extLst>
+                  <a:ext uri="{0D108BD9-81ED-4DB2-BD59-A6C34878D82A}">
+                    <a16:rowId xmlns:a16="http://schemas.microsoft.com/office/drawing/2014/main" val="10004"/>
+                  </a:ext>
+                </a:extLst>
               </a:tr>
               <a:tr h="512064">
                 <a:tc>
@@ -8529,7 +8451,7 @@
                       </a:r>
                     </a:p>
                   </a:txBody>
-                  <a:tcPr anchor="ctr" marL="91440" marT="18288" marB="18288">
+                  <a:tcPr marT="18288" marB="18288" anchor="ctr">
                     <a:solidFill>
                       <a:srgbClr val="FFFFFF"/>
                     </a:solidFill>
@@ -8551,7 +8473,7 @@
                       </a:r>
                     </a:p>
                   </a:txBody>
-                  <a:tcPr anchor="ctr" marL="91440" marT="18288" marB="18288">
+                  <a:tcPr marT="18288" marB="18288" anchor="ctr">
                     <a:solidFill>
                       <a:srgbClr val="FFFFFF"/>
                     </a:solidFill>
@@ -8573,7 +8495,7 @@
                       </a:r>
                     </a:p>
                   </a:txBody>
-                  <a:tcPr anchor="ctr" marL="91440" marT="18288" marB="18288">
+                  <a:tcPr marT="18288" marB="18288" anchor="ctr">
                     <a:solidFill>
                       <a:srgbClr val="FFFFFF"/>
                     </a:solidFill>
@@ -8595,12 +8517,17 @@
                       </a:r>
                     </a:p>
                   </a:txBody>
-                  <a:tcPr anchor="ctr" marL="91440" marT="18288" marB="18288">
+                  <a:tcPr marT="18288" marB="18288" anchor="ctr">
                     <a:solidFill>
                       <a:srgbClr val="FFFFFF"/>
                     </a:solidFill>
                   </a:tcPr>
                 </a:tc>
+                <a:extLst>
+                  <a:ext uri="{0D108BD9-81ED-4DB2-BD59-A6C34878D82A}">
+                    <a16:rowId xmlns:a16="http://schemas.microsoft.com/office/drawing/2014/main" val="10005"/>
+                  </a:ext>
+                </a:extLst>
               </a:tr>
               <a:tr h="512064">
                 <a:tc>
@@ -8619,7 +8546,7 @@
                       </a:r>
                     </a:p>
                   </a:txBody>
-                  <a:tcPr anchor="ctr" marL="91440" marT="18288" marB="18288">
+                  <a:tcPr marT="18288" marB="18288" anchor="ctr">
                     <a:solidFill>
                       <a:srgbClr val="EEF1F5"/>
                     </a:solidFill>
@@ -8641,7 +8568,7 @@
                       </a:r>
                     </a:p>
                   </a:txBody>
-                  <a:tcPr anchor="ctr" marL="91440" marT="18288" marB="18288">
+                  <a:tcPr marT="18288" marB="18288" anchor="ctr">
                     <a:solidFill>
                       <a:srgbClr val="EEF1F5"/>
                     </a:solidFill>
@@ -8663,7 +8590,7 @@
                       </a:r>
                     </a:p>
                   </a:txBody>
-                  <a:tcPr anchor="ctr" marL="91440" marT="18288" marB="18288">
+                  <a:tcPr marT="18288" marB="18288" anchor="ctr">
                     <a:solidFill>
                       <a:srgbClr val="EEF1F5"/>
                     </a:solidFill>
@@ -8685,12 +8612,17 @@
                       </a:r>
                     </a:p>
                   </a:txBody>
-                  <a:tcPr anchor="ctr" marL="91440" marT="18288" marB="18288">
+                  <a:tcPr marT="18288" marB="18288" anchor="ctr">
                     <a:solidFill>
                       <a:srgbClr val="EEF1F5"/>
                     </a:solidFill>
                   </a:tcPr>
                 </a:tc>
+                <a:extLst>
+                  <a:ext uri="{0D108BD9-81ED-4DB2-BD59-A6C34878D82A}">
+                    <a16:rowId xmlns:a16="http://schemas.microsoft.com/office/drawing/2014/main" val="10006"/>
+                  </a:ext>
+                </a:extLst>
               </a:tr>
             </a:tbl>
           </a:graphicData>
@@ -8713,7 +8645,7 @@
           <a:noFill/>
         </p:spPr>
         <p:txBody>
-          <a:bodyPr wrap="square" anchor="t" lIns="0" rIns="0" tIns="0" bIns="0">
+          <a:bodyPr wrap="square" lIns="0" tIns="0" rIns="0" bIns="0" anchor="t">
             <a:spAutoFit/>
           </a:bodyPr>
           <a:lstStyle/>
@@ -8759,7 +8691,7 @@
 </file>
 
 <file path=ppt/slides/slide14.xml><?xml version="1.0" encoding="utf-8"?>
-<p:sld xmlns:a="http://schemas.openxmlformats.org/drawingml/2006/main" xmlns:p="http://schemas.openxmlformats.org/presentationml/2006/main" xmlns:r="http://schemas.openxmlformats.org/officeDocument/2006/relationships">
+<p:sld xmlns:a="http://schemas.openxmlformats.org/drawingml/2006/main" xmlns:r="http://schemas.openxmlformats.org/officeDocument/2006/relationships" xmlns:p="http://schemas.openxmlformats.org/presentationml/2006/main">
   <p:cSld>
     <p:spTree>
       <p:nvGrpSpPr>
@@ -8767,7 +8699,14 @@
         <p:cNvGrpSpPr/>
         <p:nvPr/>
       </p:nvGrpSpPr>
-      <p:grpSpPr/>
+      <p:grpSpPr>
+        <a:xfrm>
+          <a:off x="0" y="0"/>
+          <a:ext cx="0" cy="0"/>
+          <a:chOff x="0" y="0"/>
+          <a:chExt cx="0" cy="0"/>
+        </a:xfrm>
+      </p:grpSpPr>
       <p:sp>
         <p:nvSpPr>
           <p:cNvPr id="2" name="Rectangle 1"/>
@@ -8809,6 +8748,7 @@
           <a:lstStyle/>
           <a:p>
             <a:pPr algn="ctr"/>
+            <a:endParaRPr/>
           </a:p>
         </p:txBody>
       </p:sp>
@@ -8829,7 +8769,7 @@
           <a:noFill/>
         </p:spPr>
         <p:txBody>
-          <a:bodyPr wrap="square" anchor="t" lIns="0" rIns="0" tIns="0" bIns="0">
+          <a:bodyPr wrap="square" lIns="0" tIns="0" rIns="0" bIns="0" anchor="t">
             <a:spAutoFit/>
           </a:bodyPr>
           <a:lstStyle/>
@@ -8874,7 +8814,7 @@
           <a:noFill/>
         </p:spPr>
         <p:txBody>
-          <a:bodyPr wrap="square" anchor="t" lIns="0" rIns="0" tIns="0" bIns="0">
+          <a:bodyPr wrap="square" lIns="0" tIns="0" rIns="0" bIns="0" anchor="t">
             <a:spAutoFit/>
           </a:bodyPr>
           <a:lstStyle/>
@@ -8943,6 +8883,7 @@
           <a:lstStyle/>
           <a:p>
             <a:pPr algn="ctr"/>
+            <a:endParaRPr/>
           </a:p>
         </p:txBody>
       </p:sp>
@@ -8963,7 +8904,7 @@
           <a:noFill/>
         </p:spPr>
         <p:txBody>
-          <a:bodyPr wrap="square" anchor="t" lIns="0" rIns="0" tIns="0" bIns="0">
+          <a:bodyPr wrap="square" lIns="0" tIns="0" rIns="0" bIns="0" anchor="t">
             <a:spAutoFit/>
           </a:bodyPr>
           <a:lstStyle/>
@@ -9008,7 +8949,7 @@
           <a:noFill/>
         </p:spPr>
         <p:txBody>
-          <a:bodyPr wrap="square" anchor="t" lIns="0" rIns="0" tIns="0" bIns="0">
+          <a:bodyPr wrap="square" lIns="0" tIns="0" rIns="0" bIns="0" anchor="t">
             <a:spAutoFit/>
           </a:bodyPr>
           <a:lstStyle/>
@@ -9077,7 +9018,7 @@
           </a:fontRef>
         </p:style>
         <p:txBody>
-          <a:bodyPr rtlCol="0" anchor="ctr" wrap="square" tIns="36576" bIns="36576"/>
+          <a:bodyPr wrap="square" tIns="36576" bIns="36576" rtlCol="0" anchor="ctr"/>
           <a:lstStyle/>
           <a:p>
             <a:pPr algn="ctr">
@@ -9274,7 +9215,7 @@
           </a:fontRef>
         </p:style>
         <p:txBody>
-          <a:bodyPr rtlCol="0" anchor="ctr" wrap="square" tIns="36576" bIns="36576"/>
+          <a:bodyPr wrap="square" tIns="36576" bIns="36576" rtlCol="0" anchor="ctr"/>
           <a:lstStyle/>
           <a:p>
             <a:pPr algn="ctr">
@@ -9439,7 +9380,7 @@
 </file>
 
 <file path=ppt/slides/slide15.xml><?xml version="1.0" encoding="utf-8"?>
-<p:sld xmlns:a="http://schemas.openxmlformats.org/drawingml/2006/main" xmlns:p="http://schemas.openxmlformats.org/presentationml/2006/main" xmlns:r="http://schemas.openxmlformats.org/officeDocument/2006/relationships">
+<p:sld xmlns:a="http://schemas.openxmlformats.org/drawingml/2006/main" xmlns:r="http://schemas.openxmlformats.org/officeDocument/2006/relationships" xmlns:p="http://schemas.openxmlformats.org/presentationml/2006/main">
   <p:cSld>
     <p:spTree>
       <p:nvGrpSpPr>
@@ -9447,7 +9388,14 @@
         <p:cNvGrpSpPr/>
         <p:nvPr/>
       </p:nvGrpSpPr>
-      <p:grpSpPr/>
+      <p:grpSpPr>
+        <a:xfrm>
+          <a:off x="0" y="0"/>
+          <a:ext cx="0" cy="0"/>
+          <a:chOff x="0" y="0"/>
+          <a:chExt cx="0" cy="0"/>
+        </a:xfrm>
+      </p:grpSpPr>
       <p:sp>
         <p:nvSpPr>
           <p:cNvPr id="2" name="Rectangle 1"/>
@@ -9489,6 +9437,7 @@
           <a:lstStyle/>
           <a:p>
             <a:pPr algn="ctr"/>
+            <a:endParaRPr/>
           </a:p>
         </p:txBody>
       </p:sp>
@@ -9509,7 +9458,7 @@
           <a:noFill/>
         </p:spPr>
         <p:txBody>
-          <a:bodyPr wrap="square" anchor="t" lIns="0" rIns="0" tIns="0" bIns="0">
+          <a:bodyPr wrap="square" lIns="0" tIns="0" rIns="0" bIns="0" anchor="t">
             <a:spAutoFit/>
           </a:bodyPr>
           <a:lstStyle/>
@@ -9554,7 +9503,7 @@
           <a:noFill/>
         </p:spPr>
         <p:txBody>
-          <a:bodyPr wrap="square" anchor="t" lIns="0" rIns="0" tIns="0" bIns="0">
+          <a:bodyPr wrap="square" lIns="0" tIns="0" rIns="0" bIns="0" anchor="t">
             <a:spAutoFit/>
           </a:bodyPr>
           <a:lstStyle/>
@@ -9623,6 +9572,7 @@
           <a:lstStyle/>
           <a:p>
             <a:pPr algn="ctr"/>
+            <a:endParaRPr/>
           </a:p>
         </p:txBody>
       </p:sp>
@@ -9643,7 +9593,7 @@
           <a:noFill/>
         </p:spPr>
         <p:txBody>
-          <a:bodyPr wrap="square" anchor="t" lIns="0" rIns="0" tIns="0" bIns="0">
+          <a:bodyPr wrap="square" lIns="0" tIns="0" rIns="0" bIns="0" anchor="t">
             <a:spAutoFit/>
           </a:bodyPr>
           <a:lstStyle/>
@@ -9688,7 +9638,7 @@
           <a:noFill/>
         </p:spPr>
         <p:txBody>
-          <a:bodyPr wrap="square" anchor="t" lIns="0" rIns="0" tIns="0" bIns="0">
+          <a:bodyPr wrap="square" lIns="0" tIns="0" rIns="0" bIns="0" anchor="t">
             <a:spAutoFit/>
           </a:bodyPr>
           <a:lstStyle/>
@@ -9880,7 +9830,7 @@
 </file>
 
 <file path=ppt/slides/slide16.xml><?xml version="1.0" encoding="utf-8"?>
-<p:sld xmlns:a="http://schemas.openxmlformats.org/drawingml/2006/main" xmlns:p="http://schemas.openxmlformats.org/presentationml/2006/main" xmlns:r="http://schemas.openxmlformats.org/officeDocument/2006/relationships">
+<p:sld xmlns:a="http://schemas.openxmlformats.org/drawingml/2006/main" xmlns:r="http://schemas.openxmlformats.org/officeDocument/2006/relationships" xmlns:p="http://schemas.openxmlformats.org/presentationml/2006/main">
   <p:cSld>
     <p:spTree>
       <p:nvGrpSpPr>
@@ -9888,7 +9838,14 @@
         <p:cNvGrpSpPr/>
         <p:nvPr/>
       </p:nvGrpSpPr>
-      <p:grpSpPr/>
+      <p:grpSpPr>
+        <a:xfrm>
+          <a:off x="0" y="0"/>
+          <a:ext cx="0" cy="0"/>
+          <a:chOff x="0" y="0"/>
+          <a:chExt cx="0" cy="0"/>
+        </a:xfrm>
+      </p:grpSpPr>
       <p:sp>
         <p:nvSpPr>
           <p:cNvPr id="2" name="Rectangle 1"/>
@@ -9930,6 +9887,7 @@
           <a:lstStyle/>
           <a:p>
             <a:pPr algn="ctr"/>
+            <a:endParaRPr/>
           </a:p>
         </p:txBody>
       </p:sp>
@@ -9950,7 +9908,7 @@
           <a:noFill/>
         </p:spPr>
         <p:txBody>
-          <a:bodyPr wrap="square" anchor="t" lIns="0" rIns="0" tIns="0" bIns="0">
+          <a:bodyPr wrap="square" lIns="0" tIns="0" rIns="0" bIns="0" anchor="t">
             <a:spAutoFit/>
           </a:bodyPr>
           <a:lstStyle/>
@@ -9995,7 +9953,7 @@
           <a:noFill/>
         </p:spPr>
         <p:txBody>
-          <a:bodyPr wrap="square" anchor="t" lIns="0" rIns="0" tIns="0" bIns="0">
+          <a:bodyPr wrap="square" lIns="0" tIns="0" rIns="0" bIns="0" anchor="t">
             <a:spAutoFit/>
           </a:bodyPr>
           <a:lstStyle/>
@@ -10064,6 +10022,7 @@
           <a:lstStyle/>
           <a:p>
             <a:pPr algn="ctr"/>
+            <a:endParaRPr/>
           </a:p>
         </p:txBody>
       </p:sp>
@@ -10084,7 +10043,7 @@
           <a:noFill/>
         </p:spPr>
         <p:txBody>
-          <a:bodyPr wrap="square" anchor="t" lIns="0" rIns="0" tIns="0" bIns="0">
+          <a:bodyPr wrap="square" lIns="0" tIns="0" rIns="0" bIns="0" anchor="t">
             <a:spAutoFit/>
           </a:bodyPr>
           <a:lstStyle/>
@@ -10129,7 +10088,7 @@
           <a:noFill/>
         </p:spPr>
         <p:txBody>
-          <a:bodyPr wrap="square" anchor="t" lIns="0" rIns="0" tIns="0" bIns="0">
+          <a:bodyPr wrap="square" lIns="0" tIns="0" rIns="0" bIns="0" anchor="t">
             <a:spAutoFit/>
           </a:bodyPr>
           <a:lstStyle/>
@@ -10174,7 +10133,7 @@
           <a:noFill/>
         </p:spPr>
         <p:txBody>
-          <a:bodyPr wrap="square" anchor="t" lIns="0" rIns="0" tIns="0" bIns="0">
+          <a:bodyPr wrap="square" lIns="0" tIns="0" rIns="0" bIns="0" anchor="t">
             <a:spAutoFit/>
           </a:bodyPr>
           <a:lstStyle/>
@@ -10228,7 +10187,7 @@
           <a:noFill/>
         </p:spPr>
         <p:txBody>
-          <a:bodyPr wrap="square" anchor="t" lIns="0" rIns="0" tIns="0" bIns="0">
+          <a:bodyPr wrap="square" lIns="0" tIns="0" rIns="0" bIns="0" anchor="t">
             <a:spAutoFit/>
           </a:bodyPr>
           <a:lstStyle/>
@@ -10282,7 +10241,7 @@
           <a:noFill/>
         </p:spPr>
         <p:txBody>
-          <a:bodyPr wrap="square" anchor="t" lIns="0" rIns="0" tIns="0" bIns="0">
+          <a:bodyPr wrap="square" lIns="0" tIns="0" rIns="0" bIns="0" anchor="t">
             <a:spAutoFit/>
           </a:bodyPr>
           <a:lstStyle/>
@@ -10336,7 +10295,7 @@
           <a:noFill/>
         </p:spPr>
         <p:txBody>
-          <a:bodyPr wrap="square" anchor="t" lIns="0" rIns="0" tIns="0" bIns="0">
+          <a:bodyPr wrap="square" lIns="0" tIns="0" rIns="0" bIns="0" anchor="t">
             <a:spAutoFit/>
           </a:bodyPr>
           <a:lstStyle/>
@@ -10390,7 +10349,7 @@
           <a:noFill/>
         </p:spPr>
         <p:txBody>
-          <a:bodyPr wrap="square" anchor="t" lIns="0" rIns="0" tIns="0" bIns="0">
+          <a:bodyPr wrap="square" lIns="0" tIns="0" rIns="0" bIns="0" anchor="t">
             <a:spAutoFit/>
           </a:bodyPr>
           <a:lstStyle/>
@@ -10444,7 +10403,7 @@
           <a:noFill/>
         </p:spPr>
         <p:txBody>
-          <a:bodyPr wrap="square" anchor="t" lIns="0" rIns="0" tIns="0" bIns="0">
+          <a:bodyPr wrap="square" lIns="0" tIns="0" rIns="0" bIns="0" anchor="t">
             <a:spAutoFit/>
           </a:bodyPr>
           <a:lstStyle/>
@@ -10498,7 +10457,7 @@
           <a:noFill/>
         </p:spPr>
         <p:txBody>
-          <a:bodyPr wrap="square" anchor="t" lIns="0" rIns="0" tIns="0" bIns="0">
+          <a:bodyPr wrap="square" lIns="0" tIns="0" rIns="0" bIns="0" anchor="t">
             <a:spAutoFit/>
           </a:bodyPr>
           <a:lstStyle/>
@@ -10552,7 +10511,7 @@
           <a:noFill/>
         </p:spPr>
         <p:txBody>
-          <a:bodyPr wrap="square" anchor="t" lIns="0" rIns="0" tIns="0" bIns="0">
+          <a:bodyPr wrap="square" lIns="0" tIns="0" rIns="0" bIns="0" anchor="t">
             <a:spAutoFit/>
           </a:bodyPr>
           <a:lstStyle/>
@@ -10606,7 +10565,7 @@
           <a:noFill/>
         </p:spPr>
         <p:txBody>
-          <a:bodyPr wrap="square" anchor="t" lIns="0" rIns="0" tIns="0" bIns="0">
+          <a:bodyPr wrap="square" lIns="0" tIns="0" rIns="0" bIns="0" anchor="t">
             <a:spAutoFit/>
           </a:bodyPr>
           <a:lstStyle/>
@@ -10660,7 +10619,7 @@
           <a:noFill/>
         </p:spPr>
         <p:txBody>
-          <a:bodyPr wrap="square" anchor="t" lIns="0" rIns="0" tIns="0" bIns="0">
+          <a:bodyPr wrap="square" lIns="0" tIns="0" rIns="0" bIns="0" anchor="t">
             <a:spAutoFit/>
           </a:bodyPr>
           <a:lstStyle/>
@@ -10714,7 +10673,7 @@
           <a:noFill/>
         </p:spPr>
         <p:txBody>
-          <a:bodyPr wrap="square" anchor="t" lIns="0" rIns="0" tIns="0" bIns="0">
+          <a:bodyPr wrap="square" lIns="0" tIns="0" rIns="0" bIns="0" anchor="t">
             <a:spAutoFit/>
           </a:bodyPr>
           <a:lstStyle/>
@@ -10768,7 +10727,7 @@
           <a:noFill/>
         </p:spPr>
         <p:txBody>
-          <a:bodyPr wrap="square" anchor="t" lIns="0" rIns="0" tIns="0" bIns="0">
+          <a:bodyPr wrap="square" lIns="0" tIns="0" rIns="0" bIns="0" anchor="t">
             <a:spAutoFit/>
           </a:bodyPr>
           <a:lstStyle/>
@@ -10814,7 +10773,7 @@
 </file>
 
 <file path=ppt/slides/slide2.xml><?xml version="1.0" encoding="utf-8"?>
-<p:sld xmlns:a="http://schemas.openxmlformats.org/drawingml/2006/main" xmlns:p="http://schemas.openxmlformats.org/presentationml/2006/main" xmlns:r="http://schemas.openxmlformats.org/officeDocument/2006/relationships">
+<p:sld xmlns:a="http://schemas.openxmlformats.org/drawingml/2006/main" xmlns:r="http://schemas.openxmlformats.org/officeDocument/2006/relationships" xmlns:p="http://schemas.openxmlformats.org/presentationml/2006/main">
   <p:cSld>
     <p:spTree>
       <p:nvGrpSpPr>
@@ -10822,7 +10781,14 @@
         <p:cNvGrpSpPr/>
         <p:nvPr/>
       </p:nvGrpSpPr>
-      <p:grpSpPr/>
+      <p:grpSpPr>
+        <a:xfrm>
+          <a:off x="0" y="0"/>
+          <a:ext cx="0" cy="0"/>
+          <a:chOff x="0" y="0"/>
+          <a:chExt cx="0" cy="0"/>
+        </a:xfrm>
+      </p:grpSpPr>
       <p:sp>
         <p:nvSpPr>
           <p:cNvPr id="2" name="Rectangle 1"/>
@@ -10864,6 +10830,7 @@
           <a:lstStyle/>
           <a:p>
             <a:pPr algn="ctr"/>
+            <a:endParaRPr/>
           </a:p>
         </p:txBody>
       </p:sp>
@@ -10884,7 +10851,7 @@
           <a:noFill/>
         </p:spPr>
         <p:txBody>
-          <a:bodyPr wrap="square" anchor="t" lIns="0" rIns="0" tIns="0" bIns="0">
+          <a:bodyPr wrap="square" lIns="0" tIns="0" rIns="0" bIns="0" anchor="t">
             <a:spAutoFit/>
           </a:bodyPr>
           <a:lstStyle/>
@@ -10929,7 +10896,7 @@
           <a:noFill/>
         </p:spPr>
         <p:txBody>
-          <a:bodyPr wrap="square" anchor="t" lIns="0" rIns="0" tIns="0" bIns="0">
+          <a:bodyPr wrap="square" lIns="0" tIns="0" rIns="0" bIns="0" anchor="t">
             <a:spAutoFit/>
           </a:bodyPr>
           <a:lstStyle/>
@@ -10998,6 +10965,7 @@
           <a:lstStyle/>
           <a:p>
             <a:pPr algn="ctr"/>
+            <a:endParaRPr/>
           </a:p>
         </p:txBody>
       </p:sp>
@@ -11018,7 +10986,7 @@
           <a:noFill/>
         </p:spPr>
         <p:txBody>
-          <a:bodyPr wrap="square" anchor="t" lIns="0" rIns="0" tIns="0" bIns="0">
+          <a:bodyPr wrap="square" lIns="0" tIns="0" rIns="0" bIns="0" anchor="t">
             <a:spAutoFit/>
           </a:bodyPr>
           <a:lstStyle/>
@@ -11063,7 +11031,7 @@
           <a:noFill/>
         </p:spPr>
         <p:txBody>
-          <a:bodyPr wrap="square" anchor="t" lIns="0" rIns="0" tIns="0" bIns="0">
+          <a:bodyPr wrap="square" lIns="0" tIns="0" rIns="0" bIns="0" anchor="t">
             <a:spAutoFit/>
           </a:bodyPr>
           <a:lstStyle/>
@@ -11243,7 +11211,7 @@
           </a:fontRef>
         </p:style>
         <p:txBody>
-          <a:bodyPr rtlCol="0" anchor="ctr" wrap="square" tIns="36576" bIns="36576"/>
+          <a:bodyPr wrap="square" tIns="36576" bIns="36576" rtlCol="0" anchor="ctr"/>
           <a:lstStyle/>
           <a:p>
             <a:pPr algn="ctr">
@@ -11326,7 +11294,7 @@
           </a:fontRef>
         </p:style>
         <p:txBody>
-          <a:bodyPr rtlCol="0" anchor="ctr" wrap="square" tIns="36576" bIns="36576"/>
+          <a:bodyPr wrap="square" tIns="36576" bIns="36576" rtlCol="0" anchor="ctr"/>
           <a:lstStyle/>
           <a:p>
             <a:pPr algn="ctr">
@@ -11409,6 +11377,7 @@
           <a:lstStyle/>
           <a:p>
             <a:pPr algn="ctr"/>
+            <a:endParaRPr/>
           </a:p>
         </p:txBody>
       </p:sp>
@@ -11453,6 +11422,7 @@
           <a:lstStyle/>
           <a:p>
             <a:pPr algn="ctr"/>
+            <a:endParaRPr/>
           </a:p>
         </p:txBody>
       </p:sp>
@@ -11497,7 +11467,7 @@
           </a:fontRef>
         </p:style>
         <p:txBody>
-          <a:bodyPr rtlCol="0" anchor="ctr" wrap="square" tIns="36576" bIns="36576"/>
+          <a:bodyPr wrap="square" tIns="36576" bIns="36576" rtlCol="0" anchor="ctr"/>
           <a:lstStyle/>
           <a:p>
             <a:pPr algn="ctr">
@@ -11548,7 +11518,7 @@
 </file>
 
 <file path=ppt/slides/slide3.xml><?xml version="1.0" encoding="utf-8"?>
-<p:sld xmlns:a="http://schemas.openxmlformats.org/drawingml/2006/main" xmlns:p="http://schemas.openxmlformats.org/presentationml/2006/main" xmlns:r="http://schemas.openxmlformats.org/officeDocument/2006/relationships">
+<p:sld xmlns:a="http://schemas.openxmlformats.org/drawingml/2006/main" xmlns:r="http://schemas.openxmlformats.org/officeDocument/2006/relationships" xmlns:p="http://schemas.openxmlformats.org/presentationml/2006/main">
   <p:cSld>
     <p:spTree>
       <p:nvGrpSpPr>
@@ -11556,7 +11526,14 @@
         <p:cNvGrpSpPr/>
         <p:nvPr/>
       </p:nvGrpSpPr>
-      <p:grpSpPr/>
+      <p:grpSpPr>
+        <a:xfrm>
+          <a:off x="0" y="0"/>
+          <a:ext cx="0" cy="0"/>
+          <a:chOff x="0" y="0"/>
+          <a:chExt cx="0" cy="0"/>
+        </a:xfrm>
+      </p:grpSpPr>
       <p:sp>
         <p:nvSpPr>
           <p:cNvPr id="2" name="Rectangle 1"/>
@@ -11598,6 +11575,7 @@
           <a:lstStyle/>
           <a:p>
             <a:pPr algn="ctr"/>
+            <a:endParaRPr/>
           </a:p>
         </p:txBody>
       </p:sp>
@@ -11618,7 +11596,7 @@
           <a:noFill/>
         </p:spPr>
         <p:txBody>
-          <a:bodyPr wrap="square" anchor="t" lIns="0" rIns="0" tIns="0" bIns="0">
+          <a:bodyPr wrap="square" lIns="0" tIns="0" rIns="0" bIns="0" anchor="t">
             <a:spAutoFit/>
           </a:bodyPr>
           <a:lstStyle/>
@@ -11663,7 +11641,7 @@
           <a:noFill/>
         </p:spPr>
         <p:txBody>
-          <a:bodyPr wrap="square" anchor="t" lIns="0" rIns="0" tIns="0" bIns="0">
+          <a:bodyPr wrap="square" lIns="0" tIns="0" rIns="0" bIns="0" anchor="t">
             <a:spAutoFit/>
           </a:bodyPr>
           <a:lstStyle/>
@@ -11732,6 +11710,7 @@
           <a:lstStyle/>
           <a:p>
             <a:pPr algn="ctr"/>
+            <a:endParaRPr/>
           </a:p>
         </p:txBody>
       </p:sp>
@@ -11752,7 +11731,7 @@
           <a:noFill/>
         </p:spPr>
         <p:txBody>
-          <a:bodyPr wrap="square" anchor="t" lIns="0" rIns="0" tIns="0" bIns="0">
+          <a:bodyPr wrap="square" lIns="0" tIns="0" rIns="0" bIns="0" anchor="t">
             <a:spAutoFit/>
           </a:bodyPr>
           <a:lstStyle/>
@@ -11797,7 +11776,7 @@
           <a:noFill/>
         </p:spPr>
         <p:txBody>
-          <a:bodyPr wrap="square" anchor="t" lIns="0" rIns="0" tIns="0" bIns="0">
+          <a:bodyPr wrap="square" lIns="0" tIns="0" rIns="0" bIns="0" anchor="t">
             <a:spAutoFit/>
           </a:bodyPr>
           <a:lstStyle/>
@@ -11870,6 +11849,7 @@
           <a:lstStyle/>
           <a:p>
             <a:pPr algn="ctr"/>
+            <a:endParaRPr/>
           </a:p>
         </p:txBody>
       </p:sp>
@@ -11912,7 +11892,7 @@
           </a:fontRef>
         </p:style>
         <p:txBody>
-          <a:bodyPr rtlCol="0" anchor="ctr" wrap="square" tIns="36576" bIns="36576"/>
+          <a:bodyPr wrap="square" tIns="36576" bIns="36576" rtlCol="0" anchor="ctr"/>
           <a:lstStyle/>
           <a:p>
             <a:pPr algn="ctr">
@@ -11952,7 +11932,7 @@
           <a:noFill/>
         </p:spPr>
         <p:txBody>
-          <a:bodyPr wrap="square" anchor="ctr" lIns="0" rIns="0" tIns="0" bIns="0">
+          <a:bodyPr wrap="square" lIns="0" tIns="0" rIns="0" bIns="0" anchor="ctr">
             <a:spAutoFit/>
           </a:bodyPr>
           <a:lstStyle/>
@@ -12025,6 +12005,7 @@
           <a:lstStyle/>
           <a:p>
             <a:pPr algn="ctr"/>
+            <a:endParaRPr/>
           </a:p>
         </p:txBody>
       </p:sp>
@@ -12067,7 +12048,7 @@
           </a:fontRef>
         </p:style>
         <p:txBody>
-          <a:bodyPr rtlCol="0" anchor="ctr" wrap="square" tIns="36576" bIns="36576"/>
+          <a:bodyPr wrap="square" tIns="36576" bIns="36576" rtlCol="0" anchor="ctr"/>
           <a:lstStyle/>
           <a:p>
             <a:pPr algn="ctr">
@@ -12107,7 +12088,7 @@
           <a:noFill/>
         </p:spPr>
         <p:txBody>
-          <a:bodyPr wrap="square" anchor="ctr" lIns="0" rIns="0" tIns="0" bIns="0">
+          <a:bodyPr wrap="square" lIns="0" tIns="0" rIns="0" bIns="0" anchor="ctr">
             <a:spAutoFit/>
           </a:bodyPr>
           <a:lstStyle/>
@@ -12180,6 +12161,7 @@
           <a:lstStyle/>
           <a:p>
             <a:pPr algn="ctr"/>
+            <a:endParaRPr/>
           </a:p>
         </p:txBody>
       </p:sp>
@@ -12222,7 +12204,7 @@
           </a:fontRef>
         </p:style>
         <p:txBody>
-          <a:bodyPr rtlCol="0" anchor="ctr" wrap="square" tIns="36576" bIns="36576"/>
+          <a:bodyPr wrap="square" tIns="36576" bIns="36576" rtlCol="0" anchor="ctr"/>
           <a:lstStyle/>
           <a:p>
             <a:pPr algn="ctr">
@@ -12262,7 +12244,7 @@
           <a:noFill/>
         </p:spPr>
         <p:txBody>
-          <a:bodyPr wrap="square" anchor="ctr" lIns="0" rIns="0" tIns="0" bIns="0">
+          <a:bodyPr wrap="square" lIns="0" tIns="0" rIns="0" bIns="0" anchor="ctr">
             <a:spAutoFit/>
           </a:bodyPr>
           <a:lstStyle/>
@@ -12335,6 +12317,7 @@
           <a:lstStyle/>
           <a:p>
             <a:pPr algn="ctr"/>
+            <a:endParaRPr/>
           </a:p>
         </p:txBody>
       </p:sp>
@@ -12377,7 +12360,7 @@
           </a:fontRef>
         </p:style>
         <p:txBody>
-          <a:bodyPr rtlCol="0" anchor="ctr" wrap="square" tIns="36576" bIns="36576"/>
+          <a:bodyPr wrap="square" tIns="36576" bIns="36576" rtlCol="0" anchor="ctr"/>
           <a:lstStyle/>
           <a:p>
             <a:pPr algn="ctr">
@@ -12417,7 +12400,7 @@
           <a:noFill/>
         </p:spPr>
         <p:txBody>
-          <a:bodyPr wrap="square" anchor="ctr" lIns="0" rIns="0" tIns="0" bIns="0">
+          <a:bodyPr wrap="square" lIns="0" tIns="0" rIns="0" bIns="0" anchor="ctr">
             <a:spAutoFit/>
           </a:bodyPr>
           <a:lstStyle/>
@@ -12490,6 +12473,7 @@
           <a:lstStyle/>
           <a:p>
             <a:pPr algn="ctr"/>
+            <a:endParaRPr/>
           </a:p>
         </p:txBody>
       </p:sp>
@@ -12532,7 +12516,7 @@
           </a:fontRef>
         </p:style>
         <p:txBody>
-          <a:bodyPr rtlCol="0" anchor="ctr" wrap="square" tIns="36576" bIns="36576"/>
+          <a:bodyPr wrap="square" tIns="36576" bIns="36576" rtlCol="0" anchor="ctr"/>
           <a:lstStyle/>
           <a:p>
             <a:pPr algn="ctr">
@@ -12572,7 +12556,7 @@
           <a:noFill/>
         </p:spPr>
         <p:txBody>
-          <a:bodyPr wrap="square" anchor="ctr" lIns="0" rIns="0" tIns="0" bIns="0">
+          <a:bodyPr wrap="square" lIns="0" tIns="0" rIns="0" bIns="0" anchor="ctr">
             <a:spAutoFit/>
           </a:bodyPr>
           <a:lstStyle/>
@@ -12645,6 +12629,7 @@
           <a:lstStyle/>
           <a:p>
             <a:pPr algn="ctr"/>
+            <a:endParaRPr/>
           </a:p>
         </p:txBody>
       </p:sp>
@@ -12687,7 +12672,7 @@
           </a:fontRef>
         </p:style>
         <p:txBody>
-          <a:bodyPr rtlCol="0" anchor="ctr" wrap="square" tIns="36576" bIns="36576"/>
+          <a:bodyPr wrap="square" tIns="36576" bIns="36576" rtlCol="0" anchor="ctr"/>
           <a:lstStyle/>
           <a:p>
             <a:pPr algn="ctr">
@@ -12727,7 +12712,7 @@
           <a:noFill/>
         </p:spPr>
         <p:txBody>
-          <a:bodyPr wrap="square" anchor="ctr" lIns="0" rIns="0" tIns="0" bIns="0">
+          <a:bodyPr wrap="square" lIns="0" tIns="0" rIns="0" bIns="0" anchor="ctr">
             <a:spAutoFit/>
           </a:bodyPr>
           <a:lstStyle/>
@@ -12798,6 +12783,7 @@
           <a:lstStyle/>
           <a:p>
             <a:pPr algn="ctr"/>
+            <a:endParaRPr/>
           </a:p>
         </p:txBody>
       </p:sp>
@@ -12818,7 +12804,7 @@
           <a:noFill/>
         </p:spPr>
         <p:txBody>
-          <a:bodyPr wrap="square" anchor="ctr" lIns="0" rIns="0" tIns="0" bIns="0">
+          <a:bodyPr wrap="square" lIns="0" tIns="0" rIns="0" bIns="0" anchor="ctr">
             <a:spAutoFit/>
           </a:bodyPr>
           <a:lstStyle/>
@@ -12864,7 +12850,7 @@
 </file>
 
 <file path=ppt/slides/slide4.xml><?xml version="1.0" encoding="utf-8"?>
-<p:sld xmlns:a="http://schemas.openxmlformats.org/drawingml/2006/main" xmlns:p="http://schemas.openxmlformats.org/presentationml/2006/main" xmlns:r="http://schemas.openxmlformats.org/officeDocument/2006/relationships">
+<p:sld xmlns:a="http://schemas.openxmlformats.org/drawingml/2006/main" xmlns:r="http://schemas.openxmlformats.org/officeDocument/2006/relationships" xmlns:p="http://schemas.openxmlformats.org/presentationml/2006/main">
   <p:cSld>
     <p:spTree>
       <p:nvGrpSpPr>
@@ -12872,7 +12858,14 @@
         <p:cNvGrpSpPr/>
         <p:nvPr/>
       </p:nvGrpSpPr>
-      <p:grpSpPr/>
+      <p:grpSpPr>
+        <a:xfrm>
+          <a:off x="0" y="0"/>
+          <a:ext cx="0" cy="0"/>
+          <a:chOff x="0" y="0"/>
+          <a:chExt cx="0" cy="0"/>
+        </a:xfrm>
+      </p:grpSpPr>
       <p:sp>
         <p:nvSpPr>
           <p:cNvPr id="2" name="Rectangle 1"/>
@@ -12914,6 +12907,7 @@
           <a:lstStyle/>
           <a:p>
             <a:pPr algn="ctr"/>
+            <a:endParaRPr/>
           </a:p>
         </p:txBody>
       </p:sp>
@@ -12934,7 +12928,7 @@
           <a:noFill/>
         </p:spPr>
         <p:txBody>
-          <a:bodyPr wrap="square" anchor="t" lIns="0" rIns="0" tIns="0" bIns="0">
+          <a:bodyPr wrap="square" lIns="0" tIns="0" rIns="0" bIns="0" anchor="t">
             <a:spAutoFit/>
           </a:bodyPr>
           <a:lstStyle/>
@@ -12979,7 +12973,7 @@
           <a:noFill/>
         </p:spPr>
         <p:txBody>
-          <a:bodyPr wrap="square" anchor="t" lIns="0" rIns="0" tIns="0" bIns="0">
+          <a:bodyPr wrap="square" lIns="0" tIns="0" rIns="0" bIns="0" anchor="t">
             <a:spAutoFit/>
           </a:bodyPr>
           <a:lstStyle/>
@@ -13048,6 +13042,7 @@
           <a:lstStyle/>
           <a:p>
             <a:pPr algn="ctr"/>
+            <a:endParaRPr/>
           </a:p>
         </p:txBody>
       </p:sp>
@@ -13068,7 +13063,7 @@
           <a:noFill/>
         </p:spPr>
         <p:txBody>
-          <a:bodyPr wrap="square" anchor="t" lIns="0" rIns="0" tIns="0" bIns="0">
+          <a:bodyPr wrap="square" lIns="0" tIns="0" rIns="0" bIns="0" anchor="t">
             <a:spAutoFit/>
           </a:bodyPr>
           <a:lstStyle/>
@@ -13113,7 +13108,7 @@
           <a:noFill/>
         </p:spPr>
         <p:txBody>
-          <a:bodyPr wrap="square" anchor="t" lIns="0" rIns="0" tIns="0" bIns="0">
+          <a:bodyPr wrap="square" lIns="0" tIns="0" rIns="0" bIns="0" anchor="t">
             <a:spAutoFit/>
           </a:bodyPr>
           <a:lstStyle/>
@@ -13160,9 +13155,27 @@
                 <a:tableStyleId>{5C22544A-7EE6-4342-B048-85BDC9FD1C3A}</a:tableStyleId>
               </a:tblPr>
               <a:tblGrid>
-                <a:gridCol w="2651760"/>
-                <a:gridCol w="3931920"/>
-                <a:gridCol w="4507992"/>
+                <a:gridCol w="2651760">
+                  <a:extLst>
+                    <a:ext uri="{9D8B030D-6E8A-4147-A177-3AD203B41FA5}">
+                      <a16:colId xmlns:a16="http://schemas.microsoft.com/office/drawing/2014/main" val="20000"/>
+                    </a:ext>
+                  </a:extLst>
+                </a:gridCol>
+                <a:gridCol w="3931920">
+                  <a:extLst>
+                    <a:ext uri="{9D8B030D-6E8A-4147-A177-3AD203B41FA5}">
+                      <a16:colId xmlns:a16="http://schemas.microsoft.com/office/drawing/2014/main" val="20001"/>
+                    </a:ext>
+                  </a:extLst>
+                </a:gridCol>
+                <a:gridCol w="4507992">
+                  <a:extLst>
+                    <a:ext uri="{9D8B030D-6E8A-4147-A177-3AD203B41FA5}">
+                      <a16:colId xmlns:a16="http://schemas.microsoft.com/office/drawing/2014/main" val="20002"/>
+                    </a:ext>
+                  </a:extLst>
+                </a:gridCol>
               </a:tblGrid>
               <a:tr h="548640">
                 <a:tc>
@@ -13181,7 +13194,7 @@
                       </a:r>
                     </a:p>
                   </a:txBody>
-                  <a:tcPr anchor="ctr" marL="91440" marT="18288" marB="18288">
+                  <a:tcPr marT="18288" marB="18288" anchor="ctr">
                     <a:solidFill>
                       <a:srgbClr val="1F3A5F"/>
                     </a:solidFill>
@@ -13203,7 +13216,7 @@
                       </a:r>
                     </a:p>
                   </a:txBody>
-                  <a:tcPr anchor="ctr" marL="91440" marT="18288" marB="18288">
+                  <a:tcPr marT="18288" marB="18288" anchor="ctr">
                     <a:solidFill>
                       <a:srgbClr val="1F3A5F"/>
                     </a:solidFill>
@@ -13225,12 +13238,17 @@
                       </a:r>
                     </a:p>
                   </a:txBody>
-                  <a:tcPr anchor="ctr" marL="91440" marT="18288" marB="18288">
+                  <a:tcPr marT="18288" marB="18288" anchor="ctr">
                     <a:solidFill>
                       <a:srgbClr val="1F3A5F"/>
                     </a:solidFill>
                   </a:tcPr>
                 </a:tc>
+                <a:extLst>
+                  <a:ext uri="{0D108BD9-81ED-4DB2-BD59-A6C34878D82A}">
+                    <a16:rowId xmlns:a16="http://schemas.microsoft.com/office/drawing/2014/main" val="10000"/>
+                  </a:ext>
+                </a:extLst>
               </a:tr>
               <a:tr h="548640">
                 <a:tc>
@@ -13249,7 +13267,7 @@
                       </a:r>
                     </a:p>
                   </a:txBody>
-                  <a:tcPr anchor="ctr" marL="91440" marT="18288" marB="18288">
+                  <a:tcPr marT="18288" marB="18288" anchor="ctr">
                     <a:solidFill>
                       <a:srgbClr val="FFFFFF"/>
                     </a:solidFill>
@@ -13271,7 +13289,7 @@
                       </a:r>
                     </a:p>
                   </a:txBody>
-                  <a:tcPr anchor="ctr" marL="91440" marT="18288" marB="18288">
+                  <a:tcPr marT="18288" marB="18288" anchor="ctr">
                     <a:solidFill>
                       <a:srgbClr val="FFFFFF"/>
                     </a:solidFill>
@@ -13293,12 +13311,17 @@
                       </a:r>
                     </a:p>
                   </a:txBody>
-                  <a:tcPr anchor="ctr" marL="91440" marT="18288" marB="18288">
+                  <a:tcPr marT="18288" marB="18288" anchor="ctr">
                     <a:solidFill>
                       <a:srgbClr val="FFFFFF"/>
                     </a:solidFill>
                   </a:tcPr>
                 </a:tc>
+                <a:extLst>
+                  <a:ext uri="{0D108BD9-81ED-4DB2-BD59-A6C34878D82A}">
+                    <a16:rowId xmlns:a16="http://schemas.microsoft.com/office/drawing/2014/main" val="10001"/>
+                  </a:ext>
+                </a:extLst>
               </a:tr>
               <a:tr h="548640">
                 <a:tc>
@@ -13317,7 +13340,7 @@
                       </a:r>
                     </a:p>
                   </a:txBody>
-                  <a:tcPr anchor="ctr" marL="91440" marT="18288" marB="18288">
+                  <a:tcPr marT="18288" marB="18288" anchor="ctr">
                     <a:solidFill>
                       <a:srgbClr val="EEF1F5"/>
                     </a:solidFill>
@@ -13339,7 +13362,7 @@
                       </a:r>
                     </a:p>
                   </a:txBody>
-                  <a:tcPr anchor="ctr" marL="91440" marT="18288" marB="18288">
+                  <a:tcPr marT="18288" marB="18288" anchor="ctr">
                     <a:solidFill>
                       <a:srgbClr val="EEF1F5"/>
                     </a:solidFill>
@@ -13361,12 +13384,17 @@
                       </a:r>
                     </a:p>
                   </a:txBody>
-                  <a:tcPr anchor="ctr" marL="91440" marT="18288" marB="18288">
+                  <a:tcPr marT="18288" marB="18288" anchor="ctr">
                     <a:solidFill>
                       <a:srgbClr val="EEF1F5"/>
                     </a:solidFill>
                   </a:tcPr>
                 </a:tc>
+                <a:extLst>
+                  <a:ext uri="{0D108BD9-81ED-4DB2-BD59-A6C34878D82A}">
+                    <a16:rowId xmlns:a16="http://schemas.microsoft.com/office/drawing/2014/main" val="10002"/>
+                  </a:ext>
+                </a:extLst>
               </a:tr>
               <a:tr h="548640">
                 <a:tc>
@@ -13385,7 +13413,7 @@
                       </a:r>
                     </a:p>
                   </a:txBody>
-                  <a:tcPr anchor="ctr" marL="91440" marT="18288" marB="18288">
+                  <a:tcPr marT="18288" marB="18288" anchor="ctr">
                     <a:solidFill>
                       <a:srgbClr val="FFFFFF"/>
                     </a:solidFill>
@@ -13407,7 +13435,7 @@
                       </a:r>
                     </a:p>
                   </a:txBody>
-                  <a:tcPr anchor="ctr" marL="91440" marT="18288" marB="18288">
+                  <a:tcPr marT="18288" marB="18288" anchor="ctr">
                     <a:solidFill>
                       <a:srgbClr val="FFFFFF"/>
                     </a:solidFill>
@@ -13429,12 +13457,17 @@
                       </a:r>
                     </a:p>
                   </a:txBody>
-                  <a:tcPr anchor="ctr" marL="91440" marT="18288" marB="18288">
+                  <a:tcPr marT="18288" marB="18288" anchor="ctr">
                     <a:solidFill>
                       <a:srgbClr val="FFFFFF"/>
                     </a:solidFill>
                   </a:tcPr>
                 </a:tc>
+                <a:extLst>
+                  <a:ext uri="{0D108BD9-81ED-4DB2-BD59-A6C34878D82A}">
+                    <a16:rowId xmlns:a16="http://schemas.microsoft.com/office/drawing/2014/main" val="10003"/>
+                  </a:ext>
+                </a:extLst>
               </a:tr>
               <a:tr h="548640">
                 <a:tc>
@@ -13453,7 +13486,7 @@
                       </a:r>
                     </a:p>
                   </a:txBody>
-                  <a:tcPr anchor="ctr" marL="91440" marT="18288" marB="18288">
+                  <a:tcPr marT="18288" marB="18288" anchor="ctr">
                     <a:solidFill>
                       <a:srgbClr val="EEF1F5"/>
                     </a:solidFill>
@@ -13475,7 +13508,7 @@
                       </a:r>
                     </a:p>
                   </a:txBody>
-                  <a:tcPr anchor="ctr" marL="91440" marT="18288" marB="18288">
+                  <a:tcPr marT="18288" marB="18288" anchor="ctr">
                     <a:solidFill>
                       <a:srgbClr val="EEF1F5"/>
                     </a:solidFill>
@@ -13497,12 +13530,17 @@
                       </a:r>
                     </a:p>
                   </a:txBody>
-                  <a:tcPr anchor="ctr" marL="91440" marT="18288" marB="18288">
+                  <a:tcPr marT="18288" marB="18288" anchor="ctr">
                     <a:solidFill>
                       <a:srgbClr val="EEF1F5"/>
                     </a:solidFill>
                   </a:tcPr>
                 </a:tc>
+                <a:extLst>
+                  <a:ext uri="{0D108BD9-81ED-4DB2-BD59-A6C34878D82A}">
+                    <a16:rowId xmlns:a16="http://schemas.microsoft.com/office/drawing/2014/main" val="10004"/>
+                  </a:ext>
+                </a:extLst>
               </a:tr>
               <a:tr h="548640">
                 <a:tc>
@@ -13521,7 +13559,7 @@
                       </a:r>
                     </a:p>
                   </a:txBody>
-                  <a:tcPr anchor="ctr" marL="91440" marT="18288" marB="18288">
+                  <a:tcPr marT="18288" marB="18288" anchor="ctr">
                     <a:solidFill>
                       <a:srgbClr val="FFFFFF"/>
                     </a:solidFill>
@@ -13543,7 +13581,7 @@
                       </a:r>
                     </a:p>
                   </a:txBody>
-                  <a:tcPr anchor="ctr" marL="91440" marT="18288" marB="18288">
+                  <a:tcPr marT="18288" marB="18288" anchor="ctr">
                     <a:solidFill>
                       <a:srgbClr val="FFFFFF"/>
                     </a:solidFill>
@@ -13565,12 +13603,17 @@
                       </a:r>
                     </a:p>
                   </a:txBody>
-                  <a:tcPr anchor="ctr" marL="91440" marT="18288" marB="18288">
+                  <a:tcPr marT="18288" marB="18288" anchor="ctr">
                     <a:solidFill>
                       <a:srgbClr val="FFFFFF"/>
                     </a:solidFill>
                   </a:tcPr>
                 </a:tc>
+                <a:extLst>
+                  <a:ext uri="{0D108BD9-81ED-4DB2-BD59-A6C34878D82A}">
+                    <a16:rowId xmlns:a16="http://schemas.microsoft.com/office/drawing/2014/main" val="10005"/>
+                  </a:ext>
+                </a:extLst>
               </a:tr>
               <a:tr h="548640">
                 <a:tc>
@@ -13589,7 +13632,7 @@
                       </a:r>
                     </a:p>
                   </a:txBody>
-                  <a:tcPr anchor="ctr" marL="91440" marT="18288" marB="18288">
+                  <a:tcPr marT="18288" marB="18288" anchor="ctr">
                     <a:solidFill>
                       <a:srgbClr val="EEF1F5"/>
                     </a:solidFill>
@@ -13611,7 +13654,7 @@
                       </a:r>
                     </a:p>
                   </a:txBody>
-                  <a:tcPr anchor="ctr" marL="91440" marT="18288" marB="18288">
+                  <a:tcPr marT="18288" marB="18288" anchor="ctr">
                     <a:solidFill>
                       <a:srgbClr val="EEF1F5"/>
                     </a:solidFill>
@@ -13633,12 +13676,17 @@
                       </a:r>
                     </a:p>
                   </a:txBody>
-                  <a:tcPr anchor="ctr" marL="91440" marT="18288" marB="18288">
+                  <a:tcPr marT="18288" marB="18288" anchor="ctr">
                     <a:solidFill>
                       <a:srgbClr val="EEF1F5"/>
                     </a:solidFill>
                   </a:tcPr>
                 </a:tc>
+                <a:extLst>
+                  <a:ext uri="{0D108BD9-81ED-4DB2-BD59-A6C34878D82A}">
+                    <a16:rowId xmlns:a16="http://schemas.microsoft.com/office/drawing/2014/main" val="10006"/>
+                  </a:ext>
+                </a:extLst>
               </a:tr>
               <a:tr h="548640">
                 <a:tc>
@@ -13657,7 +13705,7 @@
                       </a:r>
                     </a:p>
                   </a:txBody>
-                  <a:tcPr anchor="ctr" marL="91440" marT="18288" marB="18288">
+                  <a:tcPr marT="18288" marB="18288" anchor="ctr">
                     <a:solidFill>
                       <a:srgbClr val="FFFFFF"/>
                     </a:solidFill>
@@ -13679,7 +13727,7 @@
                       </a:r>
                     </a:p>
                   </a:txBody>
-                  <a:tcPr anchor="ctr" marL="91440" marT="18288" marB="18288">
+                  <a:tcPr marT="18288" marB="18288" anchor="ctr">
                     <a:solidFill>
                       <a:srgbClr val="FFFFFF"/>
                     </a:solidFill>
@@ -13701,12 +13749,17 @@
                       </a:r>
                     </a:p>
                   </a:txBody>
-                  <a:tcPr anchor="ctr" marL="91440" marT="18288" marB="18288">
+                  <a:tcPr marT="18288" marB="18288" anchor="ctr">
                     <a:solidFill>
                       <a:srgbClr val="FFFFFF"/>
                     </a:solidFill>
                   </a:tcPr>
                 </a:tc>
+                <a:extLst>
+                  <a:ext uri="{0D108BD9-81ED-4DB2-BD59-A6C34878D82A}">
+                    <a16:rowId xmlns:a16="http://schemas.microsoft.com/office/drawing/2014/main" val="10007"/>
+                  </a:ext>
+                </a:extLst>
               </a:tr>
               <a:tr h="548640">
                 <a:tc>
@@ -13725,7 +13778,7 @@
                       </a:r>
                     </a:p>
                   </a:txBody>
-                  <a:tcPr anchor="ctr" marL="91440" marT="18288" marB="18288">
+                  <a:tcPr marT="18288" marB="18288" anchor="ctr">
                     <a:solidFill>
                       <a:srgbClr val="EEF1F5"/>
                     </a:solidFill>
@@ -13747,7 +13800,7 @@
                       </a:r>
                     </a:p>
                   </a:txBody>
-                  <a:tcPr anchor="ctr" marL="91440" marT="18288" marB="18288">
+                  <a:tcPr marT="18288" marB="18288" anchor="ctr">
                     <a:solidFill>
                       <a:srgbClr val="EEF1F5"/>
                     </a:solidFill>
@@ -13769,12 +13822,17 @@
                       </a:r>
                     </a:p>
                   </a:txBody>
-                  <a:tcPr anchor="ctr" marL="91440" marT="18288" marB="18288">
+                  <a:tcPr marT="18288" marB="18288" anchor="ctr">
                     <a:solidFill>
                       <a:srgbClr val="EEF1F5"/>
                     </a:solidFill>
                   </a:tcPr>
                 </a:tc>
+                <a:extLst>
+                  <a:ext uri="{0D108BD9-81ED-4DB2-BD59-A6C34878D82A}">
+                    <a16:rowId xmlns:a16="http://schemas.microsoft.com/office/drawing/2014/main" val="10008"/>
+                  </a:ext>
+                </a:extLst>
               </a:tr>
             </a:tbl>
           </a:graphicData>
@@ -13789,7 +13847,7 @@
 </file>
 
 <file path=ppt/slides/slide5.xml><?xml version="1.0" encoding="utf-8"?>
-<p:sld xmlns:a="http://schemas.openxmlformats.org/drawingml/2006/main" xmlns:p="http://schemas.openxmlformats.org/presentationml/2006/main" xmlns:r="http://schemas.openxmlformats.org/officeDocument/2006/relationships">
+<p:sld xmlns:a="http://schemas.openxmlformats.org/drawingml/2006/main" xmlns:r="http://schemas.openxmlformats.org/officeDocument/2006/relationships" xmlns:p="http://schemas.openxmlformats.org/presentationml/2006/main">
   <p:cSld>
     <p:spTree>
       <p:nvGrpSpPr>
@@ -13797,7 +13855,14 @@
         <p:cNvGrpSpPr/>
         <p:nvPr/>
       </p:nvGrpSpPr>
-      <p:grpSpPr/>
+      <p:grpSpPr>
+        <a:xfrm>
+          <a:off x="0" y="0"/>
+          <a:ext cx="0" cy="0"/>
+          <a:chOff x="0" y="0"/>
+          <a:chExt cx="0" cy="0"/>
+        </a:xfrm>
+      </p:grpSpPr>
       <p:sp>
         <p:nvSpPr>
           <p:cNvPr id="2" name="Rectangle 1"/>
@@ -13839,6 +13904,7 @@
           <a:lstStyle/>
           <a:p>
             <a:pPr algn="ctr"/>
+            <a:endParaRPr/>
           </a:p>
         </p:txBody>
       </p:sp>
@@ -13859,7 +13925,7 @@
           <a:noFill/>
         </p:spPr>
         <p:txBody>
-          <a:bodyPr wrap="square" anchor="t" lIns="0" rIns="0" tIns="0" bIns="0">
+          <a:bodyPr wrap="square" lIns="0" tIns="0" rIns="0" bIns="0" anchor="t">
             <a:spAutoFit/>
           </a:bodyPr>
           <a:lstStyle/>
@@ -13904,7 +13970,7 @@
           <a:noFill/>
         </p:spPr>
         <p:txBody>
-          <a:bodyPr wrap="square" anchor="t" lIns="0" rIns="0" tIns="0" bIns="0">
+          <a:bodyPr wrap="square" lIns="0" tIns="0" rIns="0" bIns="0" anchor="t">
             <a:spAutoFit/>
           </a:bodyPr>
           <a:lstStyle/>
@@ -13973,6 +14039,7 @@
           <a:lstStyle/>
           <a:p>
             <a:pPr algn="ctr"/>
+            <a:endParaRPr/>
           </a:p>
         </p:txBody>
       </p:sp>
@@ -13993,7 +14060,7 @@
           <a:noFill/>
         </p:spPr>
         <p:txBody>
-          <a:bodyPr wrap="square" anchor="t" lIns="0" rIns="0" tIns="0" bIns="0">
+          <a:bodyPr wrap="square" lIns="0" tIns="0" rIns="0" bIns="0" anchor="t">
             <a:spAutoFit/>
           </a:bodyPr>
           <a:lstStyle/>
@@ -14038,7 +14105,7 @@
           <a:noFill/>
         </p:spPr>
         <p:txBody>
-          <a:bodyPr wrap="square" anchor="t" lIns="0" rIns="0" tIns="0" bIns="0">
+          <a:bodyPr wrap="square" lIns="0" tIns="0" rIns="0" bIns="0" anchor="t">
             <a:spAutoFit/>
           </a:bodyPr>
           <a:lstStyle/>
@@ -14083,7 +14150,7 @@
           <a:noFill/>
         </p:spPr>
         <p:txBody>
-          <a:bodyPr wrap="square" anchor="t" lIns="0" rIns="0" tIns="0" bIns="0">
+          <a:bodyPr wrap="square" lIns="0" tIns="0" rIns="0" bIns="0" anchor="t">
             <a:spAutoFit/>
           </a:bodyPr>
           <a:lstStyle/>
@@ -14152,7 +14219,7 @@
           </a:fontRef>
         </p:style>
         <p:txBody>
-          <a:bodyPr rtlCol="0" anchor="ctr" wrap="square" tIns="36576" bIns="36576"/>
+          <a:bodyPr wrap="square" tIns="36576" bIns="36576" rtlCol="0" anchor="ctr"/>
           <a:lstStyle/>
           <a:p>
             <a:pPr algn="ctr">
@@ -14235,6 +14302,7 @@
           <a:lstStyle/>
           <a:p>
             <a:pPr algn="ctr"/>
+            <a:endParaRPr/>
           </a:p>
         </p:txBody>
       </p:sp>
@@ -14279,7 +14347,7 @@
           </a:fontRef>
         </p:style>
         <p:txBody>
-          <a:bodyPr rtlCol="0" anchor="ctr" wrap="square" tIns="36576" bIns="36576"/>
+          <a:bodyPr wrap="square" tIns="36576" bIns="36576" rtlCol="0" anchor="ctr"/>
           <a:lstStyle/>
           <a:p>
             <a:pPr algn="ctr">
@@ -14362,6 +14430,7 @@
           <a:lstStyle/>
           <a:p>
             <a:pPr algn="ctr"/>
+            <a:endParaRPr/>
           </a:p>
         </p:txBody>
       </p:sp>
@@ -14406,7 +14475,7 @@
           </a:fontRef>
         </p:style>
         <p:txBody>
-          <a:bodyPr rtlCol="0" anchor="ctr" wrap="square" tIns="36576" bIns="36576"/>
+          <a:bodyPr wrap="square" tIns="36576" bIns="36576" rtlCol="0" anchor="ctr"/>
           <a:lstStyle/>
           <a:p>
             <a:pPr algn="ctr">
@@ -14489,6 +14558,7 @@
           <a:lstStyle/>
           <a:p>
             <a:pPr algn="ctr"/>
+            <a:endParaRPr/>
           </a:p>
         </p:txBody>
       </p:sp>
@@ -14533,7 +14603,7 @@
           </a:fontRef>
         </p:style>
         <p:txBody>
-          <a:bodyPr rtlCol="0" anchor="ctr" wrap="square" tIns="36576" bIns="36576"/>
+          <a:bodyPr wrap="square" tIns="36576" bIns="36576" rtlCol="0" anchor="ctr"/>
           <a:lstStyle/>
           <a:p>
             <a:pPr algn="ctr">
@@ -14616,6 +14686,7 @@
           <a:lstStyle/>
           <a:p>
             <a:pPr algn="ctr"/>
+            <a:endParaRPr/>
           </a:p>
         </p:txBody>
       </p:sp>
@@ -14660,7 +14731,7 @@
           </a:fontRef>
         </p:style>
         <p:txBody>
-          <a:bodyPr rtlCol="0" anchor="ctr" wrap="square" tIns="36576" bIns="36576"/>
+          <a:bodyPr wrap="square" tIns="36576" bIns="36576" rtlCol="0" anchor="ctr"/>
           <a:lstStyle/>
           <a:p>
             <a:pPr algn="ctr">
@@ -14719,7 +14790,7 @@
           <a:noFill/>
         </p:spPr>
         <p:txBody>
-          <a:bodyPr wrap="square" anchor="t" lIns="0" rIns="0" tIns="0" bIns="0">
+          <a:bodyPr wrap="square" lIns="0" tIns="0" rIns="0" bIns="0" anchor="t">
             <a:spAutoFit/>
           </a:bodyPr>
           <a:lstStyle/>
@@ -14787,7 +14858,7 @@
 </file>
 
 <file path=ppt/slides/slide6.xml><?xml version="1.0" encoding="utf-8"?>
-<p:sld xmlns:a="http://schemas.openxmlformats.org/drawingml/2006/main" xmlns:p="http://schemas.openxmlformats.org/presentationml/2006/main" xmlns:r="http://schemas.openxmlformats.org/officeDocument/2006/relationships">
+<p:sld xmlns:a="http://schemas.openxmlformats.org/drawingml/2006/main" xmlns:r="http://schemas.openxmlformats.org/officeDocument/2006/relationships" xmlns:p="http://schemas.openxmlformats.org/presentationml/2006/main">
   <p:cSld>
     <p:spTree>
       <p:nvGrpSpPr>
@@ -14795,7 +14866,14 @@
         <p:cNvGrpSpPr/>
         <p:nvPr/>
       </p:nvGrpSpPr>
-      <p:grpSpPr/>
+      <p:grpSpPr>
+        <a:xfrm>
+          <a:off x="0" y="0"/>
+          <a:ext cx="0" cy="0"/>
+          <a:chOff x="0" y="0"/>
+          <a:chExt cx="0" cy="0"/>
+        </a:xfrm>
+      </p:grpSpPr>
       <p:sp>
         <p:nvSpPr>
           <p:cNvPr id="2" name="Rectangle 1"/>
@@ -14837,6 +14915,7 @@
           <a:lstStyle/>
           <a:p>
             <a:pPr algn="ctr"/>
+            <a:endParaRPr/>
           </a:p>
         </p:txBody>
       </p:sp>
@@ -14857,7 +14936,7 @@
           <a:noFill/>
         </p:spPr>
         <p:txBody>
-          <a:bodyPr wrap="square" anchor="t" lIns="0" rIns="0" tIns="0" bIns="0">
+          <a:bodyPr wrap="square" lIns="0" tIns="0" rIns="0" bIns="0" anchor="t">
             <a:spAutoFit/>
           </a:bodyPr>
           <a:lstStyle/>
@@ -14902,7 +14981,7 @@
           <a:noFill/>
         </p:spPr>
         <p:txBody>
-          <a:bodyPr wrap="square" anchor="t" lIns="0" rIns="0" tIns="0" bIns="0">
+          <a:bodyPr wrap="square" lIns="0" tIns="0" rIns="0" bIns="0" anchor="t">
             <a:spAutoFit/>
           </a:bodyPr>
           <a:lstStyle/>
@@ -14971,6 +15050,7 @@
           <a:lstStyle/>
           <a:p>
             <a:pPr algn="ctr"/>
+            <a:endParaRPr/>
           </a:p>
         </p:txBody>
       </p:sp>
@@ -14991,7 +15071,7 @@
           <a:noFill/>
         </p:spPr>
         <p:txBody>
-          <a:bodyPr wrap="square" anchor="t" lIns="0" rIns="0" tIns="0" bIns="0">
+          <a:bodyPr wrap="square" lIns="0" tIns="0" rIns="0" bIns="0" anchor="t">
             <a:spAutoFit/>
           </a:bodyPr>
           <a:lstStyle/>
@@ -15036,7 +15116,7 @@
           <a:noFill/>
         </p:spPr>
         <p:txBody>
-          <a:bodyPr wrap="square" anchor="t" lIns="0" rIns="0" tIns="0" bIns="0">
+          <a:bodyPr wrap="square" lIns="0" tIns="0" rIns="0" bIns="0" anchor="t">
             <a:spAutoFit/>
           </a:bodyPr>
           <a:lstStyle/>
@@ -15081,7 +15161,7 @@
           <a:noFill/>
         </p:spPr>
         <p:txBody>
-          <a:bodyPr wrap="square" anchor="t" lIns="0" rIns="0" tIns="0" bIns="0">
+          <a:bodyPr wrap="square" lIns="0" tIns="0" rIns="0" bIns="0" anchor="t">
             <a:spAutoFit/>
           </a:bodyPr>
           <a:lstStyle/>
@@ -15150,7 +15230,7 @@
           </a:fontRef>
         </p:style>
         <p:txBody>
-          <a:bodyPr rtlCol="0" anchor="ctr" wrap="square" tIns="36576" bIns="36576"/>
+          <a:bodyPr wrap="square" tIns="36576" bIns="36576" rtlCol="0" anchor="ctr"/>
           <a:lstStyle/>
           <a:p>
             <a:pPr algn="ctr">
@@ -15233,7 +15313,7 @@
           </a:fontRef>
         </p:style>
         <p:txBody>
-          <a:bodyPr rtlCol="0" anchor="ctr" wrap="square" tIns="36576" bIns="36576"/>
+          <a:bodyPr wrap="square" tIns="36576" bIns="36576" rtlCol="0" anchor="ctr"/>
           <a:lstStyle/>
           <a:p>
             <a:pPr algn="ctr">
@@ -15351,7 +15431,7 @@
           </a:fontRef>
         </p:style>
         <p:txBody>
-          <a:bodyPr rtlCol="0" anchor="ctr" wrap="square" tIns="36576" bIns="36576"/>
+          <a:bodyPr wrap="square" tIns="36576" bIns="36576" rtlCol="0" anchor="ctr"/>
           <a:lstStyle/>
           <a:p>
             <a:pPr algn="ctr">
@@ -15469,7 +15549,7 @@
           </a:fontRef>
         </p:style>
         <p:txBody>
-          <a:bodyPr rtlCol="0" anchor="ctr" wrap="square" tIns="36576" bIns="36576"/>
+          <a:bodyPr wrap="square" tIns="36576" bIns="36576" rtlCol="0" anchor="ctr"/>
           <a:lstStyle/>
           <a:p>
             <a:pPr algn="ctr">
@@ -15587,7 +15667,7 @@
           </a:fontRef>
         </p:style>
         <p:txBody>
-          <a:bodyPr rtlCol="0" anchor="ctr" wrap="square" tIns="36576" bIns="36576"/>
+          <a:bodyPr wrap="square" tIns="36576" bIns="36576" rtlCol="0" anchor="ctr"/>
           <a:lstStyle/>
           <a:p>
             <a:pPr algn="ctr">
@@ -15681,7 +15761,7 @@
           <a:noFill/>
         </p:spPr>
         <p:txBody>
-          <a:bodyPr wrap="square" anchor="t" lIns="0" rIns="0" tIns="0" bIns="0">
+          <a:bodyPr wrap="square" lIns="0" tIns="0" rIns="0" bIns="0" anchor="t">
             <a:spAutoFit/>
           </a:bodyPr>
           <a:lstStyle/>
@@ -15749,7 +15829,7 @@
 </file>
 
 <file path=ppt/slides/slide7.xml><?xml version="1.0" encoding="utf-8"?>
-<p:sld xmlns:a="http://schemas.openxmlformats.org/drawingml/2006/main" xmlns:p="http://schemas.openxmlformats.org/presentationml/2006/main" xmlns:r="http://schemas.openxmlformats.org/officeDocument/2006/relationships">
+<p:sld xmlns:a="http://schemas.openxmlformats.org/drawingml/2006/main" xmlns:r="http://schemas.openxmlformats.org/officeDocument/2006/relationships" xmlns:p="http://schemas.openxmlformats.org/presentationml/2006/main">
   <p:cSld>
     <p:spTree>
       <p:nvGrpSpPr>
@@ -15757,7 +15837,14 @@
         <p:cNvGrpSpPr/>
         <p:nvPr/>
       </p:nvGrpSpPr>
-      <p:grpSpPr/>
+      <p:grpSpPr>
+        <a:xfrm>
+          <a:off x="0" y="0"/>
+          <a:ext cx="0" cy="0"/>
+          <a:chOff x="0" y="0"/>
+          <a:chExt cx="0" cy="0"/>
+        </a:xfrm>
+      </p:grpSpPr>
       <p:sp>
         <p:nvSpPr>
           <p:cNvPr id="2" name="Rectangle 1"/>
@@ -15799,6 +15886,7 @@
           <a:lstStyle/>
           <a:p>
             <a:pPr algn="ctr"/>
+            <a:endParaRPr/>
           </a:p>
         </p:txBody>
       </p:sp>
@@ -15819,7 +15907,7 @@
           <a:noFill/>
         </p:spPr>
         <p:txBody>
-          <a:bodyPr wrap="square" anchor="t" lIns="0" rIns="0" tIns="0" bIns="0">
+          <a:bodyPr wrap="square" lIns="0" tIns="0" rIns="0" bIns="0" anchor="t">
             <a:spAutoFit/>
           </a:bodyPr>
           <a:lstStyle/>
@@ -15864,7 +15952,7 @@
           <a:noFill/>
         </p:spPr>
         <p:txBody>
-          <a:bodyPr wrap="square" anchor="t" lIns="0" rIns="0" tIns="0" bIns="0">
+          <a:bodyPr wrap="square" lIns="0" tIns="0" rIns="0" bIns="0" anchor="t">
             <a:spAutoFit/>
           </a:bodyPr>
           <a:lstStyle/>
@@ -15933,6 +16021,7 @@
           <a:lstStyle/>
           <a:p>
             <a:pPr algn="ctr"/>
+            <a:endParaRPr/>
           </a:p>
         </p:txBody>
       </p:sp>
@@ -15953,7 +16042,7 @@
           <a:noFill/>
         </p:spPr>
         <p:txBody>
-          <a:bodyPr wrap="square" anchor="t" lIns="0" rIns="0" tIns="0" bIns="0">
+          <a:bodyPr wrap="square" lIns="0" tIns="0" rIns="0" bIns="0" anchor="t">
             <a:spAutoFit/>
           </a:bodyPr>
           <a:lstStyle/>
@@ -15998,7 +16087,7 @@
           <a:noFill/>
         </p:spPr>
         <p:txBody>
-          <a:bodyPr wrap="square" anchor="t" lIns="0" rIns="0" tIns="0" bIns="0">
+          <a:bodyPr wrap="square" lIns="0" tIns="0" rIns="0" bIns="0" anchor="t">
             <a:spAutoFit/>
           </a:bodyPr>
           <a:lstStyle/>
@@ -16071,6 +16160,7 @@
           <a:lstStyle/>
           <a:p>
             <a:pPr algn="ctr"/>
+            <a:endParaRPr/>
           </a:p>
         </p:txBody>
       </p:sp>
@@ -16091,7 +16181,7 @@
           <a:noFill/>
         </p:spPr>
         <p:txBody>
-          <a:bodyPr wrap="square" anchor="ctr" lIns="0" rIns="0" tIns="0" bIns="0">
+          <a:bodyPr wrap="square" lIns="0" tIns="0" rIns="0" bIns="0" anchor="ctr">
             <a:spAutoFit/>
           </a:bodyPr>
           <a:lstStyle/>
@@ -16136,7 +16226,7 @@
           <a:noFill/>
         </p:spPr>
         <p:txBody>
-          <a:bodyPr wrap="square" anchor="ctr" lIns="0" rIns="0" tIns="0" bIns="0">
+          <a:bodyPr wrap="square" lIns="0" tIns="0" rIns="0" bIns="0" anchor="ctr">
             <a:spAutoFit/>
           </a:bodyPr>
           <a:lstStyle/>
@@ -16205,6 +16295,7 @@
           <a:lstStyle/>
           <a:p>
             <a:pPr algn="ctr"/>
+            <a:endParaRPr/>
           </a:p>
         </p:txBody>
       </p:sp>
@@ -16253,6 +16344,7 @@
           <a:lstStyle/>
           <a:p>
             <a:pPr algn="ctr"/>
+            <a:endParaRPr/>
           </a:p>
         </p:txBody>
       </p:sp>
@@ -16273,7 +16365,7 @@
           <a:noFill/>
         </p:spPr>
         <p:txBody>
-          <a:bodyPr wrap="square" anchor="ctr" lIns="0" rIns="0" tIns="0" bIns="0">
+          <a:bodyPr wrap="square" lIns="0" tIns="0" rIns="0" bIns="0" anchor="ctr">
             <a:spAutoFit/>
           </a:bodyPr>
           <a:lstStyle/>
@@ -16318,7 +16410,7 @@
           <a:noFill/>
         </p:spPr>
         <p:txBody>
-          <a:bodyPr wrap="square" anchor="ctr" lIns="0" rIns="0" tIns="0" bIns="0">
+          <a:bodyPr wrap="square" lIns="0" tIns="0" rIns="0" bIns="0" anchor="ctr">
             <a:spAutoFit/>
           </a:bodyPr>
           <a:lstStyle/>
@@ -16387,6 +16479,7 @@
           <a:lstStyle/>
           <a:p>
             <a:pPr algn="ctr"/>
+            <a:endParaRPr/>
           </a:p>
         </p:txBody>
       </p:sp>
@@ -16435,6 +16528,7 @@
           <a:lstStyle/>
           <a:p>
             <a:pPr algn="ctr"/>
+            <a:endParaRPr/>
           </a:p>
         </p:txBody>
       </p:sp>
@@ -16455,7 +16549,7 @@
           <a:noFill/>
         </p:spPr>
         <p:txBody>
-          <a:bodyPr wrap="square" anchor="ctr" lIns="0" rIns="0" tIns="0" bIns="0">
+          <a:bodyPr wrap="square" lIns="0" tIns="0" rIns="0" bIns="0" anchor="ctr">
             <a:spAutoFit/>
           </a:bodyPr>
           <a:lstStyle/>
@@ -16500,7 +16594,7 @@
           <a:noFill/>
         </p:spPr>
         <p:txBody>
-          <a:bodyPr wrap="square" anchor="ctr" lIns="0" rIns="0" tIns="0" bIns="0">
+          <a:bodyPr wrap="square" lIns="0" tIns="0" rIns="0" bIns="0" anchor="ctr">
             <a:spAutoFit/>
           </a:bodyPr>
           <a:lstStyle/>
@@ -16569,6 +16663,7 @@
           <a:lstStyle/>
           <a:p>
             <a:pPr algn="ctr"/>
+            <a:endParaRPr/>
           </a:p>
         </p:txBody>
       </p:sp>
@@ -16617,6 +16712,7 @@
           <a:lstStyle/>
           <a:p>
             <a:pPr algn="ctr"/>
+            <a:endParaRPr/>
           </a:p>
         </p:txBody>
       </p:sp>
@@ -16637,7 +16733,7 @@
           <a:noFill/>
         </p:spPr>
         <p:txBody>
-          <a:bodyPr wrap="square" anchor="ctr" lIns="0" rIns="0" tIns="0" bIns="0">
+          <a:bodyPr wrap="square" lIns="0" tIns="0" rIns="0" bIns="0" anchor="ctr">
             <a:spAutoFit/>
           </a:bodyPr>
           <a:lstStyle/>
@@ -16682,7 +16778,7 @@
           <a:noFill/>
         </p:spPr>
         <p:txBody>
-          <a:bodyPr wrap="square" anchor="ctr" lIns="0" rIns="0" tIns="0" bIns="0">
+          <a:bodyPr wrap="square" lIns="0" tIns="0" rIns="0" bIns="0" anchor="ctr">
             <a:spAutoFit/>
           </a:bodyPr>
           <a:lstStyle/>
@@ -16751,6 +16847,7 @@
           <a:lstStyle/>
           <a:p>
             <a:pPr algn="ctr"/>
+            <a:endParaRPr/>
           </a:p>
         </p:txBody>
       </p:sp>
@@ -16799,6 +16896,7 @@
           <a:lstStyle/>
           <a:p>
             <a:pPr algn="ctr"/>
+            <a:endParaRPr/>
           </a:p>
         </p:txBody>
       </p:sp>
@@ -16819,7 +16917,7 @@
           <a:noFill/>
         </p:spPr>
         <p:txBody>
-          <a:bodyPr wrap="square" anchor="ctr" lIns="0" rIns="0" tIns="0" bIns="0">
+          <a:bodyPr wrap="square" lIns="0" tIns="0" rIns="0" bIns="0" anchor="ctr">
             <a:spAutoFit/>
           </a:bodyPr>
           <a:lstStyle/>
@@ -16864,7 +16962,7 @@
           <a:noFill/>
         </p:spPr>
         <p:txBody>
-          <a:bodyPr wrap="square" anchor="ctr" lIns="0" rIns="0" tIns="0" bIns="0">
+          <a:bodyPr wrap="square" lIns="0" tIns="0" rIns="0" bIns="0" anchor="ctr">
             <a:spAutoFit/>
           </a:bodyPr>
           <a:lstStyle/>
@@ -16933,6 +17031,7 @@
           <a:lstStyle/>
           <a:p>
             <a:pPr algn="ctr"/>
+            <a:endParaRPr/>
           </a:p>
         </p:txBody>
       </p:sp>
@@ -16981,6 +17080,7 @@
           <a:lstStyle/>
           <a:p>
             <a:pPr algn="ctr"/>
+            <a:endParaRPr/>
           </a:p>
         </p:txBody>
       </p:sp>
@@ -17001,7 +17101,7 @@
           <a:noFill/>
         </p:spPr>
         <p:txBody>
-          <a:bodyPr wrap="square" anchor="ctr" lIns="0" rIns="0" tIns="0" bIns="0">
+          <a:bodyPr wrap="square" lIns="0" tIns="0" rIns="0" bIns="0" anchor="ctr">
             <a:spAutoFit/>
           </a:bodyPr>
           <a:lstStyle/>
@@ -17046,7 +17146,7 @@
           <a:noFill/>
         </p:spPr>
         <p:txBody>
-          <a:bodyPr wrap="square" anchor="ctr" lIns="0" rIns="0" tIns="0" bIns="0">
+          <a:bodyPr wrap="square" lIns="0" tIns="0" rIns="0" bIns="0" anchor="ctr">
             <a:spAutoFit/>
           </a:bodyPr>
           <a:lstStyle/>
@@ -17115,6 +17215,7 @@
           <a:lstStyle/>
           <a:p>
             <a:pPr algn="ctr"/>
+            <a:endParaRPr/>
           </a:p>
         </p:txBody>
       </p:sp>
@@ -17135,7 +17236,7 @@
           <a:noFill/>
         </p:spPr>
         <p:txBody>
-          <a:bodyPr wrap="square" anchor="t" lIns="0" rIns="0" tIns="0" bIns="0">
+          <a:bodyPr wrap="square" lIns="0" tIns="0" rIns="0" bIns="0" anchor="t">
             <a:spAutoFit/>
           </a:bodyPr>
           <a:lstStyle/>
@@ -17172,7 +17273,7 @@
 </file>
 
 <file path=ppt/slides/slide8.xml><?xml version="1.0" encoding="utf-8"?>
-<p:sld xmlns:a="http://schemas.openxmlformats.org/drawingml/2006/main" xmlns:p="http://schemas.openxmlformats.org/presentationml/2006/main" xmlns:r="http://schemas.openxmlformats.org/officeDocument/2006/relationships">
+<p:sld xmlns:a="http://schemas.openxmlformats.org/drawingml/2006/main" xmlns:r="http://schemas.openxmlformats.org/officeDocument/2006/relationships" xmlns:p="http://schemas.openxmlformats.org/presentationml/2006/main">
   <p:cSld>
     <p:spTree>
       <p:nvGrpSpPr>
@@ -17180,7 +17281,14 @@
         <p:cNvGrpSpPr/>
         <p:nvPr/>
       </p:nvGrpSpPr>
-      <p:grpSpPr/>
+      <p:grpSpPr>
+        <a:xfrm>
+          <a:off x="0" y="0"/>
+          <a:ext cx="0" cy="0"/>
+          <a:chOff x="0" y="0"/>
+          <a:chExt cx="0" cy="0"/>
+        </a:xfrm>
+      </p:grpSpPr>
       <p:sp>
         <p:nvSpPr>
           <p:cNvPr id="2" name="Rectangle 1"/>
@@ -17222,6 +17330,7 @@
           <a:lstStyle/>
           <a:p>
             <a:pPr algn="ctr"/>
+            <a:endParaRPr/>
           </a:p>
         </p:txBody>
       </p:sp>
@@ -17242,7 +17351,7 @@
           <a:noFill/>
         </p:spPr>
         <p:txBody>
-          <a:bodyPr wrap="square" anchor="t" lIns="0" rIns="0" tIns="0" bIns="0">
+          <a:bodyPr wrap="square" lIns="0" tIns="0" rIns="0" bIns="0" anchor="t">
             <a:spAutoFit/>
           </a:bodyPr>
           <a:lstStyle/>
@@ -17287,7 +17396,7 @@
           <a:noFill/>
         </p:spPr>
         <p:txBody>
-          <a:bodyPr wrap="square" anchor="t" lIns="0" rIns="0" tIns="0" bIns="0">
+          <a:bodyPr wrap="square" lIns="0" tIns="0" rIns="0" bIns="0" anchor="t">
             <a:spAutoFit/>
           </a:bodyPr>
           <a:lstStyle/>
@@ -17356,6 +17465,7 @@
           <a:lstStyle/>
           <a:p>
             <a:pPr algn="ctr"/>
+            <a:endParaRPr/>
           </a:p>
         </p:txBody>
       </p:sp>
@@ -17376,7 +17486,7 @@
           <a:noFill/>
         </p:spPr>
         <p:txBody>
-          <a:bodyPr wrap="square" anchor="t" lIns="0" rIns="0" tIns="0" bIns="0">
+          <a:bodyPr wrap="square" lIns="0" tIns="0" rIns="0" bIns="0" anchor="t">
             <a:spAutoFit/>
           </a:bodyPr>
           <a:lstStyle/>
@@ -17421,7 +17531,7 @@
           <a:noFill/>
         </p:spPr>
         <p:txBody>
-          <a:bodyPr wrap="square" anchor="t" lIns="0" rIns="0" tIns="0" bIns="0">
+          <a:bodyPr wrap="square" lIns="0" tIns="0" rIns="0" bIns="0" anchor="t">
             <a:spAutoFit/>
           </a:bodyPr>
           <a:lstStyle/>
@@ -17490,7 +17600,7 @@
           </a:fontRef>
         </p:style>
         <p:txBody>
-          <a:bodyPr rtlCol="0" anchor="ctr" wrap="square" tIns="36576" bIns="36576"/>
+          <a:bodyPr wrap="square" tIns="36576" bIns="36576" rtlCol="0" anchor="ctr"/>
           <a:lstStyle/>
           <a:p>
             <a:pPr algn="ctr">
@@ -17665,7 +17775,7 @@
           </a:fontRef>
         </p:style>
         <p:txBody>
-          <a:bodyPr rtlCol="0" anchor="ctr" wrap="square" tIns="36576" bIns="36576"/>
+          <a:bodyPr wrap="square" tIns="36576" bIns="36576" rtlCol="0" anchor="ctr"/>
           <a:lstStyle/>
           <a:p>
             <a:pPr algn="ctr">
@@ -17808,7 +17918,7 @@
 </file>
 
 <file path=ppt/slides/slide9.xml><?xml version="1.0" encoding="utf-8"?>
-<p:sld xmlns:a="http://schemas.openxmlformats.org/drawingml/2006/main" xmlns:p="http://schemas.openxmlformats.org/presentationml/2006/main" xmlns:r="http://schemas.openxmlformats.org/officeDocument/2006/relationships">
+<p:sld xmlns:a="http://schemas.openxmlformats.org/drawingml/2006/main" xmlns:r="http://schemas.openxmlformats.org/officeDocument/2006/relationships" xmlns:p="http://schemas.openxmlformats.org/presentationml/2006/main">
   <p:cSld>
     <p:spTree>
       <p:nvGrpSpPr>
@@ -17816,7 +17926,14 @@
         <p:cNvGrpSpPr/>
         <p:nvPr/>
       </p:nvGrpSpPr>
-      <p:grpSpPr/>
+      <p:grpSpPr>
+        <a:xfrm>
+          <a:off x="0" y="0"/>
+          <a:ext cx="0" cy="0"/>
+          <a:chOff x="0" y="0"/>
+          <a:chExt cx="0" cy="0"/>
+        </a:xfrm>
+      </p:grpSpPr>
       <p:sp>
         <p:nvSpPr>
           <p:cNvPr id="2" name="Rectangle 1"/>
@@ -17858,6 +17975,7 @@
           <a:lstStyle/>
           <a:p>
             <a:pPr algn="ctr"/>
+            <a:endParaRPr/>
           </a:p>
         </p:txBody>
       </p:sp>
@@ -17878,7 +17996,7 @@
           <a:noFill/>
         </p:spPr>
         <p:txBody>
-          <a:bodyPr wrap="square" anchor="t" lIns="0" rIns="0" tIns="0" bIns="0">
+          <a:bodyPr wrap="square" lIns="0" tIns="0" rIns="0" bIns="0" anchor="t">
             <a:spAutoFit/>
           </a:bodyPr>
           <a:lstStyle/>
@@ -17923,7 +18041,7 @@
           <a:noFill/>
         </p:spPr>
         <p:txBody>
-          <a:bodyPr wrap="square" anchor="t" lIns="0" rIns="0" tIns="0" bIns="0">
+          <a:bodyPr wrap="square" lIns="0" tIns="0" rIns="0" bIns="0" anchor="t">
             <a:spAutoFit/>
           </a:bodyPr>
           <a:lstStyle/>
@@ -17992,6 +18110,7 @@
           <a:lstStyle/>
           <a:p>
             <a:pPr algn="ctr"/>
+            <a:endParaRPr/>
           </a:p>
         </p:txBody>
       </p:sp>
@@ -18012,7 +18131,7 @@
           <a:noFill/>
         </p:spPr>
         <p:txBody>
-          <a:bodyPr wrap="square" anchor="t" lIns="0" rIns="0" tIns="0" bIns="0">
+          <a:bodyPr wrap="square" lIns="0" tIns="0" rIns="0" bIns="0" anchor="t">
             <a:spAutoFit/>
           </a:bodyPr>
           <a:lstStyle/>
@@ -18057,7 +18176,7 @@
           <a:noFill/>
         </p:spPr>
         <p:txBody>
-          <a:bodyPr wrap="square" anchor="t" lIns="0" rIns="0" tIns="0" bIns="0">
+          <a:bodyPr wrap="square" lIns="0" tIns="0" rIns="0" bIns="0" anchor="t">
             <a:spAutoFit/>
           </a:bodyPr>
           <a:lstStyle/>
@@ -18102,7 +18221,7 @@
           <a:noFill/>
         </p:spPr>
         <p:txBody>
-          <a:bodyPr wrap="square" anchor="t" lIns="0" rIns="0" tIns="0" bIns="0">
+          <a:bodyPr wrap="square" lIns="0" tIns="0" rIns="0" bIns="0" anchor="t">
             <a:spAutoFit/>
           </a:bodyPr>
           <a:lstStyle/>
@@ -18171,7 +18290,7 @@
           </a:fontRef>
         </p:style>
         <p:txBody>
-          <a:bodyPr rtlCol="0" anchor="ctr" wrap="square" tIns="36576" bIns="36576"/>
+          <a:bodyPr wrap="square" tIns="36576" bIns="36576" rtlCol="0" anchor="ctr"/>
           <a:lstStyle/>
           <a:p>
             <a:pPr algn="ctr">
@@ -18254,6 +18373,7 @@
           <a:lstStyle/>
           <a:p>
             <a:pPr algn="ctr"/>
+            <a:endParaRPr/>
           </a:p>
         </p:txBody>
       </p:sp>
@@ -18298,7 +18418,7 @@
           </a:fontRef>
         </p:style>
         <p:txBody>
-          <a:bodyPr rtlCol="0" anchor="ctr" wrap="square" tIns="36576" bIns="36576"/>
+          <a:bodyPr wrap="square" tIns="36576" bIns="36576" rtlCol="0" anchor="ctr"/>
           <a:lstStyle/>
           <a:p>
             <a:pPr algn="ctr">
@@ -18381,6 +18501,7 @@
           <a:lstStyle/>
           <a:p>
             <a:pPr algn="ctr"/>
+            <a:endParaRPr/>
           </a:p>
         </p:txBody>
       </p:sp>
@@ -18425,7 +18546,7 @@
           </a:fontRef>
         </p:style>
         <p:txBody>
-          <a:bodyPr rtlCol="0" anchor="ctr" wrap="square" tIns="36576" bIns="36576"/>
+          <a:bodyPr wrap="square" tIns="36576" bIns="36576" rtlCol="0" anchor="ctr"/>
           <a:lstStyle/>
           <a:p>
             <a:pPr algn="ctr">
@@ -18508,6 +18629,7 @@
           <a:lstStyle/>
           <a:p>
             <a:pPr algn="ctr"/>
+            <a:endParaRPr/>
           </a:p>
         </p:txBody>
       </p:sp>
@@ -18552,7 +18674,7 @@
           </a:fontRef>
         </p:style>
         <p:txBody>
-          <a:bodyPr rtlCol="0" anchor="ctr" wrap="square" tIns="36576" bIns="36576"/>
+          <a:bodyPr wrap="square" tIns="36576" bIns="36576" rtlCol="0" anchor="ctr"/>
           <a:lstStyle/>
           <a:p>
             <a:pPr algn="ctr">
@@ -18635,6 +18757,7 @@
           <a:lstStyle/>
           <a:p>
             <a:pPr algn="ctr"/>
+            <a:endParaRPr/>
           </a:p>
         </p:txBody>
       </p:sp>
@@ -18679,7 +18802,7 @@
           </a:fontRef>
         </p:style>
         <p:txBody>
-          <a:bodyPr rtlCol="0" anchor="ctr" wrap="square" tIns="36576" bIns="36576"/>
+          <a:bodyPr wrap="square" tIns="36576" bIns="36576" rtlCol="0" anchor="ctr"/>
           <a:lstStyle/>
           <a:p>
             <a:pPr algn="ctr">
@@ -18738,7 +18861,7 @@
           <a:noFill/>
         </p:spPr>
         <p:txBody>
-          <a:bodyPr wrap="square" anchor="t" lIns="0" rIns="0" tIns="0" bIns="0">
+          <a:bodyPr wrap="square" lIns="0" tIns="0" rIns="0" bIns="0" anchor="t">
             <a:spAutoFit/>
           </a:bodyPr>
           <a:lstStyle/>
@@ -18807,7 +18930,7 @@
           </a:fontRef>
         </p:style>
         <p:txBody>
-          <a:bodyPr rtlCol="0" anchor="ctr" wrap="square" tIns="36576" bIns="36576"/>
+          <a:bodyPr wrap="square" tIns="36576" bIns="36576" rtlCol="0" anchor="ctr"/>
           <a:lstStyle/>
           <a:p>
             <a:pPr algn="ctr">
@@ -18890,7 +19013,7 @@
           </a:fontRef>
         </p:style>
         <p:txBody>
-          <a:bodyPr rtlCol="0" anchor="ctr" wrap="square" tIns="36576" bIns="36576"/>
+          <a:bodyPr wrap="square" tIns="36576" bIns="36576" rtlCol="0" anchor="ctr"/>
           <a:lstStyle/>
           <a:p>
             <a:pPr algn="ctr">
@@ -18973,7 +19096,7 @@
           </a:fontRef>
         </p:style>
         <p:txBody>
-          <a:bodyPr rtlCol="0" anchor="ctr" wrap="square" tIns="36576" bIns="36576"/>
+          <a:bodyPr wrap="square" tIns="36576" bIns="36576" rtlCol="0" anchor="ctr"/>
           <a:lstStyle/>
           <a:p>
             <a:pPr algn="ctr">
@@ -19056,7 +19179,7 @@
           </a:fontRef>
         </p:style>
         <p:txBody>
-          <a:bodyPr rtlCol="0" anchor="ctr" wrap="square" tIns="36576" bIns="36576"/>
+          <a:bodyPr wrap="square" tIns="36576" bIns="36576" rtlCol="0" anchor="ctr"/>
           <a:lstStyle/>
           <a:p>
             <a:pPr algn="ctr">
@@ -19115,7 +19238,7 @@
           <a:noFill/>
         </p:spPr>
         <p:txBody>
-          <a:bodyPr wrap="square" anchor="t" lIns="0" rIns="0" tIns="0" bIns="0">
+          <a:bodyPr wrap="square" lIns="0" tIns="0" rIns="0" bIns="0" anchor="t">
             <a:spAutoFit/>
           </a:bodyPr>
           <a:lstStyle/>
@@ -19491,44 +19614,44 @@
         <a:sysClr val="window" lastClr="FFFFFF"/>
       </a:lt1>
       <a:dk2>
-        <a:srgbClr val="1F497D"/>
+        <a:srgbClr val="0E2841"/>
       </a:dk2>
       <a:lt2>
-        <a:srgbClr val="EEECE1"/>
+        <a:srgbClr val="E8E8E8"/>
       </a:lt2>
       <a:accent1>
-        <a:srgbClr val="4F81BD"/>
+        <a:srgbClr val="156082"/>
       </a:accent1>
       <a:accent2>
-        <a:srgbClr val="C0504D"/>
+        <a:srgbClr val="E97132"/>
       </a:accent2>
       <a:accent3>
-        <a:srgbClr val="9BBB59"/>
+        <a:srgbClr val="196B24"/>
       </a:accent3>
       <a:accent4>
-        <a:srgbClr val="8064A2"/>
+        <a:srgbClr val="0F9ED5"/>
       </a:accent4>
       <a:accent5>
-        <a:srgbClr val="4BACC6"/>
+        <a:srgbClr val="A02B93"/>
       </a:accent5>
       <a:accent6>
-        <a:srgbClr val="F79646"/>
+        <a:srgbClr val="4EA72E"/>
       </a:accent6>
       <a:hlink>
-        <a:srgbClr val="0000FF"/>
+        <a:srgbClr val="467886"/>
       </a:hlink>
       <a:folHlink>
-        <a:srgbClr val="800080"/>
+        <a:srgbClr val="96607D"/>
       </a:folHlink>
     </a:clrScheme>
     <a:fontScheme name="Office">
       <a:majorFont>
-        <a:latin typeface="Calibri"/>
+        <a:latin typeface="Aptos Display" panose="02110004020202020204"/>
         <a:ea typeface=""/>
         <a:cs typeface=""/>
-        <a:font script="Jpan" typeface="ＭＳ Ｐゴシック"/>
+        <a:font script="Jpan" typeface="游ゴシック Light"/>
         <a:font script="Hang" typeface="맑은 고딕"/>
-        <a:font script="Hans" typeface="宋体"/>
+        <a:font script="Hans" typeface="等线 Light"/>
         <a:font script="Hant" typeface="新細明體"/>
         <a:font script="Arab" typeface="Times New Roman"/>
         <a:font script="Hebr" typeface="Times New Roman"/>
@@ -19556,14 +19679,31 @@
         <a:font script="Viet" typeface="Times New Roman"/>
         <a:font script="Uigh" typeface="Microsoft Uighur"/>
         <a:font script="Geor" typeface="Sylfaen"/>
+        <a:font script="Armn" typeface="Arial"/>
+        <a:font script="Bugi" typeface="Leelawadee UI"/>
+        <a:font script="Bopo" typeface="Microsoft JhengHei"/>
+        <a:font script="Java" typeface="Javanese Text"/>
+        <a:font script="Lisu" typeface="Segoe UI"/>
+        <a:font script="Mymr" typeface="Myanmar Text"/>
+        <a:font script="Nkoo" typeface="Ebrima"/>
+        <a:font script="Olck" typeface="Nirmala UI"/>
+        <a:font script="Osma" typeface="Ebrima"/>
+        <a:font script="Phag" typeface="Phagspa"/>
+        <a:font script="Syrn" typeface="Estrangelo Edessa"/>
+        <a:font script="Syrj" typeface="Estrangelo Edessa"/>
+        <a:font script="Syre" typeface="Estrangelo Edessa"/>
+        <a:font script="Sora" typeface="Nirmala UI"/>
+        <a:font script="Tale" typeface="Microsoft Tai Le"/>
+        <a:font script="Talu" typeface="Microsoft New Tai Lue"/>
+        <a:font script="Tfng" typeface="Ebrima"/>
       </a:majorFont>
       <a:minorFont>
-        <a:latin typeface="Calibri"/>
+        <a:latin typeface="Aptos" panose="02110004020202020204"/>
         <a:ea typeface=""/>
         <a:cs typeface=""/>
-        <a:font script="Jpan" typeface="ＭＳ Ｐゴシック"/>
+        <a:font script="Jpan" typeface="游ゴシック"/>
         <a:font script="Hang" typeface="맑은 고딕"/>
-        <a:font script="Hans" typeface="宋体"/>
+        <a:font script="Hans" typeface="等线"/>
         <a:font script="Hant" typeface="新細明體"/>
         <a:font script="Arab" typeface="Arial"/>
         <a:font script="Hebr" typeface="Arial"/>
@@ -19591,6 +19731,23 @@
         <a:font script="Viet" typeface="Arial"/>
         <a:font script="Uigh" typeface="Microsoft Uighur"/>
         <a:font script="Geor" typeface="Sylfaen"/>
+        <a:font script="Armn" typeface="Arial"/>
+        <a:font script="Bugi" typeface="Leelawadee UI"/>
+        <a:font script="Bopo" typeface="Microsoft JhengHei"/>
+        <a:font script="Java" typeface="Javanese Text"/>
+        <a:font script="Lisu" typeface="Segoe UI"/>
+        <a:font script="Mymr" typeface="Myanmar Text"/>
+        <a:font script="Nkoo" typeface="Ebrima"/>
+        <a:font script="Olck" typeface="Nirmala UI"/>
+        <a:font script="Osma" typeface="Ebrima"/>
+        <a:font script="Phag" typeface="Phagspa"/>
+        <a:font script="Syrn" typeface="Estrangelo Edessa"/>
+        <a:font script="Syrj" typeface="Estrangelo Edessa"/>
+        <a:font script="Syre" typeface="Estrangelo Edessa"/>
+        <a:font script="Sora" typeface="Nirmala UI"/>
+        <a:font script="Tale" typeface="Microsoft Tai Le"/>
+        <a:font script="Talu" typeface="Microsoft New Tai Lue"/>
+        <a:font script="Tfng" typeface="Ebrima"/>
       </a:minorFont>
     </a:fontScheme>
     <a:fmtScheme name="Office">
@@ -19602,180 +19759,136 @@
           <a:gsLst>
             <a:gs pos="0">
               <a:schemeClr val="phClr">
-                <a:tint val="50000"/>
-                <a:satMod val="300000"/>
+                <a:lumMod val="110000"/>
+                <a:satMod val="105000"/>
+                <a:tint val="67000"/>
               </a:schemeClr>
             </a:gs>
-            <a:gs pos="35000">
+            <a:gs pos="50000">
               <a:schemeClr val="phClr">
-                <a:tint val="37000"/>
-                <a:satMod val="300000"/>
+                <a:lumMod val="105000"/>
+                <a:satMod val="103000"/>
+                <a:tint val="73000"/>
               </a:schemeClr>
             </a:gs>
             <a:gs pos="100000">
               <a:schemeClr val="phClr">
-                <a:tint val="15000"/>
-                <a:satMod val="350000"/>
+                <a:lumMod val="105000"/>
+                <a:satMod val="109000"/>
+                <a:tint val="81000"/>
               </a:schemeClr>
             </a:gs>
           </a:gsLst>
-          <a:lin ang="16200000" scaled="1"/>
+          <a:lin ang="5400000" scaled="0"/>
         </a:gradFill>
         <a:gradFill rotWithShape="1">
           <a:gsLst>
             <a:gs pos="0">
               <a:schemeClr val="phClr">
-                <a:tint val="100000"/>
+                <a:satMod val="103000"/>
+                <a:lumMod val="102000"/>
+                <a:tint val="94000"/>
+              </a:schemeClr>
+            </a:gs>
+            <a:gs pos="50000">
+              <a:schemeClr val="phClr">
+                <a:satMod val="110000"/>
+                <a:lumMod val="100000"/>
                 <a:shade val="100000"/>
-                <a:satMod val="130000"/>
               </a:schemeClr>
             </a:gs>
             <a:gs pos="100000">
               <a:schemeClr val="phClr">
-                <a:tint val="50000"/>
-                <a:shade val="100000"/>
-                <a:satMod val="350000"/>
+                <a:lumMod val="99000"/>
+                <a:satMod val="120000"/>
+                <a:shade val="78000"/>
               </a:schemeClr>
             </a:gs>
           </a:gsLst>
-          <a:lin ang="16200000" scaled="0"/>
+          <a:lin ang="5400000" scaled="0"/>
         </a:gradFill>
       </a:fillStyleLst>
       <a:lnStyleLst>
-        <a:ln w="9525" cap="flat" cmpd="sng" algn="ctr">
+        <a:ln w="12700" cap="flat" cmpd="sng" algn="ctr">
           <a:solidFill>
-            <a:schemeClr val="phClr">
-              <a:shade val="95000"/>
-              <a:satMod val="105000"/>
-            </a:schemeClr>
+            <a:schemeClr val="phClr"/>
           </a:solidFill>
           <a:prstDash val="solid"/>
+          <a:miter lim="800000"/>
+        </a:ln>
+        <a:ln w="19050" cap="flat" cmpd="sng" algn="ctr">
+          <a:solidFill>
+            <a:schemeClr val="phClr"/>
+          </a:solidFill>
+          <a:prstDash val="solid"/>
+          <a:miter lim="800000"/>
         </a:ln>
         <a:ln w="25400" cap="flat" cmpd="sng" algn="ctr">
           <a:solidFill>
             <a:schemeClr val="phClr"/>
           </a:solidFill>
           <a:prstDash val="solid"/>
-        </a:ln>
-        <a:ln w="38100" cap="flat" cmpd="sng" algn="ctr">
-          <a:solidFill>
-            <a:schemeClr val="phClr"/>
-          </a:solidFill>
-          <a:prstDash val="solid"/>
+          <a:miter lim="800000"/>
         </a:ln>
       </a:lnStyleLst>
       <a:effectStyleLst>
         <a:effectStyle>
+          <a:effectLst/>
+        </a:effectStyle>
+        <a:effectStyle>
+          <a:effectLst/>
+        </a:effectStyle>
+        <a:effectStyle>
           <a:effectLst>
-            <a:outerShdw blurRad="40000" dist="20000" dir="5400000" rotWithShape="0">
+            <a:outerShdw blurRad="57150" dist="19050" dir="5400000" algn="ctr" rotWithShape="0">
               <a:srgbClr val="000000">
-                <a:alpha val="38000"/>
+                <a:alpha val="63000"/>
               </a:srgbClr>
             </a:outerShdw>
           </a:effectLst>
-        </a:effectStyle>
-        <a:effectStyle>
-          <a:effectLst>
-            <a:outerShdw blurRad="40000" dist="23000" dir="5400000" rotWithShape="0">
-              <a:srgbClr val="000000">
-                <a:alpha val="35000"/>
-              </a:srgbClr>
-            </a:outerShdw>
-          </a:effectLst>
-        </a:effectStyle>
-        <a:effectStyle>
-          <a:effectLst>
-            <a:outerShdw blurRad="40000" dist="23000" dir="5400000" rotWithShape="0">
-              <a:srgbClr val="000000">
-                <a:alpha val="35000"/>
-              </a:srgbClr>
-            </a:outerShdw>
-          </a:effectLst>
-          <a:scene3d>
-            <a:camera prst="orthographicFront">
-              <a:rot lat="0" lon="0" rev="0"/>
-            </a:camera>
-            <a:lightRig rig="threePt" dir="t">
-              <a:rot lat="0" lon="0" rev="1200000"/>
-            </a:lightRig>
-          </a:scene3d>
-          <a:sp3d>
-            <a:bevelT w="63500" h="25400"/>
-          </a:sp3d>
         </a:effectStyle>
       </a:effectStyleLst>
       <a:bgFillStyleLst>
         <a:solidFill>
           <a:schemeClr val="phClr"/>
         </a:solidFill>
+        <a:solidFill>
+          <a:schemeClr val="phClr">
+            <a:tint val="95000"/>
+            <a:satMod val="170000"/>
+          </a:schemeClr>
+        </a:solidFill>
         <a:gradFill rotWithShape="1">
           <a:gsLst>
             <a:gs pos="0">
               <a:schemeClr val="phClr">
-                <a:tint val="40000"/>
-                <a:satMod val="350000"/>
+                <a:tint val="93000"/>
+                <a:satMod val="150000"/>
+                <a:shade val="98000"/>
+                <a:lumMod val="102000"/>
               </a:schemeClr>
             </a:gs>
-            <a:gs pos="40000">
+            <a:gs pos="50000">
               <a:schemeClr val="phClr">
-                <a:tint val="45000"/>
-                <a:shade val="99000"/>
-                <a:satMod val="350000"/>
+                <a:tint val="98000"/>
+                <a:satMod val="130000"/>
+                <a:shade val="90000"/>
+                <a:lumMod val="103000"/>
               </a:schemeClr>
             </a:gs>
             <a:gs pos="100000">
               <a:schemeClr val="phClr">
-                <a:shade val="20000"/>
-                <a:satMod val="255000"/>
+                <a:shade val="63000"/>
+                <a:satMod val="120000"/>
               </a:schemeClr>
             </a:gs>
           </a:gsLst>
-          <a:path path="circle">
-            <a:fillToRect l="50000" t="-80000" r="50000" b="180000"/>
-          </a:path>
-        </a:gradFill>
-        <a:gradFill rotWithShape="1">
-          <a:gsLst>
-            <a:gs pos="0">
-              <a:schemeClr val="phClr">
-                <a:tint val="80000"/>
-                <a:satMod val="300000"/>
-              </a:schemeClr>
-            </a:gs>
-            <a:gs pos="100000">
-              <a:schemeClr val="phClr">
-                <a:shade val="30000"/>
-                <a:satMod val="200000"/>
-              </a:schemeClr>
-            </a:gs>
-          </a:gsLst>
-          <a:path path="circle">
-            <a:fillToRect l="50000" t="50000" r="50000" b="50000"/>
-          </a:path>
+          <a:lin ang="5400000" scaled="0"/>
         </a:gradFill>
       </a:bgFillStyleLst>
     </a:fmtScheme>
   </a:themeElements>
   <a:objectDefaults>
-    <a:spDef>
-      <a:spPr/>
-      <a:bodyPr/>
-      <a:lstStyle/>
-      <a:style>
-        <a:lnRef idx="1">
-          <a:schemeClr val="accent1"/>
-        </a:lnRef>
-        <a:fillRef idx="3">
-          <a:schemeClr val="accent1"/>
-        </a:fillRef>
-        <a:effectRef idx="2">
-          <a:schemeClr val="accent1"/>
-        </a:effectRef>
-        <a:fontRef idx="minor">
-          <a:schemeClr val="lt1"/>
-        </a:fontRef>
-      </a:style>
-    </a:spDef>
     <a:lnDef>
       <a:spPr/>
       <a:bodyPr/>
@@ -19797,5 +19910,10 @@
     </a:lnDef>
   </a:objectDefaults>
   <a:extraClrSchemeLst/>
+  <a:extLst>
+    <a:ext uri="{05A4C25C-085E-4340-85A3-A5531E510DB2}">
+      <thm15:themeFamily xmlns:thm15="http://schemas.microsoft.com/office/thememl/2012/main" name="Office Theme" id="{2E142A2C-CD16-42D6-873A-C26D2A0506FA}" vid="{1BDDFF52-6CD6-40A5-AB3C-68EB2F1E4D0A}"/>
+    </a:ext>
+  </a:extLst>
 </a:theme>
 </file>